--- a/LG-AI-Training-4hr.pptx
+++ b/LG-AI-Training-4hr.pptx
@@ -43,9 +43,10 @@
     <p:sldId id="291" r:id="rId37"/>
     <p:sldId id="292" r:id="rId38"/>
     <p:sldId id="293" r:id="rId39"/>
+    <p:sldId id="294" r:id="rId40"/>
   </p:sldIdLst>
   <p:notesMasterIdLst>
-    <p:notesMasterId r:id="rId40"/>
+    <p:notesMasterId r:id="rId41"/>
   </p:notesMasterIdLst>
   <p:sldSz cx="12191695" cy="6858000"/>
   <p:notesSz cx="6858000" cy="12191695"/>
@@ -539,7 +540,7 @@
           <a:p>
             <a:r>
               <a:rPr lang="en-US" dirty="0"/>
-              <a:t>Title. Plain language, live demos, one running example — the IM-500 machine.</a:t>
+              <a:t>Title. Plain language, live demos, one running example - the IM-500 machine.</a:t>
             </a:r>
             <a:endParaRPr lang="en-US" dirty="0"/>
           </a:p>
@@ -627,7 +628,7 @@
           <a:p>
             <a:r>
               <a:rPr lang="en-US" dirty="0"/>
-              <a:t>~37 min mark</a:t>
+              <a:t/>
             </a:r>
             <a:endParaRPr lang="en-US" dirty="0"/>
           </a:p>
@@ -715,7 +716,7 @@
           <a:p>
             <a:r>
               <a:rPr lang="en-US" dirty="0"/>
-              <a:t/>
+              <a:t>~37 min mark</a:t>
             </a:r>
             <a:endParaRPr lang="en-US" dirty="0"/>
           </a:p>
@@ -891,7 +892,7 @@
           <a:p>
             <a:r>
               <a:rPr lang="en-US" dirty="0"/>
-              <a:t>Answer only from your docs, with citations.</a:t>
+              <a:t/>
             </a:r>
             <a:endParaRPr lang="en-US" dirty="0"/>
           </a:p>
@@ -979,7 +980,7 @@
           <a:p>
             <a:r>
               <a:rPr lang="en-US" dirty="0"/>
-              <a:t/>
+              <a:t>Answer only from your docs, with citations.</a:t>
             </a:r>
             <a:endParaRPr lang="en-US" dirty="0"/>
           </a:p>
@@ -1067,7 +1068,7 @@
           <a:p>
             <a:r>
               <a:rPr lang="en-US" dirty="0"/>
-              <a:t>Honest "not in sources" before; full cited answer after.</a:t>
+              <a:t/>
             </a:r>
             <a:endParaRPr lang="en-US" dirty="0"/>
           </a:p>
@@ -1155,7 +1156,7 @@
           <a:p>
             <a:r>
               <a:rPr lang="en-US" dirty="0"/>
-              <a:t/>
+              <a:t>Honest "not in sources" before; full cited answer after.</a:t>
             </a:r>
             <a:endParaRPr lang="en-US" dirty="0"/>
           </a:p>
@@ -1243,7 +1244,7 @@
           <a:p>
             <a:r>
               <a:rPr lang="en-US" dirty="0"/>
-              <a:t/>
+              <a:t>Show all three states.</a:t>
             </a:r>
             <a:endParaRPr lang="en-US" dirty="0"/>
           </a:p>
@@ -1331,7 +1332,7 @@
           <a:p>
             <a:r>
               <a:rPr lang="en-US" dirty="0"/>
-              <a:t>~92 min mark</a:t>
+              <a:t/>
             </a:r>
             <a:endParaRPr lang="en-US" dirty="0"/>
           </a:p>
@@ -1419,7 +1420,7 @@
           <a:p>
             <a:r>
               <a:rPr lang="en-US" dirty="0"/>
-              <a:t/>
+              <a:t>~92 min mark</a:t>
             </a:r>
             <a:endParaRPr lang="en-US" dirty="0"/>
           </a:p>
@@ -1507,7 +1508,7 @@
           <a:p>
             <a:r>
               <a:rPr lang="en-US" dirty="0"/>
-              <a:t>Roadmap.</a:t>
+              <a:t>Ice-breaker. Read the room: mostly non-coders? go slower on tech, heavier on the 'why'. Keep it warm.</a:t>
             </a:r>
             <a:endParaRPr lang="en-US" dirty="0"/>
           </a:p>
@@ -1595,7 +1596,7 @@
           <a:p>
             <a:r>
               <a:rPr lang="en-US" dirty="0"/>
-              <a:t>A brain (LLM) + your data + a decision.</a:t>
+              <a:t/>
             </a:r>
             <a:endParaRPr lang="en-US" dirty="0"/>
           </a:p>
@@ -1683,7 +1684,7 @@
           <a:p>
             <a:r>
               <a:rPr lang="en-US" dirty="0"/>
-              <a:t/>
+              <a:t>A brain (LLM) + your data + a decision.</a:t>
             </a:r>
             <a:endParaRPr lang="en-US" dirty="0"/>
           </a:p>
@@ -1947,7 +1948,7 @@
           <a:p>
             <a:r>
               <a:rPr lang="en-US" dirty="0"/>
-              <a:t/>
+              <a:t>Build one agent live.</a:t>
             </a:r>
             <a:endParaRPr lang="en-US" dirty="0"/>
           </a:p>
@@ -2123,7 +2124,7 @@
           <a:p>
             <a:r>
               <a:rPr lang="en-US" dirty="0"/>
-              <a:t>~144 min mark</a:t>
+              <a:t/>
             </a:r>
             <a:endParaRPr lang="en-US" dirty="0"/>
           </a:p>
@@ -2211,7 +2212,7 @@
           <a:p>
             <a:r>
               <a:rPr lang="en-US" dirty="0"/>
-              <a:t/>
+              <a:t>~144 min mark</a:t>
             </a:r>
             <a:endParaRPr lang="en-US" dirty="0"/>
           </a:p>
@@ -2299,7 +2300,7 @@
           <a:p>
             <a:r>
               <a:rPr lang="en-US" dirty="0"/>
-              <a:t>A decision no single agent makes alone.</a:t>
+              <a:t/>
             </a:r>
             <a:endParaRPr lang="en-US" dirty="0"/>
           </a:p>
@@ -2387,7 +2388,7 @@
           <a:p>
             <a:r>
               <a:rPr lang="en-US" dirty="0"/>
-              <a:t>We build Sequential — simplest and most reliable.</a:t>
+              <a:t>A decision no single agent makes alone.</a:t>
             </a:r>
             <a:endParaRPr lang="en-US" dirty="0"/>
           </a:p>
@@ -2563,7 +2564,7 @@
           <a:p>
             <a:r>
               <a:rPr lang="en-US" dirty="0"/>
-              <a:t/>
+              <a:t>We build Sequential - simplest and most reliable.</a:t>
             </a:r>
             <a:endParaRPr lang="en-US" dirty="0"/>
           </a:p>
@@ -2651,7 +2652,7 @@
           <a:p>
             <a:r>
               <a:rPr lang="en-US" dirty="0"/>
-              <a:t/>
+              <a:t>Centrepiece demo.</a:t>
             </a:r>
             <a:endParaRPr lang="en-US" dirty="0"/>
           </a:p>
@@ -2915,7 +2916,7 @@
           <a:p>
             <a:r>
               <a:rPr lang="en-US" dirty="0"/>
-              <a:t>The agent doesn't just answer, it records.</a:t>
+              <a:t>Close the loop.</a:t>
             </a:r>
             <a:endParaRPr lang="en-US" dirty="0"/>
           </a:p>
@@ -3003,7 +3004,7 @@
           <a:p>
             <a:r>
               <a:rPr lang="en-US" dirty="0"/>
-              <a:t/>
+              <a:t>The agent doesn't just answer, it records.</a:t>
             </a:r>
             <a:endParaRPr lang="en-US" dirty="0"/>
           </a:p>
@@ -3309,6 +3310,94 @@
 </p:notes>
 </file>
 
+<file path=ppt/notesSlides/notesSlide39.xml><?xml version="1.0" encoding="utf-8"?>
+<p:notes xmlns:a="http://schemas.openxmlformats.org/drawingml/2006/main" xmlns:r="http://schemas.openxmlformats.org/officeDocument/2006/relationships" xmlns:p="http://schemas.openxmlformats.org/presentationml/2006/main">
+  <p:cSld>
+    <p:spTree>
+      <p:nvGrpSpPr>
+        <p:cNvPr id="1" name=""/>
+        <p:cNvGrpSpPr/>
+        <p:nvPr/>
+      </p:nvGrpSpPr>
+      <p:grpSpPr>
+        <a:xfrm>
+          <a:off x="0" y="0"/>
+          <a:ext cx="0" cy="0"/>
+          <a:chOff x="0" y="0"/>
+          <a:chExt cx="0" cy="0"/>
+        </a:xfrm>
+      </p:grpSpPr>
+      <p:sp>
+        <p:nvSpPr>
+          <p:cNvPr id="2" name="Slide Image Placeholder 1"/>
+          <p:cNvSpPr>
+            <a:spLocks noGrp="1" noRot="1" noChangeAspect="1"/>
+          </p:cNvSpPr>
+          <p:nvPr>
+            <p:ph type="sldImg"/>
+          </p:nvPr>
+        </p:nvSpPr>
+        <p:spPr/>
+      </p:sp>
+      <p:sp>
+        <p:nvSpPr>
+          <p:cNvPr id="3" name="Notes Placeholder 2"/>
+          <p:cNvSpPr>
+            <a:spLocks noGrp="1"/>
+          </p:cNvSpPr>
+          <p:nvPr>
+            <p:ph type="body" idx="1"/>
+          </p:nvPr>
+        </p:nvSpPr>
+        <p:spPr/>
+        <p:txBody>
+          <a:bodyPr/>
+          <a:lstStyle/>
+          <a:p>
+            <a:r>
+              <a:rPr lang="en-US" dirty="0"/>
+              <a:t/>
+            </a:r>
+            <a:endParaRPr lang="en-US" dirty="0"/>
+          </a:p>
+        </p:txBody>
+      </p:sp>
+      <p:sp>
+        <p:nvSpPr>
+          <p:cNvPr id="4" name="Slide Number Placeholder 3"/>
+          <p:cNvSpPr>
+            <a:spLocks noGrp="1"/>
+          </p:cNvSpPr>
+          <p:nvPr>
+            <p:ph type="sldNum" sz="quarter" idx="10"/>
+          </p:nvPr>
+        </p:nvSpPr>
+        <p:spPr/>
+        <p:txBody>
+          <a:bodyPr/>
+          <a:lstStyle/>
+          <a:p>
+            <a:fld id="{F7021451-1387-4CA6-816F-3879F97B5CBC}" type="slidenum">
+              <a:rPr lang="en-US"/>
+              <a:t>39</a:t>
+            </a:fld>
+            <a:endParaRPr lang="en-US"/>
+          </a:p>
+        </p:txBody>
+      </p:sp>
+    </p:spTree>
+    <p:extLst>
+      <p:ext uri="{BB962C8B-B14F-4D97-AF65-F5344CB8AC3E}">
+        <p14:creationId xmlns:p14="http://schemas.microsoft.com/office/powerpoint/2010/main" val="1024086991"/>
+      </p:ext>
+    </p:extLst>
+  </p:cSld>
+  <p:clrMapOvr>
+    <a:masterClrMapping/>
+  </p:clrMapOvr>
+</p:notes>
+</file>
+
 <file path=ppt/notesSlides/notesSlide4.xml><?xml version="1.0" encoding="utf-8"?>
 <p:notes xmlns:a="http://schemas.openxmlformats.org/drawingml/2006/main" xmlns:r="http://schemas.openxmlformats.org/officeDocument/2006/relationships" xmlns:p="http://schemas.openxmlformats.org/presentationml/2006/main">
   <p:cSld>
@@ -3355,7 +3444,7 @@
           <a:p>
             <a:r>
               <a:rPr lang="en-US" dirty="0"/>
-              <a:t>Spine of the session.</a:t>
+              <a:t>Set the tone: interactive, bilingual, judgement-free. The goal is understanding, not vocabulary.</a:t>
             </a:r>
             <a:endParaRPr lang="en-US" dirty="0"/>
           </a:p>
@@ -3443,7 +3532,7 @@
           <a:p>
             <a:r>
               <a:rPr lang="en-US" dirty="0"/>
-              <a:t>Ground the room in the machine first.</a:t>
+              <a:t>Spine of the session.</a:t>
             </a:r>
             <a:endParaRPr lang="en-US" dirty="0"/>
           </a:p>
@@ -3531,7 +3620,7 @@
           <a:p>
             <a:r>
               <a:rPr lang="en-US" dirty="0"/>
-              <a:t/>
+              <a:t>Ground the room in the machine first.</a:t>
             </a:r>
             <a:endParaRPr lang="en-US" dirty="0"/>
           </a:p>
@@ -3619,7 +3708,7 @@
           <a:p>
             <a:r>
               <a:rPr lang="en-US" dirty="0"/>
-              <a:t>Four levels, one machine.</a:t>
+              <a:t/>
             </a:r>
             <a:endParaRPr lang="en-US" dirty="0"/>
           </a:p>
@@ -3707,7 +3796,7 @@
           <a:p>
             <a:r>
               <a:rPr lang="en-US" dirty="0"/>
-              <a:t/>
+              <a:t>Four levels, one machine.</a:t>
             </a:r>
             <a:endParaRPr lang="en-US" dirty="0"/>
           </a:p>
@@ -4332,7 +4421,7 @@
                 <a:ea typeface="Calibri" pitchFamily="34" charset="-122"/>
                 <a:cs typeface="Calibri" pitchFamily="34" charset="-120"/>
               </a:rPr>
-              <a:t>A hands-on, 4-hour session — concepts, RAG, agents and orchestration, all no-code</a:t>
+              <a:t>A hands-on, 4-hour session - concepts, RAG, agents and orchestration, all no-code</a:t>
             </a:r>
             <a:endParaRPr lang="en-US" sz="1800" dirty="0"/>
           </a:p>
@@ -4509,8 +4598,8 @@
         </p:nvSpPr>
         <p:spPr>
           <a:xfrm>
-            <a:off x="822960" y="1965960"/>
-            <a:ext cx="10515600" cy="914400"/>
+            <a:off x="822960" y="1005840"/>
+            <a:ext cx="10515600" cy="365760"/>
           </a:xfrm>
           <a:prstGeom prst="rect">
             <a:avLst/>
@@ -4522,11 +4611,11 @@
           <a:bodyPr wrap="square" rtlCol="0" anchor="ctr"/>
           <a:lstStyle/>
           <a:p>
-            <a:pPr algn="ctr" indent="0" marL="0">
-              <a:buNone/>
-            </a:pPr>
-            <a:r>
-              <a:rPr lang="en-US" sz="6000" b="1" spc="800" kern="0" dirty="0">
+            <a:pPr indent="0" marL="0">
+              <a:buNone/>
+            </a:pPr>
+            <a:r>
+              <a:rPr lang="en-US" sz="1400" b="1" spc="400" kern="0" dirty="0">
                 <a:solidFill>
                   <a:srgbClr val="22D3EE"/>
                 </a:solidFill>
@@ -4534,9 +4623,9 @@
                 <a:ea typeface="Calibri" pitchFamily="34" charset="-122"/>
                 <a:cs typeface="Calibri" pitchFamily="34" charset="-120"/>
               </a:rPr>
-              <a:t>BREAK</a:t>
-            </a:r>
-            <a:endParaRPr lang="en-US" sz="6000" dirty="0"/>
+              <a:t>Q &amp; A</a:t>
+            </a:r>
+            <a:endParaRPr lang="en-US" sz="1400" dirty="0"/>
           </a:p>
         </p:txBody>
       </p:sp>
@@ -4548,8 +4637,8 @@
         </p:nvSpPr>
         <p:spPr>
           <a:xfrm>
-            <a:off x="822960" y="3154680"/>
-            <a:ext cx="10515600" cy="731520"/>
+            <a:off x="822960" y="1371600"/>
+            <a:ext cx="10515600" cy="1097280"/>
           </a:xfrm>
           <a:prstGeom prst="rect">
             <a:avLst/>
@@ -4561,11 +4650,11 @@
           <a:bodyPr wrap="square" rtlCol="0" anchor="ctr"/>
           <a:lstStyle/>
           <a:p>
-            <a:pPr algn="ctr" indent="0" marL="0">
-              <a:buNone/>
-            </a:pPr>
-            <a:r>
-              <a:rPr lang="en-US" sz="2800" dirty="0">
+            <a:pPr indent="0" marL="0">
+              <a:buNone/>
+            </a:pPr>
+            <a:r>
+              <a:rPr lang="en-US" sz="5000" b="1" dirty="0">
                 <a:solidFill>
                   <a:srgbClr val="E6EDF3"/>
                 </a:solidFill>
@@ -4573,9 +4662,9 @@
                 <a:ea typeface="Calibri" pitchFamily="34" charset="-122"/>
                 <a:cs typeface="Calibri" pitchFamily="34" charset="-120"/>
               </a:rPr>
-              <a:t>7 minutes</a:t>
-            </a:r>
-            <a:endParaRPr lang="en-US" sz="2800" dirty="0"/>
+              <a:t>Concepts - questions</a:t>
+            </a:r>
+            <a:endParaRPr lang="en-US" sz="5000" dirty="0"/>
           </a:p>
         </p:txBody>
       </p:sp>
@@ -4587,34 +4676,85 @@
         </p:nvSpPr>
         <p:spPr>
           <a:xfrm>
-            <a:off x="822960" y="3977640"/>
-            <a:ext cx="10515600" cy="548640"/>
-          </a:xfrm>
-          <a:prstGeom prst="rect">
-            <a:avLst/>
-          </a:prstGeom>
-          <a:noFill/>
-          <a:ln/>
-        </p:spPr>
-        <p:txBody>
-          <a:bodyPr wrap="square" rtlCol="0" anchor="ctr"/>
-          <a:lstStyle/>
-          <a:p>
-            <a:pPr algn="ctr" indent="0" marL="0">
-              <a:buNone/>
-            </a:pPr>
-            <a:r>
-              <a:rPr lang="en-US" sz="1700" i="1" dirty="0">
-                <a:solidFill>
-                  <a:srgbClr val="8592A3"/>
-                </a:solidFill>
-                <a:latin typeface="Calibri" pitchFamily="34" charset="0"/>
-                <a:ea typeface="Calibri" pitchFamily="34" charset="-122"/>
-                <a:cs typeface="Calibri" pitchFamily="34" charset="-120"/>
-              </a:rPr>
-              <a:t>We'll resume right on time.</a:t>
-            </a:r>
-            <a:endParaRPr lang="en-US" sz="1700" dirty="0"/>
+            <a:off x="822960" y="2788920"/>
+            <a:ext cx="10515600" cy="2011680"/>
+          </a:xfrm>
+          <a:prstGeom prst="rect">
+            <a:avLst/>
+          </a:prstGeom>
+          <a:noFill/>
+          <a:ln/>
+        </p:spPr>
+        <p:txBody>
+          <a:bodyPr wrap="square" rtlCol="0" anchor="t"/>
+          <a:lstStyle/>
+          <a:p>
+            <a:pPr indent="0" marL="0">
+              <a:buNone/>
+            </a:pPr>
+            <a:r>
+              <a:rPr lang="en-US" sz="2000" b="1" dirty="0">
+                <a:solidFill>
+                  <a:srgbClr val="22D3EE"/>
+                </a:solidFill>
+                <a:latin typeface="Calibri" pitchFamily="34" charset="0"/>
+                <a:ea typeface="Calibri" pitchFamily="34" charset="-122"/>
+                <a:cs typeface="Calibri" pitchFamily="34" charset="-120"/>
+              </a:rPr>
+              <a:t>▸  </a:t>
+            </a:r>
+            <a:pPr indent="0" marL="0">
+              <a:spcAft>
+                <a:spcPts val="1600"/>
+              </a:spcAft>
+              <a:buNone/>
+            </a:pPr>
+            <a:r>
+              <a:rPr lang="en-US" sz="2000" dirty="0">
+                <a:solidFill>
+                  <a:srgbClr val="E6EDF3"/>
+                </a:solidFill>
+                <a:latin typeface="Calibri" pitchFamily="34" charset="0"/>
+                <a:ea typeface="Calibri" pitchFamily="34" charset="-122"/>
+                <a:cs typeface="Calibri" pitchFamily="34" charset="-120"/>
+              </a:rPr>
+              <a:t>Which of your tasks today is really just automation?</a:t>
+            </a:r>
+            <a:endParaRPr lang="en-US" sz="2000" dirty="0"/>
+          </a:p>
+          <a:p>
+            <a:pPr indent="0" marL="0">
+              <a:buNone/>
+            </a:pPr>
+            <a:r>
+              <a:rPr lang="en-US" sz="2000" b="1" dirty="0">
+                <a:solidFill>
+                  <a:srgbClr val="22D3EE"/>
+                </a:solidFill>
+                <a:latin typeface="Calibri" pitchFamily="34" charset="0"/>
+                <a:ea typeface="Calibri" pitchFamily="34" charset="-122"/>
+                <a:cs typeface="Calibri" pitchFamily="34" charset="-120"/>
+              </a:rPr>
+              <a:t>▸  </a:t>
+            </a:r>
+            <a:pPr indent="0" marL="0">
+              <a:spcAft>
+                <a:spcPts val="1600"/>
+              </a:spcAft>
+              <a:buNone/>
+            </a:pPr>
+            <a:r>
+              <a:rPr lang="en-US" sz="2000" dirty="0">
+                <a:solidFill>
+                  <a:srgbClr val="E6EDF3"/>
+                </a:solidFill>
+                <a:latin typeface="Calibri" pitchFamily="34" charset="0"/>
+                <a:ea typeface="Calibri" pitchFamily="34" charset="-122"/>
+                <a:cs typeface="Calibri" pitchFamily="34" charset="-120"/>
+              </a:rPr>
+              <a:t>Where would a decision (an agent) actually help?</a:t>
+            </a:r>
+            <a:endParaRPr lang="en-US" sz="2000" dirty="0"/>
           </a:p>
         </p:txBody>
       </p:sp>
@@ -4697,8 +4837,8 @@
         </p:nvSpPr>
         <p:spPr>
           <a:xfrm>
-            <a:off x="749808" y="457200"/>
-            <a:ext cx="5486400" cy="2377440"/>
+            <a:off x="822960" y="1965960"/>
+            <a:ext cx="10515600" cy="914400"/>
           </a:xfrm>
           <a:prstGeom prst="rect">
             <a:avLst/>
@@ -4710,21 +4850,21 @@
           <a:bodyPr wrap="square" rtlCol="0" anchor="ctr"/>
           <a:lstStyle/>
           <a:p>
-            <a:pPr indent="0" marL="0">
-              <a:buNone/>
-            </a:pPr>
-            <a:r>
-              <a:rPr lang="en-US" sz="15000" b="1" dirty="0">
-                <a:solidFill>
-                  <a:srgbClr val="0E7490"/>
-                </a:solidFill>
-                <a:latin typeface="Calibri" pitchFamily="34" charset="0"/>
-                <a:ea typeface="Calibri" pitchFamily="34" charset="-122"/>
-                <a:cs typeface="Calibri" pitchFamily="34" charset="-120"/>
-              </a:rPr>
-              <a:t>02</a:t>
-            </a:r>
-            <a:endParaRPr lang="en-US" sz="15000" dirty="0"/>
+            <a:pPr algn="ctr" indent="0" marL="0">
+              <a:buNone/>
+            </a:pPr>
+            <a:r>
+              <a:rPr lang="en-US" sz="6000" b="1" spc="800" kern="0" dirty="0">
+                <a:solidFill>
+                  <a:srgbClr val="22D3EE"/>
+                </a:solidFill>
+                <a:latin typeface="Calibri" pitchFamily="34" charset="0"/>
+                <a:ea typeface="Calibri" pitchFamily="34" charset="-122"/>
+                <a:cs typeface="Calibri" pitchFamily="34" charset="-120"/>
+              </a:rPr>
+              <a:t>BREAK</a:t>
+            </a:r>
+            <a:endParaRPr lang="en-US" sz="6000" dirty="0"/>
           </a:p>
         </p:txBody>
       </p:sp>
@@ -4736,8 +4876,8 @@
         </p:nvSpPr>
         <p:spPr>
           <a:xfrm>
-            <a:off x="868680" y="3200400"/>
-            <a:ext cx="10515600" cy="365760"/>
+            <a:off x="822960" y="3154680"/>
+            <a:ext cx="10515600" cy="731520"/>
           </a:xfrm>
           <a:prstGeom prst="rect">
             <a:avLst/>
@@ -4749,21 +4889,21 @@
           <a:bodyPr wrap="square" rtlCol="0" anchor="ctr"/>
           <a:lstStyle/>
           <a:p>
-            <a:pPr indent="0" marL="0">
-              <a:buNone/>
-            </a:pPr>
-            <a:r>
-              <a:rPr lang="en-US" sz="1400" b="1" spc="400" kern="0" dirty="0">
-                <a:solidFill>
-                  <a:srgbClr val="22D3EE"/>
-                </a:solidFill>
-                <a:latin typeface="Calibri" pitchFamily="34" charset="0"/>
-                <a:ea typeface="Calibri" pitchFamily="34" charset="-122"/>
-                <a:cs typeface="Calibri" pitchFamily="34" charset="-120"/>
-              </a:rPr>
-              <a:t>SECTION 2</a:t>
-            </a:r>
-            <a:endParaRPr lang="en-US" sz="1400" dirty="0"/>
+            <a:pPr algn="ctr" indent="0" marL="0">
+              <a:buNone/>
+            </a:pPr>
+            <a:r>
+              <a:rPr lang="en-US" sz="2800" dirty="0">
+                <a:solidFill>
+                  <a:srgbClr val="E6EDF3"/>
+                </a:solidFill>
+                <a:latin typeface="Calibri" pitchFamily="34" charset="0"/>
+                <a:ea typeface="Calibri" pitchFamily="34" charset="-122"/>
+                <a:cs typeface="Calibri" pitchFamily="34" charset="-120"/>
+              </a:rPr>
+              <a:t>7 minutes</a:t>
+            </a:r>
+            <a:endParaRPr lang="en-US" sz="2800" dirty="0"/>
           </a:p>
         </p:txBody>
       </p:sp>
@@ -4775,8 +4915,8 @@
         </p:nvSpPr>
         <p:spPr>
           <a:xfrm>
-            <a:off x="822960" y="3566160"/>
-            <a:ext cx="10607040" cy="1005840"/>
+            <a:off x="822960" y="3977640"/>
+            <a:ext cx="10515600" cy="548640"/>
           </a:xfrm>
           <a:prstGeom prst="rect">
             <a:avLst/>
@@ -4788,46 +4928,7 @@
           <a:bodyPr wrap="square" rtlCol="0" anchor="ctr"/>
           <a:lstStyle/>
           <a:p>
-            <a:pPr indent="0" marL="0">
-              <a:buNone/>
-            </a:pPr>
-            <a:r>
-              <a:rPr lang="en-US" sz="4400" b="1" dirty="0">
-                <a:solidFill>
-                  <a:srgbClr val="E6EDF3"/>
-                </a:solidFill>
-                <a:latin typeface="Calibri" pitchFamily="34" charset="0"/>
-                <a:ea typeface="Calibri" pitchFamily="34" charset="-122"/>
-                <a:cs typeface="Calibri" pitchFamily="34" charset="-120"/>
-              </a:rPr>
-              <a:t>RAG</a:t>
-            </a:r>
-            <a:endParaRPr lang="en-US" sz="4400" dirty="0"/>
-          </a:p>
-        </p:txBody>
-      </p:sp>
-      <p:sp>
-        <p:nvSpPr>
-          <p:cNvPr id="6" name="Text 4"/>
-          <p:cNvSpPr/>
-          <p:nvPr/>
-        </p:nvSpPr>
-        <p:spPr>
-          <a:xfrm>
-            <a:off x="859536" y="4617720"/>
-            <a:ext cx="10241280" cy="548640"/>
-          </a:xfrm>
-          <a:prstGeom prst="rect">
-            <a:avLst/>
-          </a:prstGeom>
-          <a:noFill/>
-          <a:ln/>
-        </p:spPr>
-        <p:txBody>
-          <a:bodyPr wrap="square" rtlCol="0" anchor="ctr"/>
-          <a:lstStyle/>
-          <a:p>
-            <a:pPr indent="0" marL="0">
+            <a:pPr algn="ctr" indent="0" marL="0">
               <a:buNone/>
             </a:pPr>
             <a:r>
@@ -4839,7 +4940,7 @@
                 <a:ea typeface="Calibri" pitchFamily="34" charset="-122"/>
                 <a:cs typeface="Calibri" pitchFamily="34" charset="-120"/>
               </a:rPr>
-              <a:t>Making the AI answer from YOUR machine documents</a:t>
+              <a:t>We'll resume right on time.</a:t>
             </a:r>
             <a:endParaRPr lang="en-US" sz="1700" dirty="0"/>
           </a:p>
@@ -4924,7 +5025,46 @@
         </p:nvSpPr>
         <p:spPr>
           <a:xfrm>
-            <a:off x="822960" y="658368"/>
+            <a:off x="749808" y="457200"/>
+            <a:ext cx="5486400" cy="2377440"/>
+          </a:xfrm>
+          <a:prstGeom prst="rect">
+            <a:avLst/>
+          </a:prstGeom>
+          <a:noFill/>
+          <a:ln/>
+        </p:spPr>
+        <p:txBody>
+          <a:bodyPr wrap="square" rtlCol="0" anchor="ctr"/>
+          <a:lstStyle/>
+          <a:p>
+            <a:pPr indent="0" marL="0">
+              <a:buNone/>
+            </a:pPr>
+            <a:r>
+              <a:rPr lang="en-US" sz="15000" b="1" dirty="0">
+                <a:solidFill>
+                  <a:srgbClr val="0E7490"/>
+                </a:solidFill>
+                <a:latin typeface="Calibri" pitchFamily="34" charset="0"/>
+                <a:ea typeface="Calibri" pitchFamily="34" charset="-122"/>
+                <a:cs typeface="Calibri" pitchFamily="34" charset="-120"/>
+              </a:rPr>
+              <a:t>02</a:t>
+            </a:r>
+            <a:endParaRPr lang="en-US" sz="15000" dirty="0"/>
+          </a:p>
+        </p:txBody>
+      </p:sp>
+      <p:sp>
+        <p:nvSpPr>
+          <p:cNvPr id="4" name="Text 2"/>
+          <p:cNvSpPr/>
+          <p:nvPr/>
+        </p:nvSpPr>
+        <p:spPr>
+          <a:xfrm>
+            <a:off x="868680" y="3200400"/>
             <a:ext cx="10515600" cy="365760"/>
           </a:xfrm>
           <a:prstGeom prst="rect">
@@ -4949,7 +5089,7 @@
                 <a:ea typeface="Calibri" pitchFamily="34" charset="-122"/>
                 <a:cs typeface="Calibri" pitchFamily="34" charset="-120"/>
               </a:rPr>
-              <a:t>MODULE 2 · RAG</a:t>
+              <a:t>SECTION 2</a:t>
             </a:r>
             <a:endParaRPr lang="en-US" sz="1400" dirty="0"/>
           </a:p>
@@ -4957,14 +5097,14 @@
       </p:sp>
       <p:sp>
         <p:nvSpPr>
-          <p:cNvPr id="4" name="Text 2"/>
-          <p:cNvSpPr/>
-          <p:nvPr/>
-        </p:nvSpPr>
-        <p:spPr>
-          <a:xfrm>
-            <a:off x="822960" y="1078992"/>
-            <a:ext cx="10607040" cy="822960"/>
+          <p:cNvPr id="5" name="Text 3"/>
+          <p:cNvSpPr/>
+          <p:nvPr/>
+        </p:nvSpPr>
+        <p:spPr>
+          <a:xfrm>
+            <a:off x="822960" y="3566160"/>
+            <a:ext cx="10607040" cy="1005840"/>
           </a:xfrm>
           <a:prstGeom prst="rect">
             <a:avLst/>
@@ -4980,7 +5120,7 @@
               <a:buNone/>
             </a:pPr>
             <a:r>
-              <a:rPr lang="en-US" sz="3200" b="1" dirty="0">
+              <a:rPr lang="en-US" sz="4400" b="1" dirty="0">
                 <a:solidFill>
                   <a:srgbClr val="E6EDF3"/>
                 </a:solidFill>
@@ -4988,133 +5128,48 @@
                 <a:ea typeface="Calibri" pitchFamily="34" charset="-122"/>
                 <a:cs typeface="Calibri" pitchFamily="34" charset="-120"/>
               </a:rPr>
-              <a:t>The problem: a plain chatbot doesn't know your machine</a:t>
-            </a:r>
-            <a:endParaRPr lang="en-US" sz="3200" dirty="0"/>
-          </a:p>
-        </p:txBody>
-      </p:sp>
-      <p:sp>
-        <p:nvSpPr>
-          <p:cNvPr id="5" name="animList"/>
-          <p:cNvSpPr/>
-          <p:nvPr/>
-        </p:nvSpPr>
-        <p:spPr>
-          <a:xfrm>
-            <a:off x="822960" y="2148840"/>
-            <a:ext cx="10515600" cy="3840480"/>
-          </a:xfrm>
-          <a:prstGeom prst="rect">
-            <a:avLst/>
-          </a:prstGeom>
-          <a:noFill/>
-          <a:ln/>
-        </p:spPr>
-        <p:txBody>
-          <a:bodyPr wrap="square" rtlCol="0" anchor="t"/>
-          <a:lstStyle/>
-          <a:p>
-            <a:pPr indent="0" marL="0">
-              <a:buNone/>
-            </a:pPr>
-            <a:r>
-              <a:rPr lang="en-US" sz="2000" b="1" dirty="0">
-                <a:solidFill>
-                  <a:srgbClr val="22D3EE"/>
-                </a:solidFill>
-                <a:latin typeface="Calibri" pitchFamily="34" charset="0"/>
-                <a:ea typeface="Calibri" pitchFamily="34" charset="-122"/>
-                <a:cs typeface="Calibri" pitchFamily="34" charset="-120"/>
-              </a:rPr>
-              <a:t>▸  </a:t>
-            </a:r>
-            <a:pPr indent="0" marL="0">
-              <a:spcAft>
-                <a:spcPts val="1800"/>
-              </a:spcAft>
-              <a:buNone/>
-            </a:pPr>
-            <a:r>
-              <a:rPr lang="en-US" sz="2000" dirty="0">
-                <a:solidFill>
-                  <a:srgbClr val="E6EDF3"/>
-                </a:solidFill>
-                <a:latin typeface="Calibri" pitchFamily="34" charset="0"/>
-                <a:ea typeface="Calibri" pitchFamily="34" charset="-122"/>
-                <a:cs typeface="Calibri" pitchFamily="34" charset="-120"/>
-              </a:rPr>
-              <a:t>A raw AI model is smart, but it has never seen the IM-500 manuals.</a:t>
-            </a:r>
-            <a:endParaRPr lang="en-US" sz="2000" dirty="0"/>
-          </a:p>
-          <a:p>
-            <a:pPr indent="0" marL="0">
-              <a:buNone/>
-            </a:pPr>
-            <a:r>
-              <a:rPr lang="en-US" sz="2000" b="1" dirty="0">
-                <a:solidFill>
-                  <a:srgbClr val="22D3EE"/>
-                </a:solidFill>
-                <a:latin typeface="Calibri" pitchFamily="34" charset="0"/>
-                <a:ea typeface="Calibri" pitchFamily="34" charset="-122"/>
-                <a:cs typeface="Calibri" pitchFamily="34" charset="-120"/>
-              </a:rPr>
-              <a:t>▸  </a:t>
-            </a:r>
-            <a:pPr indent="0" marL="0">
-              <a:spcAft>
-                <a:spcPts val="1800"/>
-              </a:spcAft>
-              <a:buNone/>
-            </a:pPr>
-            <a:r>
-              <a:rPr lang="en-US" sz="2000" dirty="0">
-                <a:solidFill>
-                  <a:srgbClr val="E6EDF3"/>
-                </a:solidFill>
-                <a:latin typeface="Calibri" pitchFamily="34" charset="0"/>
-                <a:ea typeface="Calibri" pitchFamily="34" charset="-122"/>
-                <a:cs typeface="Calibri" pitchFamily="34" charset="-120"/>
-              </a:rPr>
-              <a:t>Ask it about servo error EN-77 and it guesses — a confident wrong answer.</a:t>
-            </a:r>
-            <a:endParaRPr lang="en-US" sz="2000" dirty="0"/>
-          </a:p>
-          <a:p>
-            <a:pPr indent="0" marL="0">
-              <a:buNone/>
-            </a:pPr>
-            <a:r>
-              <a:rPr lang="en-US" sz="2000" b="1" dirty="0">
-                <a:solidFill>
-                  <a:srgbClr val="22D3EE"/>
-                </a:solidFill>
-                <a:latin typeface="Calibri" pitchFamily="34" charset="0"/>
-                <a:ea typeface="Calibri" pitchFamily="34" charset="-122"/>
-                <a:cs typeface="Calibri" pitchFamily="34" charset="-120"/>
-              </a:rPr>
-              <a:t>▸  </a:t>
-            </a:r>
-            <a:pPr indent="0" marL="0">
-              <a:spcAft>
-                <a:spcPts val="1800"/>
-              </a:spcAft>
-              <a:buNone/>
-            </a:pPr>
-            <a:r>
-              <a:rPr lang="en-US" sz="2000" dirty="0">
-                <a:solidFill>
-                  <a:srgbClr val="E6EDF3"/>
-                </a:solidFill>
-                <a:latin typeface="Calibri" pitchFamily="34" charset="0"/>
-                <a:ea typeface="Calibri" pitchFamily="34" charset="-122"/>
-                <a:cs typeface="Calibri" pitchFamily="34" charset="-120"/>
-              </a:rPr>
-              <a:t>On the floor, a confident wrong answer can be worse than no answer.</a:t>
-            </a:r>
-            <a:endParaRPr lang="en-US" sz="2000" dirty="0"/>
+              <a:t>RAG</a:t>
+            </a:r>
+            <a:endParaRPr lang="en-US" sz="4400" dirty="0"/>
+          </a:p>
+        </p:txBody>
+      </p:sp>
+      <p:sp>
+        <p:nvSpPr>
+          <p:cNvPr id="6" name="Text 4"/>
+          <p:cNvSpPr/>
+          <p:nvPr/>
+        </p:nvSpPr>
+        <p:spPr>
+          <a:xfrm>
+            <a:off x="859536" y="4617720"/>
+            <a:ext cx="10241280" cy="548640"/>
+          </a:xfrm>
+          <a:prstGeom prst="rect">
+            <a:avLst/>
+          </a:prstGeom>
+          <a:noFill/>
+          <a:ln/>
+        </p:spPr>
+        <p:txBody>
+          <a:bodyPr wrap="square" rtlCol="0" anchor="ctr"/>
+          <a:lstStyle/>
+          <a:p>
+            <a:pPr indent="0" marL="0">
+              <a:buNone/>
+            </a:pPr>
+            <a:r>
+              <a:rPr lang="en-US" sz="1700" i="1" dirty="0">
+                <a:solidFill>
+                  <a:srgbClr val="8592A3"/>
+                </a:solidFill>
+                <a:latin typeface="Calibri" pitchFamily="34" charset="0"/>
+                <a:ea typeface="Calibri" pitchFamily="34" charset="-122"/>
+                <a:cs typeface="Calibri" pitchFamily="34" charset="-120"/>
+              </a:rPr>
+              <a:t>Making the AI answer from YOUR machine documents</a:t>
+            </a:r>
+            <a:endParaRPr lang="en-US" sz="1700" dirty="0"/>
           </a:p>
         </p:txBody>
       </p:sp>
@@ -5132,7 +5187,7 @@
     <p:bg>
       <p:bgPr>
         <a:solidFill>
-          <a:srgbClr val="0B0F15"/>
+          <a:srgbClr val="06090D"/>
         </a:solidFill>
       </p:bgPr>
     </p:bg>
@@ -5197,7 +5252,7 @@
         </p:nvSpPr>
         <p:spPr>
           <a:xfrm>
-            <a:off x="822960" y="566928"/>
+            <a:off x="822960" y="658368"/>
             <a:ext cx="10515600" cy="365760"/>
           </a:xfrm>
           <a:prstGeom prst="rect">
@@ -5236,8 +5291,8 @@
         </p:nvSpPr>
         <p:spPr>
           <a:xfrm>
-            <a:off x="822960" y="932688"/>
-            <a:ext cx="10607040" cy="640080"/>
+            <a:off x="822960" y="1078992"/>
+            <a:ext cx="10607040" cy="822960"/>
           </a:xfrm>
           <a:prstGeom prst="rect">
             <a:avLst/>
@@ -5253,7 +5308,7 @@
               <a:buNone/>
             </a:pPr>
             <a:r>
-              <a:rPr lang="en-US" sz="3000" b="1" dirty="0">
+              <a:rPr lang="en-US" sz="3200" b="1" dirty="0">
                 <a:solidFill>
                   <a:srgbClr val="E6EDF3"/>
                 </a:solidFill>
@@ -5261,62 +5316,136 @@
                 <a:ea typeface="Calibri" pitchFamily="34" charset="-122"/>
                 <a:cs typeface="Calibri" pitchFamily="34" charset="-120"/>
               </a:rPr>
-              <a:t>What RAG is</a:t>
-            </a:r>
-            <a:endParaRPr lang="en-US" sz="3000" dirty="0"/>
-          </a:p>
-        </p:txBody>
-      </p:sp>
-      <p:sp>
-        <p:nvSpPr>
-          <p:cNvPr id="5" name="Shape 3"/>
-          <p:cNvSpPr/>
-          <p:nvPr/>
-        </p:nvSpPr>
-        <p:spPr>
-          <a:xfrm>
-            <a:off x="822960" y="1755648"/>
-            <a:ext cx="10543032" cy="4297680"/>
-          </a:xfrm>
-          <a:prstGeom prst="roundRect">
-            <a:avLst>
-              <a:gd name="adj" fmla="val 1702"/>
-            </a:avLst>
-          </a:prstGeom>
-          <a:solidFill>
-            <a:srgbClr val="0B0F15"/>
-          </a:solidFill>
-          <a:ln w="15875">
-            <a:solidFill>
-              <a:srgbClr val="1F2937"/>
-            </a:solidFill>
-            <a:prstDash val="solid"/>
-          </a:ln>
-        </p:spPr>
-      </p:sp>
-      <p:pic>
-        <p:nvPicPr>
-          <p:cNvPr id="6" name="Image 0" descr="preencoded.png">    </p:cNvPr>
-          <p:cNvPicPr>
-            <a:picLocks noChangeAspect="1"/>
-          </p:cNvPicPr>
-          <p:nvPr/>
-        </p:nvPicPr>
-        <p:blipFill>
-          <a:blip r:embed="rId1"/>
-          <a:srcRect l="0" r="0" t="0" b="0"/>
-          <a:stretch/>
-        </p:blipFill>
-        <p:spPr>
-          <a:xfrm>
-            <a:off x="960120" y="1892808"/>
-            <a:ext cx="10268712" cy="4023360"/>
-          </a:xfrm>
-          <a:prstGeom prst="rect">
-            <a:avLst/>
-          </a:prstGeom>
-        </p:spPr>
-      </p:pic>
+              <a:t>The problem: a plain chatbot doesn't know your machine</a:t>
+            </a:r>
+            <a:endParaRPr lang="en-US" sz="3200" dirty="0"/>
+          </a:p>
+        </p:txBody>
+      </p:sp>
+      <p:sp>
+        <p:nvSpPr>
+          <p:cNvPr id="5" name="animList"/>
+          <p:cNvSpPr/>
+          <p:nvPr/>
+        </p:nvSpPr>
+        <p:spPr>
+          <a:xfrm>
+            <a:off x="822960" y="2148840"/>
+            <a:ext cx="10515600" cy="3657600"/>
+          </a:xfrm>
+          <a:prstGeom prst="rect">
+            <a:avLst/>
+          </a:prstGeom>
+          <a:noFill/>
+          <a:ln/>
+        </p:spPr>
+        <p:txBody>
+          <a:bodyPr wrap="square" rtlCol="0" anchor="t"/>
+          <a:lstStyle/>
+          <a:p>
+            <a:pPr indent="0" marL="0">
+              <a:buNone/>
+            </a:pPr>
+            <a:r>
+              <a:rPr lang="en-US" sz="2000" b="1" dirty="0">
+                <a:solidFill>
+                  <a:srgbClr val="22D3EE"/>
+                </a:solidFill>
+                <a:latin typeface="Calibri" pitchFamily="34" charset="0"/>
+                <a:ea typeface="Calibri" pitchFamily="34" charset="-122"/>
+                <a:cs typeface="Calibri" pitchFamily="34" charset="-120"/>
+              </a:rPr>
+              <a:t>▸  </a:t>
+            </a:r>
+            <a:pPr indent="0" marL="0">
+              <a:spcAft>
+                <a:spcPts val="1800"/>
+              </a:spcAft>
+              <a:buNone/>
+            </a:pPr>
+            <a:r>
+              <a:rPr lang="en-US" sz="2000" dirty="0">
+                <a:solidFill>
+                  <a:srgbClr val="E6EDF3"/>
+                </a:solidFill>
+                <a:latin typeface="Calibri" pitchFamily="34" charset="0"/>
+                <a:ea typeface="Calibri" pitchFamily="34" charset="-122"/>
+                <a:cs typeface="Calibri" pitchFamily="34" charset="-120"/>
+              </a:rPr>
+              <a:t>A raw AI model is smart, but it has never seen the IM-500 manuals.</a:t>
+            </a:r>
+            <a:endParaRPr lang="en-US" sz="2000" dirty="0"/>
+          </a:p>
+          <a:p>
+            <a:pPr indent="0" marL="0">
+              <a:buNone/>
+            </a:pPr>
+            <a:r>
+              <a:rPr lang="en-US" sz="2000" b="1" dirty="0">
+                <a:solidFill>
+                  <a:srgbClr val="22D3EE"/>
+                </a:solidFill>
+                <a:latin typeface="Calibri" pitchFamily="34" charset="0"/>
+                <a:ea typeface="Calibri" pitchFamily="34" charset="-122"/>
+                <a:cs typeface="Calibri" pitchFamily="34" charset="-120"/>
+              </a:rPr>
+              <a:t>▸  </a:t>
+            </a:r>
+            <a:pPr indent="0" marL="0">
+              <a:spcAft>
+                <a:spcPts val="1800"/>
+              </a:spcAft>
+              <a:buNone/>
+            </a:pPr>
+            <a:r>
+              <a:rPr lang="en-US" sz="2000" dirty="0">
+                <a:solidFill>
+                  <a:srgbClr val="E6EDF3"/>
+                </a:solidFill>
+                <a:latin typeface="Calibri" pitchFamily="34" charset="0"/>
+                <a:ea typeface="Calibri" pitchFamily="34" charset="-122"/>
+                <a:cs typeface="Calibri" pitchFamily="34" charset="-120"/>
+              </a:rPr>
+              <a:t>Ask it about servo error EN-77 and it guesses - a confident wrong answer.</a:t>
+            </a:r>
+            <a:endParaRPr lang="en-US" sz="2000" dirty="0"/>
+          </a:p>
+          <a:p>
+            <a:pPr indent="0" marL="0">
+              <a:buNone/>
+            </a:pPr>
+            <a:r>
+              <a:rPr lang="en-US" sz="2000" b="1" dirty="0">
+                <a:solidFill>
+                  <a:srgbClr val="22D3EE"/>
+                </a:solidFill>
+                <a:latin typeface="Calibri" pitchFamily="34" charset="0"/>
+                <a:ea typeface="Calibri" pitchFamily="34" charset="-122"/>
+                <a:cs typeface="Calibri" pitchFamily="34" charset="-120"/>
+              </a:rPr>
+              <a:t>▸  </a:t>
+            </a:r>
+            <a:pPr indent="0" marL="0">
+              <a:spcAft>
+                <a:spcPts val="1800"/>
+              </a:spcAft>
+              <a:buNone/>
+            </a:pPr>
+            <a:r>
+              <a:rPr lang="en-US" sz="2000" dirty="0">
+                <a:solidFill>
+                  <a:srgbClr val="E6EDF3"/>
+                </a:solidFill>
+                <a:latin typeface="Calibri" pitchFamily="34" charset="0"/>
+                <a:ea typeface="Calibri" pitchFamily="34" charset="-122"/>
+                <a:cs typeface="Calibri" pitchFamily="34" charset="-120"/>
+              </a:rPr>
+              <a:t>On the floor, a confident wrong answer can be worse than no answer.</a:t>
+            </a:r>
+            <a:endParaRPr lang="en-US" sz="2000" dirty="0"/>
+          </a:p>
+        </p:txBody>
+      </p:sp>
     </p:spTree>
   </p:cSld>
   <p:clrMapOvr>
@@ -5396,7 +5525,7 @@
         </p:nvSpPr>
         <p:spPr>
           <a:xfrm>
-            <a:off x="822960" y="658368"/>
+            <a:off x="822960" y="566928"/>
             <a:ext cx="10515600" cy="365760"/>
           </a:xfrm>
           <a:prstGeom prst="rect">
@@ -5421,7 +5550,7 @@
                 <a:ea typeface="Calibri" pitchFamily="34" charset="-122"/>
                 <a:cs typeface="Calibri" pitchFamily="34" charset="-120"/>
               </a:rPr>
-              <a:t>MODULE 2 · RAG · WHY NOTEBOOKLM</a:t>
+              <a:t>MODULE 2 · RAG</a:t>
             </a:r>
             <a:endParaRPr lang="en-US" sz="1400" dirty="0"/>
           </a:p>
@@ -5435,8 +5564,8 @@
         </p:nvSpPr>
         <p:spPr>
           <a:xfrm>
-            <a:off x="822960" y="1078992"/>
-            <a:ext cx="10607040" cy="822960"/>
+            <a:off x="822960" y="932688"/>
+            <a:ext cx="10607040" cy="640080"/>
           </a:xfrm>
           <a:prstGeom prst="rect">
             <a:avLst/>
@@ -5452,7 +5581,7 @@
               <a:buNone/>
             </a:pPr>
             <a:r>
-              <a:rPr lang="en-US" sz="3200" b="1" dirty="0">
+              <a:rPr lang="en-US" sz="3000" b="1" dirty="0">
                 <a:solidFill>
                   <a:srgbClr val="E6EDF3"/>
                 </a:solidFill>
@@ -5460,136 +5589,62 @@
                 <a:ea typeface="Calibri" pitchFamily="34" charset="-122"/>
                 <a:cs typeface="Calibri" pitchFamily="34" charset="-120"/>
               </a:rPr>
-              <a:t>Why we use NotebookLM</a:t>
-            </a:r>
-            <a:endParaRPr lang="en-US" sz="3200" dirty="0"/>
-          </a:p>
-        </p:txBody>
-      </p:sp>
-      <p:sp>
-        <p:nvSpPr>
-          <p:cNvPr id="5" name="animList"/>
-          <p:cNvSpPr/>
-          <p:nvPr/>
-        </p:nvSpPr>
-        <p:spPr>
-          <a:xfrm>
-            <a:off x="822960" y="2148840"/>
-            <a:ext cx="10515600" cy="3840480"/>
-          </a:xfrm>
-          <a:prstGeom prst="rect">
-            <a:avLst/>
-          </a:prstGeom>
-          <a:noFill/>
-          <a:ln/>
-        </p:spPr>
-        <p:txBody>
-          <a:bodyPr wrap="square" rtlCol="0" anchor="t"/>
-          <a:lstStyle/>
-          <a:p>
-            <a:pPr indent="0" marL="0">
-              <a:buNone/>
-            </a:pPr>
-            <a:r>
-              <a:rPr lang="en-US" sz="2000" b="1" dirty="0">
-                <a:solidFill>
-                  <a:srgbClr val="22D3EE"/>
-                </a:solidFill>
-                <a:latin typeface="Calibri" pitchFamily="34" charset="0"/>
-                <a:ea typeface="Calibri" pitchFamily="34" charset="-122"/>
-                <a:cs typeface="Calibri" pitchFamily="34" charset="-120"/>
-              </a:rPr>
-              <a:t>▸  </a:t>
-            </a:r>
-            <a:pPr indent="0" marL="0">
-              <a:spcAft>
-                <a:spcPts val="1800"/>
-              </a:spcAft>
-              <a:buNone/>
-            </a:pPr>
-            <a:r>
-              <a:rPr lang="en-US" sz="2000" dirty="0">
-                <a:solidFill>
-                  <a:srgbClr val="E6EDF3"/>
-                </a:solidFill>
-                <a:latin typeface="Calibri" pitchFamily="34" charset="0"/>
-                <a:ea typeface="Calibri" pitchFamily="34" charset="-122"/>
-                <a:cs typeface="Calibri" pitchFamily="34" charset="-120"/>
-              </a:rPr>
-              <a:t>No-code, free, Google-stable — upload PDFs and ask; no database to manage.</a:t>
-            </a:r>
-            <a:endParaRPr lang="en-US" sz="2000" dirty="0"/>
-          </a:p>
-          <a:p>
-            <a:pPr indent="0" marL="0">
-              <a:buNone/>
-            </a:pPr>
-            <a:r>
-              <a:rPr lang="en-US" sz="2000" b="1" dirty="0">
-                <a:solidFill>
-                  <a:srgbClr val="22D3EE"/>
-                </a:solidFill>
-                <a:latin typeface="Calibri" pitchFamily="34" charset="0"/>
-                <a:ea typeface="Calibri" pitchFamily="34" charset="-122"/>
-                <a:cs typeface="Calibri" pitchFamily="34" charset="-120"/>
-              </a:rPr>
-              <a:t>▸  </a:t>
-            </a:r>
-            <a:pPr indent="0" marL="0">
-              <a:spcAft>
-                <a:spcPts val="1800"/>
-              </a:spcAft>
-              <a:buNone/>
-            </a:pPr>
-            <a:r>
-              <a:rPr lang="en-US" sz="2000" dirty="0">
-                <a:solidFill>
-                  <a:srgbClr val="E6EDF3"/>
-                </a:solidFill>
-                <a:latin typeface="Calibri" pitchFamily="34" charset="0"/>
-                <a:ea typeface="Calibri" pitchFamily="34" charset="-122"/>
-                <a:cs typeface="Calibri" pitchFamily="34" charset="-120"/>
-              </a:rPr>
-              <a:t>Best "just works" tool for grounded answers in a live demo.</a:t>
-            </a:r>
-            <a:endParaRPr lang="en-US" sz="2000" dirty="0"/>
-          </a:p>
-          <a:p>
-            <a:pPr indent="0" marL="0">
-              <a:buNone/>
-            </a:pPr>
-            <a:r>
-              <a:rPr lang="en-US" sz="2000" b="1" dirty="0">
-                <a:solidFill>
-                  <a:srgbClr val="22D3EE"/>
-                </a:solidFill>
-                <a:latin typeface="Calibri" pitchFamily="34" charset="0"/>
-                <a:ea typeface="Calibri" pitchFamily="34" charset="-122"/>
-                <a:cs typeface="Calibri" pitchFamily="34" charset="-120"/>
-              </a:rPr>
-              <a:t>▸  </a:t>
-            </a:r>
-            <a:pPr indent="0" marL="0">
-              <a:spcAft>
-                <a:spcPts val="1800"/>
-              </a:spcAft>
-              <a:buNone/>
-            </a:pPr>
-            <a:r>
-              <a:rPr lang="en-US" sz="2000" dirty="0">
-                <a:solidFill>
-                  <a:srgbClr val="E6EDF3"/>
-                </a:solidFill>
-                <a:latin typeface="Calibri" pitchFamily="34" charset="0"/>
-                <a:ea typeface="Calibri" pitchFamily="34" charset="-122"/>
-                <a:cs typeface="Calibri" pitchFamily="34" charset="-120"/>
-              </a:rPr>
-              <a:t>Reliability first: fewer moving parts, nothing to break on the day.</a:t>
-            </a:r>
-            <a:endParaRPr lang="en-US" sz="2000" dirty="0"/>
-          </a:p>
-        </p:txBody>
-      </p:sp>
+              <a:t>What RAG is</a:t>
+            </a:r>
+            <a:endParaRPr lang="en-US" sz="3000" dirty="0"/>
+          </a:p>
+        </p:txBody>
+      </p:sp>
+      <p:sp>
+        <p:nvSpPr>
+          <p:cNvPr id="5" name="Shape 3"/>
+          <p:cNvSpPr/>
+          <p:nvPr/>
+        </p:nvSpPr>
+        <p:spPr>
+          <a:xfrm>
+            <a:off x="822960" y="1755648"/>
+            <a:ext cx="10543032" cy="4297680"/>
+          </a:xfrm>
+          <a:prstGeom prst="roundRect">
+            <a:avLst>
+              <a:gd name="adj" fmla="val 1702"/>
+            </a:avLst>
+          </a:prstGeom>
+          <a:solidFill>
+            <a:srgbClr val="0B0F15"/>
+          </a:solidFill>
+          <a:ln w="15875">
+            <a:solidFill>
+              <a:srgbClr val="1F2937"/>
+            </a:solidFill>
+            <a:prstDash val="solid"/>
+          </a:ln>
+        </p:spPr>
+      </p:sp>
+      <p:pic>
+        <p:nvPicPr>
+          <p:cNvPr id="6" name="Image 0" descr="preencoded.png">    </p:cNvPr>
+          <p:cNvPicPr>
+            <a:picLocks noChangeAspect="1"/>
+          </p:cNvPicPr>
+          <p:nvPr/>
+        </p:nvPicPr>
+        <p:blipFill>
+          <a:blip r:embed="rId1"/>
+          <a:srcRect l="0" r="0" t="0" b="0"/>
+          <a:stretch/>
+        </p:blipFill>
+        <p:spPr>
+          <a:xfrm>
+            <a:off x="960120" y="1892808"/>
+            <a:ext cx="10268712" cy="4023360"/>
+          </a:xfrm>
+          <a:prstGeom prst="rect">
+            <a:avLst/>
+          </a:prstGeom>
+        </p:spPr>
+      </p:pic>
     </p:spTree>
   </p:cSld>
   <p:clrMapOvr>
@@ -5669,7 +5724,7 @@
         </p:nvSpPr>
         <p:spPr>
           <a:xfrm>
-            <a:off x="822960" y="566928"/>
+            <a:off x="822960" y="658368"/>
             <a:ext cx="10515600" cy="365760"/>
           </a:xfrm>
           <a:prstGeom prst="rect">
@@ -5694,7 +5749,7 @@
                 <a:ea typeface="Calibri" pitchFamily="34" charset="-122"/>
                 <a:cs typeface="Calibri" pitchFamily="34" charset="-120"/>
               </a:rPr>
-              <a:t>MODULE 2 · RAG · DEMO</a:t>
+              <a:t>MODULE 2 · RAG · WHY NOTEBOOKLM</a:t>
             </a:r>
             <a:endParaRPr lang="en-US" sz="1400" dirty="0"/>
           </a:p>
@@ -5708,8 +5763,8 @@
         </p:nvSpPr>
         <p:spPr>
           <a:xfrm>
-            <a:off x="822960" y="932688"/>
-            <a:ext cx="10607040" cy="640080"/>
+            <a:off x="822960" y="1078992"/>
+            <a:ext cx="10607040" cy="822960"/>
           </a:xfrm>
           <a:prstGeom prst="rect">
             <a:avLst/>
@@ -5725,7 +5780,7 @@
               <a:buNone/>
             </a:pPr>
             <a:r>
-              <a:rPr lang="en-US" sz="3000" b="1" dirty="0">
+              <a:rPr lang="en-US" sz="3200" b="1" dirty="0">
                 <a:solidFill>
                   <a:srgbClr val="E6EDF3"/>
                 </a:solidFill>
@@ -5733,62 +5788,189 @@
                 <a:ea typeface="Calibri" pitchFamily="34" charset="-122"/>
                 <a:cs typeface="Calibri" pitchFamily="34" charset="-120"/>
               </a:rPr>
-              <a:t>Before vs After RAG — the EN-77 question</a:t>
-            </a:r>
-            <a:endParaRPr lang="en-US" sz="3000" dirty="0"/>
-          </a:p>
-        </p:txBody>
-      </p:sp>
-      <p:sp>
-        <p:nvSpPr>
-          <p:cNvPr id="5" name="Shape 3"/>
-          <p:cNvSpPr/>
-          <p:nvPr/>
-        </p:nvSpPr>
-        <p:spPr>
-          <a:xfrm>
-            <a:off x="822960" y="1755648"/>
-            <a:ext cx="10543032" cy="4297680"/>
-          </a:xfrm>
-          <a:prstGeom prst="roundRect">
-            <a:avLst>
-              <a:gd name="adj" fmla="val 1702"/>
-            </a:avLst>
-          </a:prstGeom>
-          <a:solidFill>
-            <a:srgbClr val="0B0F15"/>
-          </a:solidFill>
-          <a:ln w="15875">
-            <a:solidFill>
-              <a:srgbClr val="1F2937"/>
-            </a:solidFill>
-            <a:prstDash val="solid"/>
-          </a:ln>
-        </p:spPr>
-      </p:sp>
-      <p:pic>
-        <p:nvPicPr>
-          <p:cNvPr id="6" name="Image 0" descr="preencoded.png">    </p:cNvPr>
-          <p:cNvPicPr>
-            <a:picLocks noChangeAspect="1"/>
-          </p:cNvPicPr>
-          <p:nvPr/>
-        </p:nvPicPr>
-        <p:blipFill>
-          <a:blip r:embed="rId1"/>
-          <a:srcRect l="0" r="0" t="0" b="0"/>
-          <a:stretch/>
-        </p:blipFill>
-        <p:spPr>
-          <a:xfrm>
-            <a:off x="960120" y="1892808"/>
-            <a:ext cx="10268712" cy="4023360"/>
-          </a:xfrm>
-          <a:prstGeom prst="rect">
-            <a:avLst/>
-          </a:prstGeom>
-        </p:spPr>
-      </p:pic>
+              <a:t>Why we use NotebookLM</a:t>
+            </a:r>
+            <a:endParaRPr lang="en-US" sz="3200" dirty="0"/>
+          </a:p>
+        </p:txBody>
+      </p:sp>
+      <p:sp>
+        <p:nvSpPr>
+          <p:cNvPr id="5" name="animList"/>
+          <p:cNvSpPr/>
+          <p:nvPr/>
+        </p:nvSpPr>
+        <p:spPr>
+          <a:xfrm>
+            <a:off x="822960" y="2148840"/>
+            <a:ext cx="10515600" cy="3657600"/>
+          </a:xfrm>
+          <a:prstGeom prst="rect">
+            <a:avLst/>
+          </a:prstGeom>
+          <a:noFill/>
+          <a:ln/>
+        </p:spPr>
+        <p:txBody>
+          <a:bodyPr wrap="square" rtlCol="0" anchor="t"/>
+          <a:lstStyle/>
+          <a:p>
+            <a:pPr indent="0" marL="0">
+              <a:buNone/>
+            </a:pPr>
+            <a:r>
+              <a:rPr lang="en-US" sz="2000" b="1" dirty="0">
+                <a:solidFill>
+                  <a:srgbClr val="22D3EE"/>
+                </a:solidFill>
+                <a:latin typeface="Calibri" pitchFamily="34" charset="0"/>
+                <a:ea typeface="Calibri" pitchFamily="34" charset="-122"/>
+                <a:cs typeface="Calibri" pitchFamily="34" charset="-120"/>
+              </a:rPr>
+              <a:t>▸  </a:t>
+            </a:r>
+            <a:pPr indent="0" marL="0">
+              <a:spcAft>
+                <a:spcPts val="1600"/>
+              </a:spcAft>
+              <a:buNone/>
+            </a:pPr>
+            <a:r>
+              <a:rPr lang="en-US" sz="2000" dirty="0">
+                <a:solidFill>
+                  <a:srgbClr val="E6EDF3"/>
+                </a:solidFill>
+                <a:latin typeface="Calibri" pitchFamily="34" charset="0"/>
+                <a:ea typeface="Calibri" pitchFamily="34" charset="-122"/>
+                <a:cs typeface="Calibri" pitchFamily="34" charset="-120"/>
+              </a:rPr>
+              <a:t>No-code, free, Google-stable - upload PDFs and ask; no database to manage.</a:t>
+            </a:r>
+            <a:endParaRPr lang="en-US" sz="2000" dirty="0"/>
+          </a:p>
+          <a:p>
+            <a:pPr indent="0" marL="0">
+              <a:buNone/>
+            </a:pPr>
+            <a:r>
+              <a:rPr lang="en-US" sz="2000" b="1" dirty="0">
+                <a:solidFill>
+                  <a:srgbClr val="22D3EE"/>
+                </a:solidFill>
+                <a:latin typeface="Calibri" pitchFamily="34" charset="0"/>
+                <a:ea typeface="Calibri" pitchFamily="34" charset="-122"/>
+                <a:cs typeface="Calibri" pitchFamily="34" charset="-120"/>
+              </a:rPr>
+              <a:t>▸  </a:t>
+            </a:r>
+            <a:pPr indent="0" marL="0">
+              <a:spcAft>
+                <a:spcPts val="1600"/>
+              </a:spcAft>
+              <a:buNone/>
+            </a:pPr>
+            <a:r>
+              <a:rPr lang="en-US" sz="2000" dirty="0">
+                <a:solidFill>
+                  <a:srgbClr val="E6EDF3"/>
+                </a:solidFill>
+                <a:latin typeface="Calibri" pitchFamily="34" charset="0"/>
+                <a:ea typeface="Calibri" pitchFamily="34" charset="-122"/>
+                <a:cs typeface="Calibri" pitchFamily="34" charset="-120"/>
+              </a:rPr>
+              <a:t>Best "just works" tool for grounded answers in a live demo.</a:t>
+            </a:r>
+            <a:endParaRPr lang="en-US" sz="2000" dirty="0"/>
+          </a:p>
+          <a:p>
+            <a:pPr indent="0" marL="0">
+              <a:buNone/>
+            </a:pPr>
+            <a:r>
+              <a:rPr lang="en-US" sz="2000" b="1" dirty="0">
+                <a:solidFill>
+                  <a:srgbClr val="22D3EE"/>
+                </a:solidFill>
+                <a:latin typeface="Calibri" pitchFamily="34" charset="0"/>
+                <a:ea typeface="Calibri" pitchFamily="34" charset="-122"/>
+                <a:cs typeface="Calibri" pitchFamily="34" charset="-120"/>
+              </a:rPr>
+              <a:t>▸  </a:t>
+            </a:r>
+            <a:pPr indent="0" marL="0">
+              <a:spcAft>
+                <a:spcPts val="1600"/>
+              </a:spcAft>
+              <a:buNone/>
+            </a:pPr>
+            <a:r>
+              <a:rPr lang="en-US" sz="2000" dirty="0">
+                <a:solidFill>
+                  <a:srgbClr val="E6EDF3"/>
+                </a:solidFill>
+                <a:latin typeface="Calibri" pitchFamily="34" charset="0"/>
+                <a:ea typeface="Calibri" pitchFamily="34" charset="-122"/>
+                <a:cs typeface="Calibri" pitchFamily="34" charset="-120"/>
+              </a:rPr>
+              <a:t>Reliability first: fewer moving parts, nothing to break on the day.</a:t>
+            </a:r>
+            <a:endParaRPr lang="en-US" sz="2000" dirty="0"/>
+          </a:p>
+        </p:txBody>
+      </p:sp>
+      <p:sp>
+        <p:nvSpPr>
+          <p:cNvPr id="6" name="Text 4"/>
+          <p:cNvSpPr/>
+          <p:nvPr/>
+        </p:nvSpPr>
+        <p:spPr>
+          <a:xfrm>
+            <a:off x="822960" y="6053328"/>
+            <a:ext cx="10515600" cy="292608"/>
+          </a:xfrm>
+          <a:prstGeom prst="rect">
+            <a:avLst/>
+          </a:prstGeom>
+          <a:noFill/>
+          <a:ln/>
+        </p:spPr>
+        <p:txBody>
+          <a:bodyPr wrap="square" rtlCol="0" anchor="ctr"/>
+          <a:lstStyle/>
+          <a:p>
+            <a:pPr indent="0" marL="0">
+              <a:buNone/>
+            </a:pPr>
+            <a:r>
+              <a:rPr lang="en-US" sz="1400" b="1" dirty="0">
+                <a:solidFill>
+                  <a:srgbClr val="F59E0B"/>
+                </a:solidFill>
+                <a:latin typeface="Calibri" pitchFamily="34" charset="0"/>
+                <a:ea typeface="Calibri" pitchFamily="34" charset="-122"/>
+                <a:cs typeface="Calibri" pitchFamily="34" charset="-120"/>
+              </a:rPr>
+              <a:t>↗  </a:t>
+            </a:r>
+            <a:pPr indent="0" marL="0">
+              <a:buNone/>
+            </a:pPr>
+            <a:r>
+              <a:rPr lang="en-US" sz="1400" dirty="0">
+                <a:solidFill>
+                  <a:srgbClr val="22D3EE"/>
+                </a:solidFill>
+                <a:latin typeface="Calibri" pitchFamily="34" charset="0"/>
+                <a:ea typeface="Calibri" pitchFamily="34" charset="-122"/>
+                <a:cs typeface="Calibri" pitchFamily="34" charset="-120"/>
+              </a:rPr>
+              <a:t>notebooklm.google.com    ·    plain chatbot: gemini.google.com</a:t>
+            </a:r>
+            <a:endParaRPr lang="en-US" sz="1400" dirty="0"/>
+          </a:p>
+        </p:txBody>
+      </p:sp>
     </p:spTree>
   </p:cSld>
   <p:clrMapOvr>
@@ -5803,7 +5985,7 @@
     <p:bg>
       <p:bgPr>
         <a:solidFill>
-          <a:srgbClr val="06090D"/>
+          <a:srgbClr val="0B0F15"/>
         </a:solidFill>
       </p:bgPr>
     </p:bg>
@@ -5868,8 +6050,8 @@
         </p:nvSpPr>
         <p:spPr>
           <a:xfrm>
-            <a:off x="822960" y="658368"/>
-            <a:ext cx="10515600" cy="457200"/>
+            <a:off x="822960" y="566928"/>
+            <a:ext cx="10515600" cy="365760"/>
           </a:xfrm>
           <a:prstGeom prst="rect">
             <a:avLst/>
@@ -5885,17 +6067,17 @@
               <a:buNone/>
             </a:pPr>
             <a:r>
-              <a:rPr lang="en-US" sz="1800" b="1" spc="300" kern="0" dirty="0">
-                <a:solidFill>
-                  <a:srgbClr val="F59E0B"/>
-                </a:solidFill>
-                <a:latin typeface="Calibri" pitchFamily="34" charset="0"/>
-                <a:ea typeface="Calibri" pitchFamily="34" charset="-122"/>
-                <a:cs typeface="Calibri" pitchFamily="34" charset="-120"/>
-              </a:rPr>
-              <a:t>▶  LIVE DEMO</a:t>
-            </a:r>
-            <a:endParaRPr lang="en-US" sz="1800" dirty="0"/>
+              <a:rPr lang="en-US" sz="1400" b="1" spc="400" kern="0" dirty="0">
+                <a:solidFill>
+                  <a:srgbClr val="22D3EE"/>
+                </a:solidFill>
+                <a:latin typeface="Calibri" pitchFamily="34" charset="0"/>
+                <a:ea typeface="Calibri" pitchFamily="34" charset="-122"/>
+                <a:cs typeface="Calibri" pitchFamily="34" charset="-120"/>
+              </a:rPr>
+              <a:t>MODULE 2 · RAG · DEMO</a:t>
+            </a:r>
+            <a:endParaRPr lang="en-US" sz="1400" dirty="0"/>
           </a:p>
         </p:txBody>
       </p:sp>
@@ -5907,8 +6089,8 @@
         </p:nvSpPr>
         <p:spPr>
           <a:xfrm>
-            <a:off x="822960" y="1170432"/>
-            <a:ext cx="10607040" cy="822960"/>
+            <a:off x="822960" y="932688"/>
+            <a:ext cx="10607040" cy="640080"/>
           </a:xfrm>
           <a:prstGeom prst="rect">
             <a:avLst/>
@@ -5924,7 +6106,7 @@
               <a:buNone/>
             </a:pPr>
             <a:r>
-              <a:rPr lang="en-US" sz="3400" b="1" dirty="0">
+              <a:rPr lang="en-US" sz="3000" b="1" dirty="0">
                 <a:solidFill>
                   <a:srgbClr val="E6EDF3"/>
                 </a:solidFill>
@@ -5932,189 +6114,62 @@
                 <a:ea typeface="Calibri" pitchFamily="34" charset="-122"/>
                 <a:cs typeface="Calibri" pitchFamily="34" charset="-120"/>
               </a:rPr>
-              <a:t>Before vs After RAG, live</a:t>
-            </a:r>
-            <a:endParaRPr lang="en-US" sz="3400" dirty="0"/>
-          </a:p>
-        </p:txBody>
-      </p:sp>
-      <p:sp>
-        <p:nvSpPr>
-          <p:cNvPr id="5" name="Text 3"/>
-          <p:cNvSpPr/>
-          <p:nvPr/>
-        </p:nvSpPr>
-        <p:spPr>
-          <a:xfrm>
-            <a:off x="841248" y="2057400"/>
-            <a:ext cx="10515600" cy="457200"/>
-          </a:xfrm>
-          <a:prstGeom prst="rect">
-            <a:avLst/>
-          </a:prstGeom>
-          <a:noFill/>
-          <a:ln/>
-        </p:spPr>
-        <p:txBody>
-          <a:bodyPr wrap="square" rtlCol="0" anchor="ctr"/>
-          <a:lstStyle/>
-          <a:p>
-            <a:pPr indent="0" marL="0">
-              <a:buNone/>
-            </a:pPr>
-            <a:r>
-              <a:rPr lang="en-US" sz="1800" i="1" dirty="0">
-                <a:solidFill>
-                  <a:srgbClr val="AAB4C0"/>
-                </a:solidFill>
-                <a:latin typeface="Calibri" pitchFamily="34" charset="0"/>
-                <a:ea typeface="Calibri" pitchFamily="34" charset="-122"/>
-                <a:cs typeface="Calibri" pitchFamily="34" charset="-120"/>
-              </a:rPr>
-              <a:t>Leave the deck → </a:t>
-            </a:r>
-            <a:pPr indent="0" marL="0">
-              <a:buNone/>
-            </a:pPr>
-            <a:r>
-              <a:rPr lang="en-US" sz="1800" b="1" i="1" dirty="0">
-                <a:solidFill>
-                  <a:srgbClr val="22D3EE"/>
-                </a:solidFill>
-                <a:latin typeface="Calibri" pitchFamily="34" charset="0"/>
-                <a:ea typeface="Calibri" pitchFamily="34" charset="-122"/>
-                <a:cs typeface="Calibri" pitchFamily="34" charset="-120"/>
-              </a:rPr>
-              <a:t>NotebookLM</a:t>
-            </a:r>
-            <a:endParaRPr lang="en-US" sz="1800" dirty="0"/>
-          </a:p>
-        </p:txBody>
-      </p:sp>
-      <p:sp>
-        <p:nvSpPr>
-          <p:cNvPr id="6" name="Text 4"/>
-          <p:cNvSpPr/>
-          <p:nvPr/>
-        </p:nvSpPr>
-        <p:spPr>
-          <a:xfrm>
-            <a:off x="822960" y="2743200"/>
-            <a:ext cx="10515600" cy="3017520"/>
-          </a:xfrm>
-          <a:prstGeom prst="rect">
-            <a:avLst/>
-          </a:prstGeom>
-          <a:noFill/>
-          <a:ln/>
-        </p:spPr>
-        <p:txBody>
-          <a:bodyPr wrap="square" rtlCol="0" anchor="t"/>
-          <a:lstStyle/>
-          <a:p>
-            <a:pPr indent="0" marL="0">
-              <a:buNone/>
-            </a:pPr>
-            <a:r>
-              <a:rPr lang="en-US" sz="1900" b="1" dirty="0">
-                <a:solidFill>
-                  <a:srgbClr val="22D3EE"/>
-                </a:solidFill>
-                <a:latin typeface="Calibri" pitchFamily="34" charset="0"/>
-                <a:ea typeface="Calibri" pitchFamily="34" charset="-122"/>
-                <a:cs typeface="Calibri" pitchFamily="34" charset="-120"/>
-              </a:rPr>
-              <a:t>▸  </a:t>
-            </a:r>
-            <a:pPr indent="0" marL="0">
-              <a:spcAft>
-                <a:spcPts val="1400"/>
-              </a:spcAft>
-              <a:buNone/>
-            </a:pPr>
-            <a:r>
-              <a:rPr lang="en-US" sz="1900" dirty="0">
-                <a:solidFill>
-                  <a:srgbClr val="E6EDF3"/>
-                </a:solidFill>
-                <a:latin typeface="Calibri" pitchFamily="34" charset="0"/>
-                <a:ea typeface="Calibri" pitchFamily="34" charset="-122"/>
-                <a:cs typeface="Calibri" pitchFamily="34" charset="-120"/>
-              </a:rPr>
-              <a:t>Ask the EN-77 question in plain Gemini (no docs) → vague guess.</a:t>
-            </a:r>
-            <a:endParaRPr lang="en-US" sz="1900" dirty="0"/>
-          </a:p>
-          <a:p>
-            <a:pPr indent="0" marL="0">
-              <a:buNone/>
-            </a:pPr>
-            <a:r>
-              <a:rPr lang="en-US" sz="1900" b="1" dirty="0">
-                <a:solidFill>
-                  <a:srgbClr val="22D3EE"/>
-                </a:solidFill>
-                <a:latin typeface="Calibri" pitchFamily="34" charset="0"/>
-                <a:ea typeface="Calibri" pitchFamily="34" charset="-122"/>
-                <a:cs typeface="Calibri" pitchFamily="34" charset="-120"/>
-              </a:rPr>
-              <a:t>▸  </a:t>
-            </a:r>
-            <a:pPr indent="0" marL="0">
-              <a:spcAft>
-                <a:spcPts val="1400"/>
-              </a:spcAft>
-              <a:buNone/>
-            </a:pPr>
-            <a:r>
-              <a:rPr lang="en-US" sz="1900" dirty="0">
-                <a:solidFill>
-                  <a:srgbClr val="E6EDF3"/>
-                </a:solidFill>
-                <a:latin typeface="Calibri" pitchFamily="34" charset="0"/>
-                <a:ea typeface="Calibri" pitchFamily="34" charset="-122"/>
-                <a:cs typeface="Calibri" pitchFamily="34" charset="-120"/>
-              </a:rPr>
-              <a:t>Upload the IM-500 manuals + spare-parts catalog → ask again → "not in sources" for the addendum item.</a:t>
-            </a:r>
-            <a:endParaRPr lang="en-US" sz="1900" dirty="0"/>
-          </a:p>
-          <a:p>
-            <a:pPr indent="0" marL="0">
-              <a:buNone/>
-            </a:pPr>
-            <a:r>
-              <a:rPr lang="en-US" sz="1900" b="1" dirty="0">
-                <a:solidFill>
-                  <a:srgbClr val="22D3EE"/>
-                </a:solidFill>
-                <a:latin typeface="Calibri" pitchFamily="34" charset="0"/>
-                <a:ea typeface="Calibri" pitchFamily="34" charset="-122"/>
-                <a:cs typeface="Calibri" pitchFamily="34" charset="-120"/>
-              </a:rPr>
-              <a:t>▸  </a:t>
-            </a:r>
-            <a:pPr indent="0" marL="0">
-              <a:spcAft>
-                <a:spcPts val="1400"/>
-              </a:spcAft>
-              <a:buNone/>
-            </a:pPr>
-            <a:r>
-              <a:rPr lang="en-US" sz="1900" dirty="0">
-                <a:solidFill>
-                  <a:srgbClr val="E6EDF3"/>
-                </a:solidFill>
-                <a:latin typeface="Calibri" pitchFamily="34" charset="0"/>
-                <a:ea typeface="Calibri" pitchFamily="34" charset="-122"/>
-                <a:cs typeface="Calibri" pitchFamily="34" charset="-120"/>
-              </a:rPr>
-              <a:t>Add the EN-77 addendum PDF → ask again → exact part, 0 stock, 21-day lead, cited.</a:t>
-            </a:r>
-            <a:endParaRPr lang="en-US" sz="1900" dirty="0"/>
-          </a:p>
-        </p:txBody>
-      </p:sp>
+              <a:t>Before vs After RAG - the EN-77 question</a:t>
+            </a:r>
+            <a:endParaRPr lang="en-US" sz="3000" dirty="0"/>
+          </a:p>
+        </p:txBody>
+      </p:sp>
+      <p:sp>
+        <p:nvSpPr>
+          <p:cNvPr id="5" name="Shape 3"/>
+          <p:cNvSpPr/>
+          <p:nvPr/>
+        </p:nvSpPr>
+        <p:spPr>
+          <a:xfrm>
+            <a:off x="822960" y="1755648"/>
+            <a:ext cx="10543032" cy="4297680"/>
+          </a:xfrm>
+          <a:prstGeom prst="roundRect">
+            <a:avLst>
+              <a:gd name="adj" fmla="val 1702"/>
+            </a:avLst>
+          </a:prstGeom>
+          <a:solidFill>
+            <a:srgbClr val="0B0F15"/>
+          </a:solidFill>
+          <a:ln w="15875">
+            <a:solidFill>
+              <a:srgbClr val="1F2937"/>
+            </a:solidFill>
+            <a:prstDash val="solid"/>
+          </a:ln>
+        </p:spPr>
+      </p:sp>
+      <p:pic>
+        <p:nvPicPr>
+          <p:cNvPr id="6" name="Image 0" descr="preencoded.png">    </p:cNvPr>
+          <p:cNvPicPr>
+            <a:picLocks noChangeAspect="1"/>
+          </p:cNvPicPr>
+          <p:nvPr/>
+        </p:nvPicPr>
+        <p:blipFill>
+          <a:blip r:embed="rId1"/>
+          <a:srcRect l="0" r="0" t="0" b="0"/>
+          <a:stretch/>
+        </p:blipFill>
+        <p:spPr>
+          <a:xfrm>
+            <a:off x="960120" y="1892808"/>
+            <a:ext cx="10268712" cy="4023360"/>
+          </a:xfrm>
+          <a:prstGeom prst="rect">
+            <a:avLst/>
+          </a:prstGeom>
+        </p:spPr>
+      </p:pic>
     </p:spTree>
   </p:cSld>
   <p:clrMapOvr>
@@ -6194,8 +6249,8 @@
         </p:nvSpPr>
         <p:spPr>
           <a:xfrm>
-            <a:off x="822960" y="1005840"/>
-            <a:ext cx="10515600" cy="365760"/>
+            <a:off x="822960" y="658368"/>
+            <a:ext cx="10515600" cy="457200"/>
           </a:xfrm>
           <a:prstGeom prst="rect">
             <a:avLst/>
@@ -6211,7 +6266,99 @@
               <a:buNone/>
             </a:pPr>
             <a:r>
-              <a:rPr lang="en-US" sz="1400" b="1" spc="400" kern="0" dirty="0">
+              <a:rPr lang="en-US" sz="1800" b="1" spc="300" kern="0" dirty="0">
+                <a:solidFill>
+                  <a:srgbClr val="F59E0B"/>
+                </a:solidFill>
+                <a:latin typeface="Calibri" pitchFamily="34" charset="0"/>
+                <a:ea typeface="Calibri" pitchFamily="34" charset="-122"/>
+                <a:cs typeface="Calibri" pitchFamily="34" charset="-120"/>
+              </a:rPr>
+              <a:t>▶  LIVE DEMO</a:t>
+            </a:r>
+            <a:endParaRPr lang="en-US" sz="1800" dirty="0"/>
+          </a:p>
+        </p:txBody>
+      </p:sp>
+      <p:sp>
+        <p:nvSpPr>
+          <p:cNvPr id="4" name="Text 2"/>
+          <p:cNvSpPr/>
+          <p:nvPr/>
+        </p:nvSpPr>
+        <p:spPr>
+          <a:xfrm>
+            <a:off x="822960" y="1170432"/>
+            <a:ext cx="10607040" cy="822960"/>
+          </a:xfrm>
+          <a:prstGeom prst="rect">
+            <a:avLst/>
+          </a:prstGeom>
+          <a:noFill/>
+          <a:ln/>
+        </p:spPr>
+        <p:txBody>
+          <a:bodyPr wrap="square" rtlCol="0" anchor="ctr"/>
+          <a:lstStyle/>
+          <a:p>
+            <a:pPr indent="0" marL="0">
+              <a:buNone/>
+            </a:pPr>
+            <a:r>
+              <a:rPr lang="en-US" sz="3400" b="1" dirty="0">
+                <a:solidFill>
+                  <a:srgbClr val="E6EDF3"/>
+                </a:solidFill>
+                <a:latin typeface="Calibri" pitchFamily="34" charset="0"/>
+                <a:ea typeface="Calibri" pitchFamily="34" charset="-122"/>
+                <a:cs typeface="Calibri" pitchFamily="34" charset="-120"/>
+              </a:rPr>
+              <a:t>Before vs After RAG, live</a:t>
+            </a:r>
+            <a:endParaRPr lang="en-US" sz="3400" dirty="0"/>
+          </a:p>
+        </p:txBody>
+      </p:sp>
+      <p:sp>
+        <p:nvSpPr>
+          <p:cNvPr id="5" name="Text 3"/>
+          <p:cNvSpPr/>
+          <p:nvPr/>
+        </p:nvSpPr>
+        <p:spPr>
+          <a:xfrm>
+            <a:off x="841248" y="2057400"/>
+            <a:ext cx="10515600" cy="457200"/>
+          </a:xfrm>
+          <a:prstGeom prst="rect">
+            <a:avLst/>
+          </a:prstGeom>
+          <a:noFill/>
+          <a:ln/>
+        </p:spPr>
+        <p:txBody>
+          <a:bodyPr wrap="square" rtlCol="0" anchor="ctr"/>
+          <a:lstStyle/>
+          <a:p>
+            <a:pPr indent="0" marL="0">
+              <a:buNone/>
+            </a:pPr>
+            <a:r>
+              <a:rPr lang="en-US" sz="1800" i="1" dirty="0">
+                <a:solidFill>
+                  <a:srgbClr val="AAB4C0"/>
+                </a:solidFill>
+                <a:latin typeface="Calibri" pitchFamily="34" charset="0"/>
+                <a:ea typeface="Calibri" pitchFamily="34" charset="-122"/>
+                <a:cs typeface="Calibri" pitchFamily="34" charset="-120"/>
+              </a:rPr>
+              <a:t>Leave the deck → </a:t>
+            </a:r>
+            <a:pPr indent="0" marL="0">
+              <a:buNone/>
+            </a:pPr>
+            <a:r>
+              <a:rPr lang="en-US" sz="1800" b="1" i="1" dirty="0">
                 <a:solidFill>
                   <a:srgbClr val="22D3EE"/>
                 </a:solidFill>
@@ -6219,138 +6366,186 @@
                 <a:ea typeface="Calibri" pitchFamily="34" charset="-122"/>
                 <a:cs typeface="Calibri" pitchFamily="34" charset="-120"/>
               </a:rPr>
-              <a:t>Q &amp; A</a:t>
+              <a:t>NotebookLM</a:t>
+            </a:r>
+            <a:endParaRPr lang="en-US" sz="1800" dirty="0"/>
+          </a:p>
+        </p:txBody>
+      </p:sp>
+      <p:sp>
+        <p:nvSpPr>
+          <p:cNvPr id="6" name="Text 4"/>
+          <p:cNvSpPr/>
+          <p:nvPr/>
+        </p:nvSpPr>
+        <p:spPr>
+          <a:xfrm>
+            <a:off x="822960" y="2743200"/>
+            <a:ext cx="10515600" cy="2834640"/>
+          </a:xfrm>
+          <a:prstGeom prst="rect">
+            <a:avLst/>
+          </a:prstGeom>
+          <a:noFill/>
+          <a:ln/>
+        </p:spPr>
+        <p:txBody>
+          <a:bodyPr wrap="square" rtlCol="0" anchor="t"/>
+          <a:lstStyle/>
+          <a:p>
+            <a:pPr indent="0" marL="0">
+              <a:buNone/>
+            </a:pPr>
+            <a:r>
+              <a:rPr lang="en-US" sz="1900" b="1" dirty="0">
+                <a:solidFill>
+                  <a:srgbClr val="22D3EE"/>
+                </a:solidFill>
+                <a:latin typeface="Calibri" pitchFamily="34" charset="0"/>
+                <a:ea typeface="Calibri" pitchFamily="34" charset="-122"/>
+                <a:cs typeface="Calibri" pitchFamily="34" charset="-120"/>
+              </a:rPr>
+              <a:t>▸  </a:t>
+            </a:r>
+            <a:pPr indent="0" marL="0">
+              <a:spcAft>
+                <a:spcPts val="1400"/>
+              </a:spcAft>
+              <a:buNone/>
+            </a:pPr>
+            <a:r>
+              <a:rPr lang="en-US" sz="1900" dirty="0">
+                <a:solidFill>
+                  <a:srgbClr val="E6EDF3"/>
+                </a:solidFill>
+                <a:latin typeface="Calibri" pitchFamily="34" charset="0"/>
+                <a:ea typeface="Calibri" pitchFamily="34" charset="-122"/>
+                <a:cs typeface="Calibri" pitchFamily="34" charset="-120"/>
+              </a:rPr>
+              <a:t>Ask the EN-77 question in plain Gemini (no docs) -&gt; vague guess.</a:t>
+            </a:r>
+            <a:endParaRPr lang="en-US" sz="1900" dirty="0"/>
+          </a:p>
+          <a:p>
+            <a:pPr indent="0" marL="0">
+              <a:buNone/>
+            </a:pPr>
+            <a:r>
+              <a:rPr lang="en-US" sz="1900" b="1" dirty="0">
+                <a:solidFill>
+                  <a:srgbClr val="22D3EE"/>
+                </a:solidFill>
+                <a:latin typeface="Calibri" pitchFamily="34" charset="0"/>
+                <a:ea typeface="Calibri" pitchFamily="34" charset="-122"/>
+                <a:cs typeface="Calibri" pitchFamily="34" charset="-120"/>
+              </a:rPr>
+              <a:t>▸  </a:t>
+            </a:r>
+            <a:pPr indent="0" marL="0">
+              <a:spcAft>
+                <a:spcPts val="1400"/>
+              </a:spcAft>
+              <a:buNone/>
+            </a:pPr>
+            <a:r>
+              <a:rPr lang="en-US" sz="1900" dirty="0">
+                <a:solidFill>
+                  <a:srgbClr val="E6EDF3"/>
+                </a:solidFill>
+                <a:latin typeface="Calibri" pitchFamily="34" charset="0"/>
+                <a:ea typeface="Calibri" pitchFamily="34" charset="-122"/>
+                <a:cs typeface="Calibri" pitchFamily="34" charset="-120"/>
+              </a:rPr>
+              <a:t>Upload the IM-500 manuals + spare-parts catalog -&gt; ask again -&gt; "not in sources" for the addendum item.</a:t>
+            </a:r>
+            <a:endParaRPr lang="en-US" sz="1900" dirty="0"/>
+          </a:p>
+          <a:p>
+            <a:pPr indent="0" marL="0">
+              <a:buNone/>
+            </a:pPr>
+            <a:r>
+              <a:rPr lang="en-US" sz="1900" b="1" dirty="0">
+                <a:solidFill>
+                  <a:srgbClr val="22D3EE"/>
+                </a:solidFill>
+                <a:latin typeface="Calibri" pitchFamily="34" charset="0"/>
+                <a:ea typeface="Calibri" pitchFamily="34" charset="-122"/>
+                <a:cs typeface="Calibri" pitchFamily="34" charset="-120"/>
+              </a:rPr>
+              <a:t>▸  </a:t>
+            </a:r>
+            <a:pPr indent="0" marL="0">
+              <a:spcAft>
+                <a:spcPts val="1400"/>
+              </a:spcAft>
+              <a:buNone/>
+            </a:pPr>
+            <a:r>
+              <a:rPr lang="en-US" sz="1900" dirty="0">
+                <a:solidFill>
+                  <a:srgbClr val="E6EDF3"/>
+                </a:solidFill>
+                <a:latin typeface="Calibri" pitchFamily="34" charset="0"/>
+                <a:ea typeface="Calibri" pitchFamily="34" charset="-122"/>
+                <a:cs typeface="Calibri" pitchFamily="34" charset="-120"/>
+              </a:rPr>
+              <a:t>Add the EN-77 addendum PDF -&gt; ask again -&gt; exact part, 0 stock, 21-day lead, cited.</a:t>
+            </a:r>
+            <a:endParaRPr lang="en-US" sz="1900" dirty="0"/>
+          </a:p>
+        </p:txBody>
+      </p:sp>
+      <p:sp>
+        <p:nvSpPr>
+          <p:cNvPr id="7" name="Text 5"/>
+          <p:cNvSpPr/>
+          <p:nvPr/>
+        </p:nvSpPr>
+        <p:spPr>
+          <a:xfrm>
+            <a:off x="822960" y="5943600"/>
+            <a:ext cx="10515600" cy="292608"/>
+          </a:xfrm>
+          <a:prstGeom prst="rect">
+            <a:avLst/>
+          </a:prstGeom>
+          <a:noFill/>
+          <a:ln/>
+        </p:spPr>
+        <p:txBody>
+          <a:bodyPr wrap="square" rtlCol="0" anchor="ctr"/>
+          <a:lstStyle/>
+          <a:p>
+            <a:pPr indent="0" marL="0">
+              <a:buNone/>
+            </a:pPr>
+            <a:r>
+              <a:rPr lang="en-US" sz="1400" b="1" dirty="0">
+                <a:solidFill>
+                  <a:srgbClr val="F59E0B"/>
+                </a:solidFill>
+                <a:latin typeface="Calibri" pitchFamily="34" charset="0"/>
+                <a:ea typeface="Calibri" pitchFamily="34" charset="-122"/>
+                <a:cs typeface="Calibri" pitchFamily="34" charset="-120"/>
+              </a:rPr>
+              <a:t>↗  </a:t>
+            </a:r>
+            <a:pPr indent="0" marL="0">
+              <a:buNone/>
+            </a:pPr>
+            <a:r>
+              <a:rPr lang="en-US" sz="1400" dirty="0">
+                <a:solidFill>
+                  <a:srgbClr val="22D3EE"/>
+                </a:solidFill>
+                <a:latin typeface="Calibri" pitchFamily="34" charset="0"/>
+                <a:ea typeface="Calibri" pitchFamily="34" charset="-122"/>
+                <a:cs typeface="Calibri" pitchFamily="34" charset="-120"/>
+              </a:rPr>
+              <a:t>notebooklm.google.com</a:t>
             </a:r>
             <a:endParaRPr lang="en-US" sz="1400" dirty="0"/>
-          </a:p>
-        </p:txBody>
-      </p:sp>
-      <p:sp>
-        <p:nvSpPr>
-          <p:cNvPr id="4" name="Text 2"/>
-          <p:cNvSpPr/>
-          <p:nvPr/>
-        </p:nvSpPr>
-        <p:spPr>
-          <a:xfrm>
-            <a:off x="822960" y="1371600"/>
-            <a:ext cx="10515600" cy="1097280"/>
-          </a:xfrm>
-          <a:prstGeom prst="rect">
-            <a:avLst/>
-          </a:prstGeom>
-          <a:noFill/>
-          <a:ln/>
-        </p:spPr>
-        <p:txBody>
-          <a:bodyPr wrap="square" rtlCol="0" anchor="ctr"/>
-          <a:lstStyle/>
-          <a:p>
-            <a:pPr indent="0" marL="0">
-              <a:buNone/>
-            </a:pPr>
-            <a:r>
-              <a:rPr lang="en-US" sz="5000" b="1" dirty="0">
-                <a:solidFill>
-                  <a:srgbClr val="E6EDF3"/>
-                </a:solidFill>
-                <a:latin typeface="Calibri" pitchFamily="34" charset="0"/>
-                <a:ea typeface="Calibri" pitchFamily="34" charset="-122"/>
-                <a:cs typeface="Calibri" pitchFamily="34" charset="-120"/>
-              </a:rPr>
-              <a:t>RAG — questions</a:t>
-            </a:r>
-            <a:endParaRPr lang="en-US" sz="5000" dirty="0"/>
-          </a:p>
-        </p:txBody>
-      </p:sp>
-      <p:sp>
-        <p:nvSpPr>
-          <p:cNvPr id="5" name="Text 3"/>
-          <p:cNvSpPr/>
-          <p:nvPr/>
-        </p:nvSpPr>
-        <p:spPr>
-          <a:xfrm>
-            <a:off x="822960" y="2788920"/>
-            <a:ext cx="10515600" cy="2011680"/>
-          </a:xfrm>
-          <a:prstGeom prst="rect">
-            <a:avLst/>
-          </a:prstGeom>
-          <a:noFill/>
-          <a:ln/>
-        </p:spPr>
-        <p:txBody>
-          <a:bodyPr wrap="square" rtlCol="0" anchor="t"/>
-          <a:lstStyle/>
-          <a:p>
-            <a:pPr indent="0" marL="0">
-              <a:buNone/>
-            </a:pPr>
-            <a:r>
-              <a:rPr lang="en-US" sz="2000" b="1" dirty="0">
-                <a:solidFill>
-                  <a:srgbClr val="22D3EE"/>
-                </a:solidFill>
-                <a:latin typeface="Calibri" pitchFamily="34" charset="0"/>
-                <a:ea typeface="Calibri" pitchFamily="34" charset="-122"/>
-                <a:cs typeface="Calibri" pitchFamily="34" charset="-120"/>
-              </a:rPr>
-              <a:t>▸  </a:t>
-            </a:r>
-            <a:pPr indent="0" marL="0">
-              <a:spcAft>
-                <a:spcPts val="1600"/>
-              </a:spcAft>
-              <a:buNone/>
-            </a:pPr>
-            <a:r>
-              <a:rPr lang="en-US" sz="2000" dirty="0">
-                <a:solidFill>
-                  <a:srgbClr val="E6EDF3"/>
-                </a:solidFill>
-                <a:latin typeface="Calibri" pitchFamily="34" charset="0"/>
-                <a:ea typeface="Calibri" pitchFamily="34" charset="-122"/>
-                <a:cs typeface="Calibri" pitchFamily="34" charset="-120"/>
-              </a:rPr>
-              <a:t>Which documents would you point this at first?</a:t>
-            </a:r>
-            <a:endParaRPr lang="en-US" sz="2000" dirty="0"/>
-          </a:p>
-          <a:p>
-            <a:pPr indent="0" marL="0">
-              <a:buNone/>
-            </a:pPr>
-            <a:r>
-              <a:rPr lang="en-US" sz="2000" b="1" dirty="0">
-                <a:solidFill>
-                  <a:srgbClr val="22D3EE"/>
-                </a:solidFill>
-                <a:latin typeface="Calibri" pitchFamily="34" charset="0"/>
-                <a:ea typeface="Calibri" pitchFamily="34" charset="-122"/>
-                <a:cs typeface="Calibri" pitchFamily="34" charset="-120"/>
-              </a:rPr>
-              <a:t>▸  </a:t>
-            </a:r>
-            <a:pPr indent="0" marL="0">
-              <a:spcAft>
-                <a:spcPts val="1600"/>
-              </a:spcAft>
-              <a:buNone/>
-            </a:pPr>
-            <a:r>
-              <a:rPr lang="en-US" sz="2000" dirty="0">
-                <a:solidFill>
-                  <a:srgbClr val="E6EDF3"/>
-                </a:solidFill>
-                <a:latin typeface="Calibri" pitchFamily="34" charset="0"/>
-                <a:ea typeface="Calibri" pitchFamily="34" charset="-122"/>
-                <a:cs typeface="Calibri" pitchFamily="34" charset="-120"/>
-              </a:rPr>
-              <a:t>What shape is that data in today?</a:t>
-            </a:r>
-            <a:endParaRPr lang="en-US" sz="2000" dirty="0"/>
           </a:p>
         </p:txBody>
       </p:sp>
@@ -6433,8 +6628,8 @@
         </p:nvSpPr>
         <p:spPr>
           <a:xfrm>
-            <a:off x="822960" y="1965960"/>
-            <a:ext cx="10515600" cy="914400"/>
+            <a:off x="822960" y="1005840"/>
+            <a:ext cx="10515600" cy="365760"/>
           </a:xfrm>
           <a:prstGeom prst="rect">
             <a:avLst/>
@@ -6446,11 +6641,11 @@
           <a:bodyPr wrap="square" rtlCol="0" anchor="ctr"/>
           <a:lstStyle/>
           <a:p>
-            <a:pPr algn="ctr" indent="0" marL="0">
-              <a:buNone/>
-            </a:pPr>
-            <a:r>
-              <a:rPr lang="en-US" sz="6000" b="1" spc="800" kern="0" dirty="0">
+            <a:pPr indent="0" marL="0">
+              <a:buNone/>
+            </a:pPr>
+            <a:r>
+              <a:rPr lang="en-US" sz="1400" b="1" spc="400" kern="0" dirty="0">
                 <a:solidFill>
                   <a:srgbClr val="22D3EE"/>
                 </a:solidFill>
@@ -6458,9 +6653,9 @@
                 <a:ea typeface="Calibri" pitchFamily="34" charset="-122"/>
                 <a:cs typeface="Calibri" pitchFamily="34" charset="-120"/>
               </a:rPr>
-              <a:t>BREAK</a:t>
-            </a:r>
-            <a:endParaRPr lang="en-US" sz="6000" dirty="0"/>
+              <a:t>Q &amp; A</a:t>
+            </a:r>
+            <a:endParaRPr lang="en-US" sz="1400" dirty="0"/>
           </a:p>
         </p:txBody>
       </p:sp>
@@ -6472,8 +6667,8 @@
         </p:nvSpPr>
         <p:spPr>
           <a:xfrm>
-            <a:off x="822960" y="3154680"/>
-            <a:ext cx="10515600" cy="731520"/>
+            <a:off x="822960" y="1371600"/>
+            <a:ext cx="10515600" cy="1097280"/>
           </a:xfrm>
           <a:prstGeom prst="rect">
             <a:avLst/>
@@ -6485,11 +6680,11 @@
           <a:bodyPr wrap="square" rtlCol="0" anchor="ctr"/>
           <a:lstStyle/>
           <a:p>
-            <a:pPr algn="ctr" indent="0" marL="0">
-              <a:buNone/>
-            </a:pPr>
-            <a:r>
-              <a:rPr lang="en-US" sz="2800" dirty="0">
+            <a:pPr indent="0" marL="0">
+              <a:buNone/>
+            </a:pPr>
+            <a:r>
+              <a:rPr lang="en-US" sz="5000" b="1" dirty="0">
                 <a:solidFill>
                   <a:srgbClr val="E6EDF3"/>
                 </a:solidFill>
@@ -6497,9 +6692,9 @@
                 <a:ea typeface="Calibri" pitchFamily="34" charset="-122"/>
                 <a:cs typeface="Calibri" pitchFamily="34" charset="-120"/>
               </a:rPr>
-              <a:t>10 minutes</a:t>
-            </a:r>
-            <a:endParaRPr lang="en-US" sz="2800" dirty="0"/>
+              <a:t>RAG - questions</a:t>
+            </a:r>
+            <a:endParaRPr lang="en-US" sz="5000" dirty="0"/>
           </a:p>
         </p:txBody>
       </p:sp>
@@ -6511,34 +6706,85 @@
         </p:nvSpPr>
         <p:spPr>
           <a:xfrm>
-            <a:off x="822960" y="3977640"/>
-            <a:ext cx="10515600" cy="548640"/>
-          </a:xfrm>
-          <a:prstGeom prst="rect">
-            <a:avLst/>
-          </a:prstGeom>
-          <a:noFill/>
-          <a:ln/>
-        </p:spPr>
-        <p:txBody>
-          <a:bodyPr wrap="square" rtlCol="0" anchor="ctr"/>
-          <a:lstStyle/>
-          <a:p>
-            <a:pPr algn="ctr" indent="0" marL="0">
-              <a:buNone/>
-            </a:pPr>
-            <a:r>
-              <a:rPr lang="en-US" sz="1700" i="1" dirty="0">
-                <a:solidFill>
-                  <a:srgbClr val="8592A3"/>
-                </a:solidFill>
-                <a:latin typeface="Calibri" pitchFamily="34" charset="0"/>
-                <a:ea typeface="Calibri" pitchFamily="34" charset="-122"/>
-                <a:cs typeface="Calibri" pitchFamily="34" charset="-120"/>
-              </a:rPr>
-              <a:t>We'll resume right on time.</a:t>
-            </a:r>
-            <a:endParaRPr lang="en-US" sz="1700" dirty="0"/>
+            <a:off x="822960" y="2788920"/>
+            <a:ext cx="10515600" cy="2011680"/>
+          </a:xfrm>
+          <a:prstGeom prst="rect">
+            <a:avLst/>
+          </a:prstGeom>
+          <a:noFill/>
+          <a:ln/>
+        </p:spPr>
+        <p:txBody>
+          <a:bodyPr wrap="square" rtlCol="0" anchor="t"/>
+          <a:lstStyle/>
+          <a:p>
+            <a:pPr indent="0" marL="0">
+              <a:buNone/>
+            </a:pPr>
+            <a:r>
+              <a:rPr lang="en-US" sz="2000" b="1" dirty="0">
+                <a:solidFill>
+                  <a:srgbClr val="22D3EE"/>
+                </a:solidFill>
+                <a:latin typeface="Calibri" pitchFamily="34" charset="0"/>
+                <a:ea typeface="Calibri" pitchFamily="34" charset="-122"/>
+                <a:cs typeface="Calibri" pitchFamily="34" charset="-120"/>
+              </a:rPr>
+              <a:t>▸  </a:t>
+            </a:r>
+            <a:pPr indent="0" marL="0">
+              <a:spcAft>
+                <a:spcPts val="1600"/>
+              </a:spcAft>
+              <a:buNone/>
+            </a:pPr>
+            <a:r>
+              <a:rPr lang="en-US" sz="2000" dirty="0">
+                <a:solidFill>
+                  <a:srgbClr val="E6EDF3"/>
+                </a:solidFill>
+                <a:latin typeface="Calibri" pitchFamily="34" charset="0"/>
+                <a:ea typeface="Calibri" pitchFamily="34" charset="-122"/>
+                <a:cs typeface="Calibri" pitchFamily="34" charset="-120"/>
+              </a:rPr>
+              <a:t>Which documents would you point this at first?</a:t>
+            </a:r>
+            <a:endParaRPr lang="en-US" sz="2000" dirty="0"/>
+          </a:p>
+          <a:p>
+            <a:pPr indent="0" marL="0">
+              <a:buNone/>
+            </a:pPr>
+            <a:r>
+              <a:rPr lang="en-US" sz="2000" b="1" dirty="0">
+                <a:solidFill>
+                  <a:srgbClr val="22D3EE"/>
+                </a:solidFill>
+                <a:latin typeface="Calibri" pitchFamily="34" charset="0"/>
+                <a:ea typeface="Calibri" pitchFamily="34" charset="-122"/>
+                <a:cs typeface="Calibri" pitchFamily="34" charset="-120"/>
+              </a:rPr>
+              <a:t>▸  </a:t>
+            </a:r>
+            <a:pPr indent="0" marL="0">
+              <a:spcAft>
+                <a:spcPts val="1600"/>
+              </a:spcAft>
+              <a:buNone/>
+            </a:pPr>
+            <a:r>
+              <a:rPr lang="en-US" sz="2000" dirty="0">
+                <a:solidFill>
+                  <a:srgbClr val="E6EDF3"/>
+                </a:solidFill>
+                <a:latin typeface="Calibri" pitchFamily="34" charset="0"/>
+                <a:ea typeface="Calibri" pitchFamily="34" charset="-122"/>
+                <a:cs typeface="Calibri" pitchFamily="34" charset="-120"/>
+              </a:rPr>
+              <a:t>What shape is that data in today - PDFs, scans, spreadsheets?</a:t>
+            </a:r>
+            <a:endParaRPr lang="en-US" sz="2000" dirty="0"/>
           </a:p>
         </p:txBody>
       </p:sp>
@@ -6621,8 +6867,8 @@
         </p:nvSpPr>
         <p:spPr>
           <a:xfrm>
-            <a:off x="749808" y="457200"/>
-            <a:ext cx="5486400" cy="2377440"/>
+            <a:off x="822960" y="1965960"/>
+            <a:ext cx="10515600" cy="914400"/>
           </a:xfrm>
           <a:prstGeom prst="rect">
             <a:avLst/>
@@ -6634,21 +6880,21 @@
           <a:bodyPr wrap="square" rtlCol="0" anchor="ctr"/>
           <a:lstStyle/>
           <a:p>
-            <a:pPr indent="0" marL="0">
-              <a:buNone/>
-            </a:pPr>
-            <a:r>
-              <a:rPr lang="en-US" sz="15000" b="1" dirty="0">
-                <a:solidFill>
-                  <a:srgbClr val="0E7490"/>
-                </a:solidFill>
-                <a:latin typeface="Calibri" pitchFamily="34" charset="0"/>
-                <a:ea typeface="Calibri" pitchFamily="34" charset="-122"/>
-                <a:cs typeface="Calibri" pitchFamily="34" charset="-120"/>
-              </a:rPr>
-              <a:t>03</a:t>
-            </a:r>
-            <a:endParaRPr lang="en-US" sz="15000" dirty="0"/>
+            <a:pPr algn="ctr" indent="0" marL="0">
+              <a:buNone/>
+            </a:pPr>
+            <a:r>
+              <a:rPr lang="en-US" sz="6000" b="1" spc="800" kern="0" dirty="0">
+                <a:solidFill>
+                  <a:srgbClr val="22D3EE"/>
+                </a:solidFill>
+                <a:latin typeface="Calibri" pitchFamily="34" charset="0"/>
+                <a:ea typeface="Calibri" pitchFamily="34" charset="-122"/>
+                <a:cs typeface="Calibri" pitchFamily="34" charset="-120"/>
+              </a:rPr>
+              <a:t>BREAK</a:t>
+            </a:r>
+            <a:endParaRPr lang="en-US" sz="6000" dirty="0"/>
           </a:p>
         </p:txBody>
       </p:sp>
@@ -6660,8 +6906,8 @@
         </p:nvSpPr>
         <p:spPr>
           <a:xfrm>
-            <a:off x="868680" y="3200400"/>
-            <a:ext cx="10515600" cy="365760"/>
+            <a:off x="822960" y="3154680"/>
+            <a:ext cx="10515600" cy="731520"/>
           </a:xfrm>
           <a:prstGeom prst="rect">
             <a:avLst/>
@@ -6673,21 +6919,21 @@
           <a:bodyPr wrap="square" rtlCol="0" anchor="ctr"/>
           <a:lstStyle/>
           <a:p>
-            <a:pPr indent="0" marL="0">
-              <a:buNone/>
-            </a:pPr>
-            <a:r>
-              <a:rPr lang="en-US" sz="1400" b="1" spc="400" kern="0" dirty="0">
-                <a:solidFill>
-                  <a:srgbClr val="22D3EE"/>
-                </a:solidFill>
-                <a:latin typeface="Calibri" pitchFamily="34" charset="0"/>
-                <a:ea typeface="Calibri" pitchFamily="34" charset="-122"/>
-                <a:cs typeface="Calibri" pitchFamily="34" charset="-120"/>
-              </a:rPr>
-              <a:t>SECTION 3</a:t>
-            </a:r>
-            <a:endParaRPr lang="en-US" sz="1400" dirty="0"/>
+            <a:pPr algn="ctr" indent="0" marL="0">
+              <a:buNone/>
+            </a:pPr>
+            <a:r>
+              <a:rPr lang="en-US" sz="2800" dirty="0">
+                <a:solidFill>
+                  <a:srgbClr val="E6EDF3"/>
+                </a:solidFill>
+                <a:latin typeface="Calibri" pitchFamily="34" charset="0"/>
+                <a:ea typeface="Calibri" pitchFamily="34" charset="-122"/>
+                <a:cs typeface="Calibri" pitchFamily="34" charset="-120"/>
+              </a:rPr>
+              <a:t>10 minutes</a:t>
+            </a:r>
+            <a:endParaRPr lang="en-US" sz="2800" dirty="0"/>
           </a:p>
         </p:txBody>
       </p:sp>
@@ -6699,8 +6945,8 @@
         </p:nvSpPr>
         <p:spPr>
           <a:xfrm>
-            <a:off x="822960" y="3566160"/>
-            <a:ext cx="10607040" cy="1005840"/>
+            <a:off x="822960" y="3977640"/>
+            <a:ext cx="10515600" cy="548640"/>
           </a:xfrm>
           <a:prstGeom prst="rect">
             <a:avLst/>
@@ -6712,46 +6958,7 @@
           <a:bodyPr wrap="square" rtlCol="0" anchor="ctr"/>
           <a:lstStyle/>
           <a:p>
-            <a:pPr indent="0" marL="0">
-              <a:buNone/>
-            </a:pPr>
-            <a:r>
-              <a:rPr lang="en-US" sz="4400" b="1" dirty="0">
-                <a:solidFill>
-                  <a:srgbClr val="E6EDF3"/>
-                </a:solidFill>
-                <a:latin typeface="Calibri" pitchFamily="34" charset="0"/>
-                <a:ea typeface="Calibri" pitchFamily="34" charset="-122"/>
-                <a:cs typeface="Calibri" pitchFamily="34" charset="-120"/>
-              </a:rPr>
-              <a:t>Build an Agent</a:t>
-            </a:r>
-            <a:endParaRPr lang="en-US" sz="4400" dirty="0"/>
-          </a:p>
-        </p:txBody>
-      </p:sp>
-      <p:sp>
-        <p:nvSpPr>
-          <p:cNvPr id="6" name="Text 4"/>
-          <p:cNvSpPr/>
-          <p:nvPr/>
-        </p:nvSpPr>
-        <p:spPr>
-          <a:xfrm>
-            <a:off x="859536" y="4617720"/>
-            <a:ext cx="10241280" cy="548640"/>
-          </a:xfrm>
-          <a:prstGeom prst="rect">
-            <a:avLst/>
-          </a:prstGeom>
-          <a:noFill/>
-          <a:ln/>
-        </p:spPr>
-        <p:txBody>
-          <a:bodyPr wrap="square" rtlCol="0" anchor="ctr"/>
-          <a:lstStyle/>
-          <a:p>
-            <a:pPr indent="0" marL="0">
+            <a:pPr algn="ctr" indent="0" marL="0">
               <a:buNone/>
             </a:pPr>
             <a:r>
@@ -6763,7 +6970,7 @@
                 <a:ea typeface="Calibri" pitchFamily="34" charset="-122"/>
                 <a:cs typeface="Calibri" pitchFamily="34" charset="-120"/>
               </a:rPr>
-              <a:t>AI that reads, decides and takes action — no code</a:t>
+              <a:t>We'll resume right on time.</a:t>
             </a:r>
             <a:endParaRPr lang="en-US" sz="1700" dirty="0"/>
           </a:p>
@@ -6873,7 +7080,7 @@
                 <a:ea typeface="Calibri" pitchFamily="34" charset="-122"/>
                 <a:cs typeface="Calibri" pitchFamily="34" charset="-120"/>
               </a:rPr>
-              <a:t>TODAY IN 4 HOURS</a:t>
+              <a:t>FIRST - A FEW HANDS</a:t>
             </a:r>
             <a:endParaRPr lang="en-US" sz="1400" dirty="0"/>
           </a:p>
@@ -6912,7 +7119,7 @@
                 <a:ea typeface="Calibri" pitchFamily="34" charset="-122"/>
                 <a:cs typeface="Calibri" pitchFamily="34" charset="-120"/>
               </a:rPr>
-              <a:t>What we'll cover</a:t>
+              <a:t>Before we start</a:t>
             </a:r>
             <a:endParaRPr lang="en-US" sz="3200" dirty="0"/>
           </a:p>
@@ -6920,30 +7127,127 @@
       </p:sp>
       <p:sp>
         <p:nvSpPr>
-          <p:cNvPr id="5" name="Shape 3"/>
-          <p:cNvSpPr/>
-          <p:nvPr/>
-        </p:nvSpPr>
-        <p:spPr>
-          <a:xfrm>
-            <a:off x="822960" y="2468880"/>
-            <a:ext cx="1700784" cy="1188720"/>
-          </a:xfrm>
-          <a:prstGeom prst="roundRect">
-            <a:avLst>
-              <a:gd name="adj" fmla="val 6154"/>
-            </a:avLst>
-          </a:prstGeom>
-          <a:solidFill>
-            <a:srgbClr val="11161E"/>
-          </a:solidFill>
-          <a:ln w="19050">
-            <a:solidFill>
-              <a:srgbClr val="22D3EE"/>
-            </a:solidFill>
-            <a:prstDash val="solid"/>
-          </a:ln>
-        </p:spPr>
+          <p:cNvPr id="5" name="Text 3"/>
+          <p:cNvSpPr/>
+          <p:nvPr/>
+        </p:nvSpPr>
+        <p:spPr>
+          <a:xfrm>
+            <a:off x="822960" y="2148840"/>
+            <a:ext cx="10515600" cy="2743200"/>
+          </a:xfrm>
+          <a:prstGeom prst="rect">
+            <a:avLst/>
+          </a:prstGeom>
+          <a:noFill/>
+          <a:ln/>
+        </p:spPr>
+        <p:txBody>
+          <a:bodyPr wrap="square" rtlCol="0" anchor="t"/>
+          <a:lstStyle/>
+          <a:p>
+            <a:pPr indent="0" marL="0">
+              <a:buNone/>
+            </a:pPr>
+            <a:r>
+              <a:rPr lang="en-US" sz="2100" b="1" dirty="0">
+                <a:solidFill>
+                  <a:srgbClr val="22D3EE"/>
+                </a:solidFill>
+                <a:latin typeface="Calibri" pitchFamily="34" charset="0"/>
+                <a:ea typeface="Calibri" pitchFamily="34" charset="-122"/>
+                <a:cs typeface="Calibri" pitchFamily="34" charset="-120"/>
+              </a:rPr>
+              <a:t>▸  </a:t>
+            </a:r>
+            <a:pPr indent="0" marL="0">
+              <a:spcAft>
+                <a:spcPts val="1800"/>
+              </a:spcAft>
+              <a:buNone/>
+            </a:pPr>
+            <a:r>
+              <a:rPr lang="en-US" sz="2100" dirty="0">
+                <a:solidFill>
+                  <a:srgbClr val="E6EDF3"/>
+                </a:solidFill>
+                <a:latin typeface="Calibri" pitchFamily="34" charset="0"/>
+                <a:ea typeface="Calibri" pitchFamily="34" charset="-122"/>
+                <a:cs typeface="Calibri" pitchFamily="34" charset="-120"/>
+              </a:rPr>
+              <a:t>Who uses ChatGPT, Gemini or any AI chat - even once in a while?</a:t>
+            </a:r>
+            <a:endParaRPr lang="en-US" sz="2100" dirty="0"/>
+          </a:p>
+          <a:p>
+            <a:pPr indent="0" marL="0">
+              <a:buNone/>
+            </a:pPr>
+            <a:r>
+              <a:rPr lang="en-US" sz="2100" b="1" dirty="0">
+                <a:solidFill>
+                  <a:srgbClr val="22D3EE"/>
+                </a:solidFill>
+                <a:latin typeface="Calibri" pitchFamily="34" charset="0"/>
+                <a:ea typeface="Calibri" pitchFamily="34" charset="-122"/>
+                <a:cs typeface="Calibri" pitchFamily="34" charset="-120"/>
+              </a:rPr>
+              <a:t>▸  </a:t>
+            </a:r>
+            <a:pPr indent="0" marL="0">
+              <a:spcAft>
+                <a:spcPts val="1800"/>
+              </a:spcAft>
+              <a:buNone/>
+            </a:pPr>
+            <a:r>
+              <a:rPr lang="en-US" sz="2100" dirty="0">
+                <a:solidFill>
+                  <a:srgbClr val="E6EDF3"/>
+                </a:solidFill>
+                <a:latin typeface="Calibri" pitchFamily="34" charset="0"/>
+                <a:ea typeface="Calibri" pitchFamily="34" charset="-122"/>
+                <a:cs typeface="Calibri" pitchFamily="34" charset="-120"/>
+              </a:rPr>
+              <a:t>Who has ever written code or built an automation? (Excel formulas count!)</a:t>
+            </a:r>
+            <a:endParaRPr lang="en-US" sz="2100" dirty="0"/>
+          </a:p>
+          <a:p>
+            <a:pPr indent="0" marL="0">
+              <a:buNone/>
+            </a:pPr>
+            <a:r>
+              <a:rPr lang="en-US" sz="2100" b="1" dirty="0">
+                <a:solidFill>
+                  <a:srgbClr val="22D3EE"/>
+                </a:solidFill>
+                <a:latin typeface="Calibri" pitchFamily="34" charset="0"/>
+                <a:ea typeface="Calibri" pitchFamily="34" charset="-122"/>
+                <a:cs typeface="Calibri" pitchFamily="34" charset="-120"/>
+              </a:rPr>
+              <a:t>▸  </a:t>
+            </a:r>
+            <a:pPr indent="0" marL="0">
+              <a:spcAft>
+                <a:spcPts val="1800"/>
+              </a:spcAft>
+              <a:buNone/>
+            </a:pPr>
+            <a:r>
+              <a:rPr lang="en-US" sz="2100" dirty="0">
+                <a:solidFill>
+                  <a:srgbClr val="E6EDF3"/>
+                </a:solidFill>
+                <a:latin typeface="Calibri" pitchFamily="34" charset="0"/>
+                <a:ea typeface="Calibri" pitchFamily="34" charset="-122"/>
+                <a:cs typeface="Calibri" pitchFamily="34" charset="-120"/>
+              </a:rPr>
+              <a:t>Who has heard "AI agent" and wasn't quite sure what it means?</a:t>
+            </a:r>
+            <a:endParaRPr lang="en-US" sz="2100" dirty="0"/>
+          </a:p>
+        </p:txBody>
       </p:sp>
       <p:sp>
         <p:nvSpPr>
@@ -6953,8 +7257,8 @@
         </p:nvSpPr>
         <p:spPr>
           <a:xfrm>
-            <a:off x="896112" y="2560320"/>
-            <a:ext cx="1554480" cy="685800"/>
+            <a:off x="822960" y="5212080"/>
+            <a:ext cx="10515600" cy="548640"/>
           </a:xfrm>
           <a:prstGeom prst="rect">
             <a:avLst/>
@@ -6966,700 +7270,21 @@
           <a:bodyPr wrap="square" rtlCol="0" anchor="ctr"/>
           <a:lstStyle/>
           <a:p>
-            <a:pPr algn="ctr" indent="0" marL="0">
-              <a:buNone/>
-            </a:pPr>
-            <a:r>
-              <a:rPr lang="en-US" sz="1500" b="1" dirty="0">
-                <a:solidFill>
-                  <a:srgbClr val="E6EDF3"/>
-                </a:solidFill>
-                <a:latin typeface="Calibri" pitchFamily="34" charset="0"/>
-                <a:ea typeface="Calibri" pitchFamily="34" charset="-122"/>
-                <a:cs typeface="Calibri" pitchFamily="34" charset="-120"/>
-              </a:rPr>
-              <a:t>Concepts</a:t>
-            </a:r>
-            <a:endParaRPr lang="en-US" sz="1500" dirty="0"/>
-          </a:p>
-        </p:txBody>
-      </p:sp>
-      <p:sp>
-        <p:nvSpPr>
-          <p:cNvPr id="7" name="Text 5"/>
-          <p:cNvSpPr/>
-          <p:nvPr/>
-        </p:nvSpPr>
-        <p:spPr>
-          <a:xfrm>
-            <a:off x="896112" y="3182112"/>
-            <a:ext cx="1554480" cy="402336"/>
-          </a:xfrm>
-          <a:prstGeom prst="rect">
-            <a:avLst/>
-          </a:prstGeom>
-          <a:noFill/>
-          <a:ln/>
-        </p:spPr>
-        <p:txBody>
-          <a:bodyPr wrap="square" rtlCol="0" anchor="ctr"/>
-          <a:lstStyle/>
-          <a:p>
-            <a:pPr algn="ctr" indent="0" marL="0">
-              <a:buNone/>
-            </a:pPr>
-            <a:r>
-              <a:rPr lang="en-US" sz="1100" dirty="0">
-                <a:solidFill>
-                  <a:srgbClr val="AAB4C0"/>
-                </a:solidFill>
-                <a:latin typeface="Calibri" pitchFamily="34" charset="0"/>
-                <a:ea typeface="Calibri" pitchFamily="34" charset="-122"/>
-                <a:cs typeface="Calibri" pitchFamily="34" charset="-120"/>
-              </a:rPr>
-              <a:t>the words, plainly</a:t>
-            </a:r>
-            <a:endParaRPr lang="en-US" sz="1100" dirty="0"/>
-          </a:p>
-        </p:txBody>
-      </p:sp>
-      <p:sp>
-        <p:nvSpPr>
-          <p:cNvPr id="8" name="Shape 6"/>
-          <p:cNvSpPr/>
-          <p:nvPr/>
-        </p:nvSpPr>
-        <p:spPr>
-          <a:xfrm>
-            <a:off x="2587752" y="3063240"/>
-            <a:ext cx="374904" cy="0"/>
-          </a:xfrm>
-          <a:prstGeom prst="line">
-            <a:avLst/>
-          </a:prstGeom>
-          <a:noFill/>
-          <a:ln w="34925">
-            <a:solidFill>
-              <a:srgbClr val="22D3EE"/>
-            </a:solidFill>
-            <a:prstDash val="solid"/>
-            <a:tailEnd type="triangle"/>
-          </a:ln>
-        </p:spPr>
-      </p:sp>
-      <p:sp>
-        <p:nvSpPr>
-          <p:cNvPr id="9" name="Shape 7"/>
-          <p:cNvSpPr/>
-          <p:nvPr/>
-        </p:nvSpPr>
-        <p:spPr>
-          <a:xfrm>
-            <a:off x="3026664" y="2468880"/>
-            <a:ext cx="1700784" cy="1188720"/>
-          </a:xfrm>
-          <a:prstGeom prst="roundRect">
-            <a:avLst>
-              <a:gd name="adj" fmla="val 6154"/>
-            </a:avLst>
-          </a:prstGeom>
-          <a:solidFill>
-            <a:srgbClr val="11161E"/>
-          </a:solidFill>
-          <a:ln w="19050">
-            <a:solidFill>
-              <a:srgbClr val="22D3EE"/>
-            </a:solidFill>
-            <a:prstDash val="solid"/>
-          </a:ln>
-        </p:spPr>
-      </p:sp>
-      <p:sp>
-        <p:nvSpPr>
-          <p:cNvPr id="10" name="Text 8"/>
-          <p:cNvSpPr/>
-          <p:nvPr/>
-        </p:nvSpPr>
-        <p:spPr>
-          <a:xfrm>
-            <a:off x="3099816" y="2560320"/>
-            <a:ext cx="1554480" cy="685800"/>
-          </a:xfrm>
-          <a:prstGeom prst="rect">
-            <a:avLst/>
-          </a:prstGeom>
-          <a:noFill/>
-          <a:ln/>
-        </p:spPr>
-        <p:txBody>
-          <a:bodyPr wrap="square" rtlCol="0" anchor="ctr"/>
-          <a:lstStyle/>
-          <a:p>
-            <a:pPr algn="ctr" indent="0" marL="0">
-              <a:buNone/>
-            </a:pPr>
-            <a:r>
-              <a:rPr lang="en-US" sz="1500" b="1" dirty="0">
-                <a:solidFill>
-                  <a:srgbClr val="E6EDF3"/>
-                </a:solidFill>
-                <a:latin typeface="Calibri" pitchFamily="34" charset="0"/>
-                <a:ea typeface="Calibri" pitchFamily="34" charset="-122"/>
-                <a:cs typeface="Calibri" pitchFamily="34" charset="-120"/>
-              </a:rPr>
-              <a:t>RAG</a:t>
-            </a:r>
-            <a:endParaRPr lang="en-US" sz="1500" dirty="0"/>
-          </a:p>
-        </p:txBody>
-      </p:sp>
-      <p:sp>
-        <p:nvSpPr>
-          <p:cNvPr id="11" name="Text 9"/>
-          <p:cNvSpPr/>
-          <p:nvPr/>
-        </p:nvSpPr>
-        <p:spPr>
-          <a:xfrm>
-            <a:off x="3099816" y="3182112"/>
-            <a:ext cx="1554480" cy="402336"/>
-          </a:xfrm>
-          <a:prstGeom prst="rect">
-            <a:avLst/>
-          </a:prstGeom>
-          <a:noFill/>
-          <a:ln/>
-        </p:spPr>
-        <p:txBody>
-          <a:bodyPr wrap="square" rtlCol="0" anchor="ctr"/>
-          <a:lstStyle/>
-          <a:p>
-            <a:pPr algn="ctr" indent="0" marL="0">
-              <a:buNone/>
-            </a:pPr>
-            <a:r>
-              <a:rPr lang="en-US" sz="1100" dirty="0">
-                <a:solidFill>
-                  <a:srgbClr val="AAB4C0"/>
-                </a:solidFill>
-                <a:latin typeface="Calibri" pitchFamily="34" charset="0"/>
-                <a:ea typeface="Calibri" pitchFamily="34" charset="-122"/>
-                <a:cs typeface="Calibri" pitchFamily="34" charset="-120"/>
-              </a:rPr>
-              <a:t>AI + your docs</a:t>
-            </a:r>
-            <a:endParaRPr lang="en-US" sz="1100" dirty="0"/>
-          </a:p>
-        </p:txBody>
-      </p:sp>
-      <p:sp>
-        <p:nvSpPr>
-          <p:cNvPr id="12" name="Shape 10"/>
-          <p:cNvSpPr/>
-          <p:nvPr/>
-        </p:nvSpPr>
-        <p:spPr>
-          <a:xfrm>
-            <a:off x="4791456" y="3063240"/>
-            <a:ext cx="374904" cy="0"/>
-          </a:xfrm>
-          <a:prstGeom prst="line">
-            <a:avLst/>
-          </a:prstGeom>
-          <a:noFill/>
-          <a:ln w="34925">
-            <a:solidFill>
-              <a:srgbClr val="22D3EE"/>
-            </a:solidFill>
-            <a:prstDash val="solid"/>
-            <a:tailEnd type="triangle"/>
-          </a:ln>
-        </p:spPr>
-      </p:sp>
-      <p:sp>
-        <p:nvSpPr>
-          <p:cNvPr id="13" name="Shape 11"/>
-          <p:cNvSpPr/>
-          <p:nvPr/>
-        </p:nvSpPr>
-        <p:spPr>
-          <a:xfrm>
-            <a:off x="5230368" y="2468880"/>
-            <a:ext cx="1700784" cy="1188720"/>
-          </a:xfrm>
-          <a:prstGeom prst="roundRect">
-            <a:avLst>
-              <a:gd name="adj" fmla="val 6154"/>
-            </a:avLst>
-          </a:prstGeom>
-          <a:solidFill>
-            <a:srgbClr val="11161E"/>
-          </a:solidFill>
-          <a:ln w="19050">
-            <a:solidFill>
-              <a:srgbClr val="22D3EE"/>
-            </a:solidFill>
-            <a:prstDash val="solid"/>
-          </a:ln>
-        </p:spPr>
-      </p:sp>
-      <p:sp>
-        <p:nvSpPr>
-          <p:cNvPr id="14" name="Text 12"/>
-          <p:cNvSpPr/>
-          <p:nvPr/>
-        </p:nvSpPr>
-        <p:spPr>
-          <a:xfrm>
-            <a:off x="5303520" y="2560320"/>
-            <a:ext cx="1554480" cy="685800"/>
-          </a:xfrm>
-          <a:prstGeom prst="rect">
-            <a:avLst/>
-          </a:prstGeom>
-          <a:noFill/>
-          <a:ln/>
-        </p:spPr>
-        <p:txBody>
-          <a:bodyPr wrap="square" rtlCol="0" anchor="ctr"/>
-          <a:lstStyle/>
-          <a:p>
-            <a:pPr algn="ctr" indent="0" marL="0">
-              <a:buNone/>
-            </a:pPr>
-            <a:r>
-              <a:rPr lang="en-US" sz="1500" b="1" dirty="0">
-                <a:solidFill>
-                  <a:srgbClr val="E6EDF3"/>
-                </a:solidFill>
-                <a:latin typeface="Calibri" pitchFamily="34" charset="0"/>
-                <a:ea typeface="Calibri" pitchFamily="34" charset="-122"/>
-                <a:cs typeface="Calibri" pitchFamily="34" charset="-120"/>
-              </a:rPr>
-              <a:t>One Agent</a:t>
-            </a:r>
-            <a:endParaRPr lang="en-US" sz="1500" dirty="0"/>
-          </a:p>
-        </p:txBody>
-      </p:sp>
-      <p:sp>
-        <p:nvSpPr>
-          <p:cNvPr id="15" name="Text 13"/>
-          <p:cNvSpPr/>
-          <p:nvPr/>
-        </p:nvSpPr>
-        <p:spPr>
-          <a:xfrm>
-            <a:off x="5303520" y="3182112"/>
-            <a:ext cx="1554480" cy="402336"/>
-          </a:xfrm>
-          <a:prstGeom prst="rect">
-            <a:avLst/>
-          </a:prstGeom>
-          <a:noFill/>
-          <a:ln/>
-        </p:spPr>
-        <p:txBody>
-          <a:bodyPr wrap="square" rtlCol="0" anchor="ctr"/>
-          <a:lstStyle/>
-          <a:p>
-            <a:pPr algn="ctr" indent="0" marL="0">
-              <a:buNone/>
-            </a:pPr>
-            <a:r>
-              <a:rPr lang="en-US" sz="1100" dirty="0">
-                <a:solidFill>
-                  <a:srgbClr val="AAB4C0"/>
-                </a:solidFill>
-                <a:latin typeface="Calibri" pitchFamily="34" charset="0"/>
-                <a:ea typeface="Calibri" pitchFamily="34" charset="-122"/>
-                <a:cs typeface="Calibri" pitchFamily="34" charset="-120"/>
-              </a:rPr>
-              <a:t>AI that acts</a:t>
-            </a:r>
-            <a:endParaRPr lang="en-US" sz="1100" dirty="0"/>
-          </a:p>
-        </p:txBody>
-      </p:sp>
-      <p:sp>
-        <p:nvSpPr>
-          <p:cNvPr id="16" name="Shape 14"/>
-          <p:cNvSpPr/>
-          <p:nvPr/>
-        </p:nvSpPr>
-        <p:spPr>
-          <a:xfrm>
-            <a:off x="6995160" y="3063240"/>
-            <a:ext cx="374904" cy="0"/>
-          </a:xfrm>
-          <a:prstGeom prst="line">
-            <a:avLst/>
-          </a:prstGeom>
-          <a:noFill/>
-          <a:ln w="34925">
-            <a:solidFill>
-              <a:srgbClr val="22D3EE"/>
-            </a:solidFill>
-            <a:prstDash val="solid"/>
-            <a:tailEnd type="triangle"/>
-          </a:ln>
-        </p:spPr>
-      </p:sp>
-      <p:sp>
-        <p:nvSpPr>
-          <p:cNvPr id="17" name="Shape 15"/>
-          <p:cNvSpPr/>
-          <p:nvPr/>
-        </p:nvSpPr>
-        <p:spPr>
-          <a:xfrm>
-            <a:off x="7434072" y="2468880"/>
-            <a:ext cx="1700784" cy="1188720"/>
-          </a:xfrm>
-          <a:prstGeom prst="roundRect">
-            <a:avLst>
-              <a:gd name="adj" fmla="val 6154"/>
-            </a:avLst>
-          </a:prstGeom>
-          <a:solidFill>
-            <a:srgbClr val="11161E"/>
-          </a:solidFill>
-          <a:ln w="19050">
-            <a:solidFill>
-              <a:srgbClr val="22D3EE"/>
-            </a:solidFill>
-            <a:prstDash val="solid"/>
-          </a:ln>
-        </p:spPr>
-      </p:sp>
-      <p:sp>
-        <p:nvSpPr>
-          <p:cNvPr id="18" name="Text 16"/>
-          <p:cNvSpPr/>
-          <p:nvPr/>
-        </p:nvSpPr>
-        <p:spPr>
-          <a:xfrm>
-            <a:off x="7507224" y="2560320"/>
-            <a:ext cx="1554480" cy="685800"/>
-          </a:xfrm>
-          <a:prstGeom prst="rect">
-            <a:avLst/>
-          </a:prstGeom>
-          <a:noFill/>
-          <a:ln/>
-        </p:spPr>
-        <p:txBody>
-          <a:bodyPr wrap="square" rtlCol="0" anchor="ctr"/>
-          <a:lstStyle/>
-          <a:p>
-            <a:pPr algn="ctr" indent="0" marL="0">
-              <a:buNone/>
-            </a:pPr>
-            <a:r>
-              <a:rPr lang="en-US" sz="1500" b="1" dirty="0">
-                <a:solidFill>
-                  <a:srgbClr val="E6EDF3"/>
-                </a:solidFill>
-                <a:latin typeface="Calibri" pitchFamily="34" charset="0"/>
-                <a:ea typeface="Calibri" pitchFamily="34" charset="-122"/>
-                <a:cs typeface="Calibri" pitchFamily="34" charset="-120"/>
-              </a:rPr>
-              <a:t>Orchestration</a:t>
-            </a:r>
-            <a:endParaRPr lang="en-US" sz="1500" dirty="0"/>
-          </a:p>
-        </p:txBody>
-      </p:sp>
-      <p:sp>
-        <p:nvSpPr>
-          <p:cNvPr id="19" name="Text 17"/>
-          <p:cNvSpPr/>
-          <p:nvPr/>
-        </p:nvSpPr>
-        <p:spPr>
-          <a:xfrm>
-            <a:off x="7507224" y="3182112"/>
-            <a:ext cx="1554480" cy="402336"/>
-          </a:xfrm>
-          <a:prstGeom prst="rect">
-            <a:avLst/>
-          </a:prstGeom>
-          <a:noFill/>
-          <a:ln/>
-        </p:spPr>
-        <p:txBody>
-          <a:bodyPr wrap="square" rtlCol="0" anchor="ctr"/>
-          <a:lstStyle/>
-          <a:p>
-            <a:pPr algn="ctr" indent="0" marL="0">
-              <a:buNone/>
-            </a:pPr>
-            <a:r>
-              <a:rPr lang="en-US" sz="1100" dirty="0">
-                <a:solidFill>
-                  <a:srgbClr val="AAB4C0"/>
-                </a:solidFill>
-                <a:latin typeface="Calibri" pitchFamily="34" charset="0"/>
-                <a:ea typeface="Calibri" pitchFamily="34" charset="-122"/>
-                <a:cs typeface="Calibri" pitchFamily="34" charset="-120"/>
-              </a:rPr>
-              <a:t>agents together</a:t>
-            </a:r>
-            <a:endParaRPr lang="en-US" sz="1100" dirty="0"/>
-          </a:p>
-        </p:txBody>
-      </p:sp>
-      <p:sp>
-        <p:nvSpPr>
-          <p:cNvPr id="20" name="Shape 18"/>
-          <p:cNvSpPr/>
-          <p:nvPr/>
-        </p:nvSpPr>
-        <p:spPr>
-          <a:xfrm>
-            <a:off x="9198864" y="3063240"/>
-            <a:ext cx="374904" cy="0"/>
-          </a:xfrm>
-          <a:prstGeom prst="line">
-            <a:avLst/>
-          </a:prstGeom>
-          <a:noFill/>
-          <a:ln w="34925">
-            <a:solidFill>
-              <a:srgbClr val="22D3EE"/>
-            </a:solidFill>
-            <a:prstDash val="solid"/>
-            <a:tailEnd type="triangle"/>
-          </a:ln>
-        </p:spPr>
-      </p:sp>
-      <p:sp>
-        <p:nvSpPr>
-          <p:cNvPr id="21" name="Shape 19"/>
-          <p:cNvSpPr/>
-          <p:nvPr/>
-        </p:nvSpPr>
-        <p:spPr>
-          <a:xfrm>
-            <a:off x="9637776" y="2468880"/>
-            <a:ext cx="1700784" cy="1188720"/>
-          </a:xfrm>
-          <a:prstGeom prst="roundRect">
-            <a:avLst>
-              <a:gd name="adj" fmla="val 6154"/>
-            </a:avLst>
-          </a:prstGeom>
-          <a:solidFill>
-            <a:srgbClr val="11161E"/>
-          </a:solidFill>
-          <a:ln w="19050">
-            <a:solidFill>
-              <a:srgbClr val="22D3EE"/>
-            </a:solidFill>
-            <a:prstDash val="solid"/>
-          </a:ln>
-        </p:spPr>
-      </p:sp>
-      <p:sp>
-        <p:nvSpPr>
-          <p:cNvPr id="22" name="Text 20"/>
-          <p:cNvSpPr/>
-          <p:nvPr/>
-        </p:nvSpPr>
-        <p:spPr>
-          <a:xfrm>
-            <a:off x="9710928" y="2560320"/>
-            <a:ext cx="1554480" cy="685800"/>
-          </a:xfrm>
-          <a:prstGeom prst="rect">
-            <a:avLst/>
-          </a:prstGeom>
-          <a:noFill/>
-          <a:ln/>
-        </p:spPr>
-        <p:txBody>
-          <a:bodyPr wrap="square" rtlCol="0" anchor="ctr"/>
-          <a:lstStyle/>
-          <a:p>
-            <a:pPr algn="ctr" indent="0" marL="0">
-              <a:buNone/>
-            </a:pPr>
-            <a:r>
-              <a:rPr lang="en-US" sz="1500" b="1" dirty="0">
-                <a:solidFill>
-                  <a:srgbClr val="E6EDF3"/>
-                </a:solidFill>
-                <a:latin typeface="Calibri" pitchFamily="34" charset="0"/>
-                <a:ea typeface="Calibri" pitchFamily="34" charset="-122"/>
-                <a:cs typeface="Calibri" pitchFamily="34" charset="-120"/>
-              </a:rPr>
-              <a:t>Log</a:t>
-            </a:r>
-            <a:endParaRPr lang="en-US" sz="1500" dirty="0"/>
-          </a:p>
-        </p:txBody>
-      </p:sp>
-      <p:sp>
-        <p:nvSpPr>
-          <p:cNvPr id="23" name="Text 21"/>
-          <p:cNvSpPr/>
-          <p:nvPr/>
-        </p:nvSpPr>
-        <p:spPr>
-          <a:xfrm>
-            <a:off x="9710928" y="3182112"/>
-            <a:ext cx="1554480" cy="402336"/>
-          </a:xfrm>
-          <a:prstGeom prst="rect">
-            <a:avLst/>
-          </a:prstGeom>
-          <a:noFill/>
-          <a:ln/>
-        </p:spPr>
-        <p:txBody>
-          <a:bodyPr wrap="square" rtlCol="0" anchor="ctr"/>
-          <a:lstStyle/>
-          <a:p>
-            <a:pPr algn="ctr" indent="0" marL="0">
-              <a:buNone/>
-            </a:pPr>
-            <a:r>
-              <a:rPr lang="en-US" sz="1100" dirty="0">
-                <a:solidFill>
-                  <a:srgbClr val="AAB4C0"/>
-                </a:solidFill>
-                <a:latin typeface="Calibri" pitchFamily="34" charset="0"/>
-                <a:ea typeface="Calibri" pitchFamily="34" charset="-122"/>
-                <a:cs typeface="Calibri" pitchFamily="34" charset="-120"/>
-              </a:rPr>
-              <a:t>to a Sheet</a:t>
-            </a:r>
-            <a:endParaRPr lang="en-US" sz="1100" dirty="0"/>
-          </a:p>
-        </p:txBody>
-      </p:sp>
-      <p:sp>
-        <p:nvSpPr>
-          <p:cNvPr id="24" name="Text 22"/>
-          <p:cNvSpPr/>
-          <p:nvPr/>
-        </p:nvSpPr>
-        <p:spPr>
-          <a:xfrm>
-            <a:off x="822960" y="4251960"/>
-            <a:ext cx="10515600" cy="1737360"/>
-          </a:xfrm>
-          <a:prstGeom prst="rect">
-            <a:avLst/>
-          </a:prstGeom>
-          <a:noFill/>
-          <a:ln/>
-        </p:spPr>
-        <p:txBody>
-          <a:bodyPr wrap="square" rtlCol="0" anchor="t"/>
-          <a:lstStyle/>
-          <a:p>
-            <a:pPr indent="0" marL="0">
-              <a:buNone/>
-            </a:pPr>
-            <a:r>
-              <a:rPr lang="en-US" sz="1800" b="1" dirty="0">
-                <a:solidFill>
-                  <a:srgbClr val="22D3EE"/>
-                </a:solidFill>
-                <a:latin typeface="Calibri" pitchFamily="34" charset="0"/>
-                <a:ea typeface="Calibri" pitchFamily="34" charset="-122"/>
-                <a:cs typeface="Calibri" pitchFamily="34" charset="-120"/>
-              </a:rPr>
-              <a:t>▸  </a:t>
-            </a:r>
-            <a:pPr indent="0" marL="0">
-              <a:spcAft>
-                <a:spcPts val="1300"/>
-              </a:spcAft>
-              <a:buNone/>
-            </a:pPr>
-            <a:r>
-              <a:rPr lang="en-US" sz="1800" dirty="0">
-                <a:solidFill>
-                  <a:srgbClr val="E6EDF3"/>
-                </a:solidFill>
-                <a:latin typeface="Calibri" pitchFamily="34" charset="0"/>
-                <a:ea typeface="Calibri" pitchFamily="34" charset="-122"/>
-                <a:cs typeface="Calibri" pitchFamily="34" charset="-120"/>
-              </a:rPr>
-              <a:t>One example, grown all day — predictive maintenance on an IM-500 machine.</a:t>
-            </a:r>
-            <a:endParaRPr lang="en-US" sz="1800" dirty="0"/>
-          </a:p>
-          <a:p>
-            <a:pPr indent="0" marL="0">
-              <a:buNone/>
-            </a:pPr>
-            <a:r>
-              <a:rPr lang="en-US" sz="1800" b="1" dirty="0">
-                <a:solidFill>
-                  <a:srgbClr val="22D3EE"/>
-                </a:solidFill>
-                <a:latin typeface="Calibri" pitchFamily="34" charset="0"/>
-                <a:ea typeface="Calibri" pitchFamily="34" charset="-122"/>
-                <a:cs typeface="Calibri" pitchFamily="34" charset="-120"/>
-              </a:rPr>
-              <a:t>▸  </a:t>
-            </a:r>
-            <a:pPr indent="0" marL="0">
-              <a:spcAft>
-                <a:spcPts val="1300"/>
-              </a:spcAft>
-              <a:buNone/>
-            </a:pPr>
-            <a:r>
-              <a:rPr lang="en-US" sz="1800" dirty="0">
-                <a:solidFill>
-                  <a:srgbClr val="E6EDF3"/>
-                </a:solidFill>
-                <a:latin typeface="Calibri" pitchFamily="34" charset="0"/>
-                <a:ea typeface="Calibri" pitchFamily="34" charset="-122"/>
-                <a:cs typeface="Calibri" pitchFamily="34" charset="-120"/>
-              </a:rPr>
-              <a:t>I build live; you watch and ask. Short breaks along the way.</a:t>
-            </a:r>
-            <a:endParaRPr lang="en-US" sz="1800" dirty="0"/>
-          </a:p>
-          <a:p>
-            <a:pPr indent="0" marL="0">
-              <a:buNone/>
-            </a:pPr>
-            <a:r>
-              <a:rPr lang="en-US" sz="1800" b="1" dirty="0">
-                <a:solidFill>
-                  <a:srgbClr val="22D3EE"/>
-                </a:solidFill>
-                <a:latin typeface="Calibri" pitchFamily="34" charset="0"/>
-                <a:ea typeface="Calibri" pitchFamily="34" charset="-122"/>
-                <a:cs typeface="Calibri" pitchFamily="34" charset="-120"/>
-              </a:rPr>
-              <a:t>▸  </a:t>
-            </a:r>
-            <a:pPr indent="0" marL="0">
-              <a:spcAft>
-                <a:spcPts val="1300"/>
-              </a:spcAft>
-              <a:buNone/>
-            </a:pPr>
-            <a:r>
-              <a:rPr lang="en-US" sz="1800" dirty="0">
-                <a:solidFill>
-                  <a:srgbClr val="E6EDF3"/>
-                </a:solidFill>
-                <a:latin typeface="Calibri" pitchFamily="34" charset="0"/>
-                <a:ea typeface="Calibri" pitchFamily="34" charset="-122"/>
-                <a:cs typeface="Calibri" pitchFamily="34" charset="-120"/>
-              </a:rPr>
-              <a:t>You leave with a manual, prompts and a glossary to redo it yourself, free.</a:t>
-            </a:r>
-            <a:endParaRPr lang="en-US" sz="1800" dirty="0"/>
+            <a:pPr indent="0" marL="0">
+              <a:buNone/>
+            </a:pPr>
+            <a:r>
+              <a:rPr lang="en-US" sz="1700" i="1" dirty="0">
+                <a:solidFill>
+                  <a:srgbClr val="8592A3"/>
+                </a:solidFill>
+                <a:latin typeface="Calibri" pitchFamily="34" charset="0"/>
+                <a:ea typeface="Calibri" pitchFamily="34" charset="-122"/>
+                <a:cs typeface="Calibri" pitchFamily="34" charset="-120"/>
+              </a:rPr>
+              <a:t>No wrong answers - this just helps me pitch the session at the right level for the room.</a:t>
+            </a:r>
+            <a:endParaRPr lang="en-US" sz="1700" dirty="0"/>
           </a:p>
         </p:txBody>
       </p:sp>
@@ -7677,7 +7302,7 @@
     <p:bg>
       <p:bgPr>
         <a:solidFill>
-          <a:srgbClr val="0B0F15"/>
+          <a:srgbClr val="06090D"/>
         </a:solidFill>
       </p:bgPr>
     </p:bg>
@@ -7742,7 +7367,46 @@
         </p:nvSpPr>
         <p:spPr>
           <a:xfrm>
-            <a:off x="822960" y="566928"/>
+            <a:off x="749808" y="457200"/>
+            <a:ext cx="5486400" cy="2377440"/>
+          </a:xfrm>
+          <a:prstGeom prst="rect">
+            <a:avLst/>
+          </a:prstGeom>
+          <a:noFill/>
+          <a:ln/>
+        </p:spPr>
+        <p:txBody>
+          <a:bodyPr wrap="square" rtlCol="0" anchor="ctr"/>
+          <a:lstStyle/>
+          <a:p>
+            <a:pPr indent="0" marL="0">
+              <a:buNone/>
+            </a:pPr>
+            <a:r>
+              <a:rPr lang="en-US" sz="15000" b="1" dirty="0">
+                <a:solidFill>
+                  <a:srgbClr val="0E7490"/>
+                </a:solidFill>
+                <a:latin typeface="Calibri" pitchFamily="34" charset="0"/>
+                <a:ea typeface="Calibri" pitchFamily="34" charset="-122"/>
+                <a:cs typeface="Calibri" pitchFamily="34" charset="-120"/>
+              </a:rPr>
+              <a:t>03</a:t>
+            </a:r>
+            <a:endParaRPr lang="en-US" sz="15000" dirty="0"/>
+          </a:p>
+        </p:txBody>
+      </p:sp>
+      <p:sp>
+        <p:nvSpPr>
+          <p:cNvPr id="4" name="Text 2"/>
+          <p:cNvSpPr/>
+          <p:nvPr/>
+        </p:nvSpPr>
+        <p:spPr>
+          <a:xfrm>
+            <a:off x="868680" y="3200400"/>
             <a:ext cx="10515600" cy="365760"/>
           </a:xfrm>
           <a:prstGeom prst="rect">
@@ -7767,7 +7431,7 @@
                 <a:ea typeface="Calibri" pitchFamily="34" charset="-122"/>
                 <a:cs typeface="Calibri" pitchFamily="34" charset="-120"/>
               </a:rPr>
-              <a:t>MODULE 3 · AGENTS</a:t>
+              <a:t>SECTION 3</a:t>
             </a:r>
             <a:endParaRPr lang="en-US" sz="1400" dirty="0"/>
           </a:p>
@@ -7775,14 +7439,14 @@
       </p:sp>
       <p:sp>
         <p:nvSpPr>
-          <p:cNvPr id="4" name="Text 2"/>
-          <p:cNvSpPr/>
-          <p:nvPr/>
-        </p:nvSpPr>
-        <p:spPr>
-          <a:xfrm>
-            <a:off x="822960" y="932688"/>
-            <a:ext cx="10607040" cy="640080"/>
+          <p:cNvPr id="5" name="Text 3"/>
+          <p:cNvSpPr/>
+          <p:nvPr/>
+        </p:nvSpPr>
+        <p:spPr>
+          <a:xfrm>
+            <a:off x="822960" y="3566160"/>
+            <a:ext cx="10607040" cy="1005840"/>
           </a:xfrm>
           <a:prstGeom prst="rect">
             <a:avLst/>
@@ -7798,7 +7462,7 @@
               <a:buNone/>
             </a:pPr>
             <a:r>
-              <a:rPr lang="en-US" sz="3000" b="1" dirty="0">
+              <a:rPr lang="en-US" sz="4400" b="1" dirty="0">
                 <a:solidFill>
                   <a:srgbClr val="E6EDF3"/>
                 </a:solidFill>
@@ -7806,62 +7470,51 @@
                 <a:ea typeface="Calibri" pitchFamily="34" charset="-122"/>
                 <a:cs typeface="Calibri" pitchFamily="34" charset="-120"/>
               </a:rPr>
-              <a:t>What makes it an agent</a:t>
-            </a:r>
-            <a:endParaRPr lang="en-US" sz="3000" dirty="0"/>
-          </a:p>
-        </p:txBody>
-      </p:sp>
-      <p:sp>
-        <p:nvSpPr>
-          <p:cNvPr id="5" name="Shape 3"/>
-          <p:cNvSpPr/>
-          <p:nvPr/>
-        </p:nvSpPr>
-        <p:spPr>
-          <a:xfrm>
-            <a:off x="822960" y="1755648"/>
-            <a:ext cx="10543032" cy="4297680"/>
-          </a:xfrm>
-          <a:prstGeom prst="roundRect">
-            <a:avLst>
-              <a:gd name="adj" fmla="val 1702"/>
-            </a:avLst>
-          </a:prstGeom>
-          <a:solidFill>
-            <a:srgbClr val="0B0F15"/>
-          </a:solidFill>
-          <a:ln w="15875">
-            <a:solidFill>
-              <a:srgbClr val="1F2937"/>
-            </a:solidFill>
-            <a:prstDash val="solid"/>
-          </a:ln>
-        </p:spPr>
-      </p:sp>
-      <p:pic>
-        <p:nvPicPr>
-          <p:cNvPr id="6" name="Image 0" descr="preencoded.png">    </p:cNvPr>
-          <p:cNvPicPr>
-            <a:picLocks noChangeAspect="1"/>
-          </p:cNvPicPr>
-          <p:nvPr/>
-        </p:nvPicPr>
-        <p:blipFill>
-          <a:blip r:embed="rId1"/>
-          <a:srcRect l="0" r="0" t="0" b="0"/>
-          <a:stretch/>
-        </p:blipFill>
-        <p:spPr>
-          <a:xfrm>
-            <a:off x="960120" y="1892808"/>
-            <a:ext cx="10268712" cy="4023360"/>
-          </a:xfrm>
-          <a:prstGeom prst="rect">
-            <a:avLst/>
-          </a:prstGeom>
-        </p:spPr>
-      </p:pic>
+              <a:t>Build an Agent</a:t>
+            </a:r>
+            <a:endParaRPr lang="en-US" sz="4400" dirty="0"/>
+          </a:p>
+        </p:txBody>
+      </p:sp>
+      <p:sp>
+        <p:nvSpPr>
+          <p:cNvPr id="6" name="Text 4"/>
+          <p:cNvSpPr/>
+          <p:nvPr/>
+        </p:nvSpPr>
+        <p:spPr>
+          <a:xfrm>
+            <a:off x="859536" y="4617720"/>
+            <a:ext cx="10241280" cy="548640"/>
+          </a:xfrm>
+          <a:prstGeom prst="rect">
+            <a:avLst/>
+          </a:prstGeom>
+          <a:noFill/>
+          <a:ln/>
+        </p:spPr>
+        <p:txBody>
+          <a:bodyPr wrap="square" rtlCol="0" anchor="ctr"/>
+          <a:lstStyle/>
+          <a:p>
+            <a:pPr indent="0" marL="0">
+              <a:buNone/>
+            </a:pPr>
+            <a:r>
+              <a:rPr lang="en-US" sz="1700" i="1" dirty="0">
+                <a:solidFill>
+                  <a:srgbClr val="8592A3"/>
+                </a:solidFill>
+                <a:latin typeface="Calibri" pitchFamily="34" charset="0"/>
+                <a:ea typeface="Calibri" pitchFamily="34" charset="-122"/>
+                <a:cs typeface="Calibri" pitchFamily="34" charset="-120"/>
+              </a:rPr>
+              <a:t>AI that reads, decides and takes action - no code</a:t>
+            </a:r>
+            <a:endParaRPr lang="en-US" sz="1700" dirty="0"/>
+          </a:p>
+        </p:txBody>
+      </p:sp>
     </p:spTree>
   </p:cSld>
   <p:clrMapOvr>
@@ -7941,7 +7594,7 @@
         </p:nvSpPr>
         <p:spPr>
           <a:xfrm>
-            <a:off x="822960" y="658368"/>
+            <a:off x="822960" y="566928"/>
             <a:ext cx="10515600" cy="365760"/>
           </a:xfrm>
           <a:prstGeom prst="rect">
@@ -7966,7 +7619,7 @@
                 <a:ea typeface="Calibri" pitchFamily="34" charset="-122"/>
                 <a:cs typeface="Calibri" pitchFamily="34" charset="-120"/>
               </a:rPr>
-              <a:t>MODULE 3 · AGENTS · WHY N8N</a:t>
+              <a:t>MODULE 3 · AGENTS</a:t>
             </a:r>
             <a:endParaRPr lang="en-US" sz="1400" dirty="0"/>
           </a:p>
@@ -7980,8 +7633,8 @@
         </p:nvSpPr>
         <p:spPr>
           <a:xfrm>
-            <a:off x="822960" y="1078992"/>
-            <a:ext cx="10607040" cy="822960"/>
+            <a:off x="822960" y="932688"/>
+            <a:ext cx="10607040" cy="640080"/>
           </a:xfrm>
           <a:prstGeom prst="rect">
             <a:avLst/>
@@ -7997,7 +7650,7 @@
               <a:buNone/>
             </a:pPr>
             <a:r>
-              <a:rPr lang="en-US" sz="3200" b="1" dirty="0">
+              <a:rPr lang="en-US" sz="3000" b="1" dirty="0">
                 <a:solidFill>
                   <a:srgbClr val="E6EDF3"/>
                 </a:solidFill>
@@ -8005,136 +7658,62 @@
                 <a:ea typeface="Calibri" pitchFamily="34" charset="-122"/>
                 <a:cs typeface="Calibri" pitchFamily="34" charset="-120"/>
               </a:rPr>
-              <a:t>Why we use n8n</a:t>
-            </a:r>
-            <a:endParaRPr lang="en-US" sz="3200" dirty="0"/>
-          </a:p>
-        </p:txBody>
-      </p:sp>
-      <p:sp>
-        <p:nvSpPr>
-          <p:cNvPr id="5" name="animList"/>
-          <p:cNvSpPr/>
-          <p:nvPr/>
-        </p:nvSpPr>
-        <p:spPr>
-          <a:xfrm>
-            <a:off x="822960" y="2148840"/>
-            <a:ext cx="10515600" cy="3840480"/>
-          </a:xfrm>
-          <a:prstGeom prst="rect">
-            <a:avLst/>
-          </a:prstGeom>
-          <a:noFill/>
-          <a:ln/>
-        </p:spPr>
-        <p:txBody>
-          <a:bodyPr wrap="square" rtlCol="0" anchor="t"/>
-          <a:lstStyle/>
-          <a:p>
-            <a:pPr indent="0" marL="0">
-              <a:buNone/>
-            </a:pPr>
-            <a:r>
-              <a:rPr lang="en-US" sz="2000" b="1" dirty="0">
-                <a:solidFill>
-                  <a:srgbClr val="22D3EE"/>
-                </a:solidFill>
-                <a:latin typeface="Calibri" pitchFamily="34" charset="0"/>
-                <a:ea typeface="Calibri" pitchFamily="34" charset="-122"/>
-                <a:cs typeface="Calibri" pitchFamily="34" charset="-120"/>
-              </a:rPr>
-              <a:t>▸  </a:t>
-            </a:r>
-            <a:pPr indent="0" marL="0">
-              <a:spcAft>
-                <a:spcPts val="1800"/>
-              </a:spcAft>
-              <a:buNone/>
-            </a:pPr>
-            <a:r>
-              <a:rPr lang="en-US" sz="2000" dirty="0">
-                <a:solidFill>
-                  <a:srgbClr val="E6EDF3"/>
-                </a:solidFill>
-                <a:latin typeface="Calibri" pitchFamily="34" charset="0"/>
-                <a:ea typeface="Calibri" pitchFamily="34" charset="-122"/>
-                <a:cs typeface="Calibri" pitchFamily="34" charset="-120"/>
-              </a:rPr>
-              <a:t>A no-code, visual builder with a free tier — drag boxes, connect them, done.</a:t>
-            </a:r>
-            <a:endParaRPr lang="en-US" sz="2000" dirty="0"/>
-          </a:p>
-          <a:p>
-            <a:pPr indent="0" marL="0">
-              <a:buNone/>
-            </a:pPr>
-            <a:r>
-              <a:rPr lang="en-US" sz="2000" b="1" dirty="0">
-                <a:solidFill>
-                  <a:srgbClr val="22D3EE"/>
-                </a:solidFill>
-                <a:latin typeface="Calibri" pitchFamily="34" charset="0"/>
-                <a:ea typeface="Calibri" pitchFamily="34" charset="-122"/>
-                <a:cs typeface="Calibri" pitchFamily="34" charset="-120"/>
-              </a:rPr>
-              <a:t>▸  </a:t>
-            </a:r>
-            <a:pPr indent="0" marL="0">
-              <a:spcAft>
-                <a:spcPts val="1800"/>
-              </a:spcAft>
-              <a:buNone/>
-            </a:pPr>
-            <a:r>
-              <a:rPr lang="en-US" sz="2000" dirty="0">
-                <a:solidFill>
-                  <a:srgbClr val="E6EDF3"/>
-                </a:solidFill>
-                <a:latin typeface="Calibri" pitchFamily="34" charset="0"/>
-                <a:ea typeface="Calibri" pitchFamily="34" charset="-122"/>
-                <a:cs typeface="Calibri" pitchFamily="34" charset="-120"/>
-              </a:rPr>
-              <a:t>Runs in a browser; no servers, no licences (Copilot Studio needed one we don't have).</a:t>
-            </a:r>
-            <a:endParaRPr lang="en-US" sz="2000" dirty="0"/>
-          </a:p>
-          <a:p>
-            <a:pPr indent="0" marL="0">
-              <a:buNone/>
-            </a:pPr>
-            <a:r>
-              <a:rPr lang="en-US" sz="2000" b="1" dirty="0">
-                <a:solidFill>
-                  <a:srgbClr val="22D3EE"/>
-                </a:solidFill>
-                <a:latin typeface="Calibri" pitchFamily="34" charset="0"/>
-                <a:ea typeface="Calibri" pitchFamily="34" charset="-122"/>
-                <a:cs typeface="Calibri" pitchFamily="34" charset="-120"/>
-              </a:rPr>
-              <a:t>▸  </a:t>
-            </a:r>
-            <a:pPr indent="0" marL="0">
-              <a:spcAft>
-                <a:spcPts val="1800"/>
-              </a:spcAft>
-              <a:buNone/>
-            </a:pPr>
-            <a:r>
-              <a:rPr lang="en-US" sz="2000" dirty="0">
-                <a:solidFill>
-                  <a:srgbClr val="E6EDF3"/>
-                </a:solidFill>
-                <a:latin typeface="Calibri" pitchFamily="34" charset="0"/>
-                <a:ea typeface="Calibri" pitchFamily="34" charset="-122"/>
-                <a:cs typeface="Calibri" pitchFamily="34" charset="-120"/>
-              </a:rPr>
-              <a:t>You can rebuild everything yourself from the take-home manual.</a:t>
-            </a:r>
-            <a:endParaRPr lang="en-US" sz="2000" dirty="0"/>
-          </a:p>
-        </p:txBody>
-      </p:sp>
+              <a:t>What makes it an agent</a:t>
+            </a:r>
+            <a:endParaRPr lang="en-US" sz="3000" dirty="0"/>
+          </a:p>
+        </p:txBody>
+      </p:sp>
+      <p:sp>
+        <p:nvSpPr>
+          <p:cNvPr id="5" name="Shape 3"/>
+          <p:cNvSpPr/>
+          <p:nvPr/>
+        </p:nvSpPr>
+        <p:spPr>
+          <a:xfrm>
+            <a:off x="822960" y="1755648"/>
+            <a:ext cx="10543032" cy="4297680"/>
+          </a:xfrm>
+          <a:prstGeom prst="roundRect">
+            <a:avLst>
+              <a:gd name="adj" fmla="val 1702"/>
+            </a:avLst>
+          </a:prstGeom>
+          <a:solidFill>
+            <a:srgbClr val="0B0F15"/>
+          </a:solidFill>
+          <a:ln w="15875">
+            <a:solidFill>
+              <a:srgbClr val="1F2937"/>
+            </a:solidFill>
+            <a:prstDash val="solid"/>
+          </a:ln>
+        </p:spPr>
+      </p:sp>
+      <p:pic>
+        <p:nvPicPr>
+          <p:cNvPr id="6" name="Image 0" descr="preencoded.png">    </p:cNvPr>
+          <p:cNvPicPr>
+            <a:picLocks noChangeAspect="1"/>
+          </p:cNvPicPr>
+          <p:nvPr/>
+        </p:nvPicPr>
+        <p:blipFill>
+          <a:blip r:embed="rId1"/>
+          <a:srcRect l="0" r="0" t="0" b="0"/>
+          <a:stretch/>
+        </p:blipFill>
+        <p:spPr>
+          <a:xfrm>
+            <a:off x="960120" y="1892808"/>
+            <a:ext cx="10268712" cy="4023360"/>
+          </a:xfrm>
+          <a:prstGeom prst="rect">
+            <a:avLst/>
+          </a:prstGeom>
+        </p:spPr>
+      </p:pic>
     </p:spTree>
   </p:cSld>
   <p:clrMapOvr>
@@ -8239,7 +7818,7 @@
                 <a:ea typeface="Calibri" pitchFamily="34" charset="-122"/>
                 <a:cs typeface="Calibri" pitchFamily="34" charset="-120"/>
               </a:rPr>
-              <a:t>MODULE 3 · AGENTS · WHY GEMINI</a:t>
+              <a:t>MODULE 3 · AGENTS · WHY N8N</a:t>
             </a:r>
             <a:endParaRPr lang="en-US" sz="1400" dirty="0"/>
           </a:p>
@@ -8278,7 +7857,7 @@
                 <a:ea typeface="Calibri" pitchFamily="34" charset="-122"/>
                 <a:cs typeface="Calibri" pitchFamily="34" charset="-120"/>
               </a:rPr>
-              <a:t>Why Google Gemini — and a word on limits</a:t>
+              <a:t>Why we use n8n</a:t>
             </a:r>
             <a:endParaRPr lang="en-US" sz="3200" dirty="0"/>
           </a:p>
@@ -8293,7 +7872,7 @@
         <p:spPr>
           <a:xfrm>
             <a:off x="822960" y="2148840"/>
-            <a:ext cx="10515600" cy="3840480"/>
+            <a:ext cx="10515600" cy="3657600"/>
           </a:xfrm>
           <a:prstGeom prst="rect">
             <a:avLst/>
@@ -8309,7 +7888,7 @@
               <a:buNone/>
             </a:pPr>
             <a:r>
-              <a:rPr lang="en-US" sz="1900" b="1" dirty="0">
+              <a:rPr lang="en-US" sz="2000" b="1" dirty="0">
                 <a:solidFill>
                   <a:srgbClr val="22D3EE"/>
                 </a:solidFill>
@@ -8321,12 +7900,12 @@
             </a:r>
             <a:pPr indent="0" marL="0">
               <a:spcAft>
-                <a:spcPts val="1500"/>
+                <a:spcPts val="1600"/>
               </a:spcAft>
               <a:buNone/>
             </a:pPr>
             <a:r>
-              <a:rPr lang="en-US" sz="1900" dirty="0">
+              <a:rPr lang="en-US" sz="2000" dirty="0">
                 <a:solidFill>
                   <a:srgbClr val="E6EDF3"/>
                 </a:solidFill>
@@ -8334,16 +7913,16 @@
                 <a:ea typeface="Calibri" pitchFamily="34" charset="-122"/>
                 <a:cs typeface="Calibri" pitchFamily="34" charset="-120"/>
               </a:rPr>
-              <a:t>Free API tier, strong, instant key from Google AI Studio.</a:t>
-            </a:r>
-            <a:endParaRPr lang="en-US" sz="1900" dirty="0"/>
-          </a:p>
-          <a:p>
-            <a:pPr indent="0" marL="0">
-              <a:buNone/>
-            </a:pPr>
-            <a:r>
-              <a:rPr lang="en-US" sz="1900" b="1" dirty="0">
+              <a:t>A no-code, visual builder with a free tier - drag boxes, connect them, done.</a:t>
+            </a:r>
+            <a:endParaRPr lang="en-US" sz="2000" dirty="0"/>
+          </a:p>
+          <a:p>
+            <a:pPr indent="0" marL="0">
+              <a:buNone/>
+            </a:pPr>
+            <a:r>
+              <a:rPr lang="en-US" sz="2000" b="1" dirty="0">
                 <a:solidFill>
                   <a:srgbClr val="22D3EE"/>
                 </a:solidFill>
@@ -8355,12 +7934,12 @@
             </a:r>
             <a:pPr indent="0" marL="0">
               <a:spcAft>
-                <a:spcPts val="1500"/>
+                <a:spcPts val="1600"/>
               </a:spcAft>
               <a:buNone/>
             </a:pPr>
             <a:r>
-              <a:rPr lang="en-US" sz="1900" dirty="0">
+              <a:rPr lang="en-US" sz="2000" dirty="0">
                 <a:solidFill>
                   <a:srgbClr val="E6EDF3"/>
                 </a:solidFill>
@@ -8368,16 +7947,16 @@
                 <a:ea typeface="Calibri" pitchFamily="34" charset="-122"/>
                 <a:cs typeface="Calibri" pitchFamily="34" charset="-120"/>
               </a:rPr>
-              <a:t>Use a STABLE flash model (e.g. gemini-3.6-flash) — not a "preview" one.</a:t>
-            </a:r>
-            <a:endParaRPr lang="en-US" sz="1900" dirty="0"/>
-          </a:p>
-          <a:p>
-            <a:pPr indent="0" marL="0">
-              <a:buNone/>
-            </a:pPr>
-            <a:r>
-              <a:rPr lang="en-US" sz="1900" b="1" dirty="0">
+              <a:t>Runs in a browser; no servers, no licences.</a:t>
+            </a:r>
+            <a:endParaRPr lang="en-US" sz="2000" dirty="0"/>
+          </a:p>
+          <a:p>
+            <a:pPr indent="0" marL="0">
+              <a:buNone/>
+            </a:pPr>
+            <a:r>
+              <a:rPr lang="en-US" sz="2000" b="1" dirty="0">
                 <a:solidFill>
                   <a:srgbClr val="22D3EE"/>
                 </a:solidFill>
@@ -8389,12 +7968,12 @@
             </a:r>
             <a:pPr indent="0" marL="0">
               <a:spcAft>
-                <a:spcPts val="1500"/>
+                <a:spcPts val="1600"/>
               </a:spcAft>
               <a:buNone/>
             </a:pPr>
             <a:r>
-              <a:rPr lang="en-US" sz="1900" dirty="0">
+              <a:rPr lang="en-US" sz="2000" dirty="0">
                 <a:solidFill>
                   <a:srgbClr val="E6EDF3"/>
                 </a:solidFill>
@@ -8402,9 +7981,62 @@
                 <a:ea typeface="Calibri" pitchFamily="34" charset="-122"/>
                 <a:cs typeface="Calibri" pitchFamily="34" charset="-120"/>
               </a:rPr>
-              <a:t>Preview models cap at ~20 requests/day; stable at ~1,500/day. Hit a limit? Switch to another stable model — the quota is per-model.</a:t>
-            </a:r>
-            <a:endParaRPr lang="en-US" sz="1900" dirty="0"/>
+              <a:t>You can rebuild everything yourself from the take-home manual.</a:t>
+            </a:r>
+            <a:endParaRPr lang="en-US" sz="2000" dirty="0"/>
+          </a:p>
+        </p:txBody>
+      </p:sp>
+      <p:sp>
+        <p:nvSpPr>
+          <p:cNvPr id="6" name="Text 4"/>
+          <p:cNvSpPr/>
+          <p:nvPr/>
+        </p:nvSpPr>
+        <p:spPr>
+          <a:xfrm>
+            <a:off x="822960" y="6053328"/>
+            <a:ext cx="10515600" cy="292608"/>
+          </a:xfrm>
+          <a:prstGeom prst="rect">
+            <a:avLst/>
+          </a:prstGeom>
+          <a:noFill/>
+          <a:ln/>
+        </p:spPr>
+        <p:txBody>
+          <a:bodyPr wrap="square" rtlCol="0" anchor="ctr"/>
+          <a:lstStyle/>
+          <a:p>
+            <a:pPr indent="0" marL="0">
+              <a:buNone/>
+            </a:pPr>
+            <a:r>
+              <a:rPr lang="en-US" sz="1400" b="1" dirty="0">
+                <a:solidFill>
+                  <a:srgbClr val="F59E0B"/>
+                </a:solidFill>
+                <a:latin typeface="Calibri" pitchFamily="34" charset="0"/>
+                <a:ea typeface="Calibri" pitchFamily="34" charset="-122"/>
+                <a:cs typeface="Calibri" pitchFamily="34" charset="-120"/>
+              </a:rPr>
+              <a:t>↗  </a:t>
+            </a:r>
+            <a:pPr indent="0" marL="0">
+              <a:buNone/>
+            </a:pPr>
+            <a:r>
+              <a:rPr lang="en-US" sz="1400" dirty="0">
+                <a:solidFill>
+                  <a:srgbClr val="22D3EE"/>
+                </a:solidFill>
+                <a:latin typeface="Calibri" pitchFamily="34" charset="0"/>
+                <a:ea typeface="Calibri" pitchFamily="34" charset="-122"/>
+                <a:cs typeface="Calibri" pitchFamily="34" charset="-120"/>
+              </a:rPr>
+              <a:t>n8n.io</a:t>
+            </a:r>
+            <a:endParaRPr lang="en-US" sz="1400" dirty="0"/>
           </a:p>
         </p:txBody>
       </p:sp>
@@ -8419,6 +8051,332 @@
 <file path=ppt/slides/slide23.xml><?xml version="1.0" encoding="utf-8"?>
 <p:sld xmlns:a="http://schemas.openxmlformats.org/drawingml/2006/main" xmlns:r="http://schemas.openxmlformats.org/officeDocument/2006/relationships" xmlns:p="http://schemas.openxmlformats.org/presentationml/2006/main">
   <p:cSld name="Slide 23">
+    <p:bg>
+      <p:bgPr>
+        <a:solidFill>
+          <a:srgbClr val="0B0F15"/>
+        </a:solidFill>
+      </p:bgPr>
+    </p:bg>
+    <p:spTree>
+      <p:nvGrpSpPr>
+        <p:cNvPr id="1" name=""/>
+        <p:cNvGrpSpPr/>
+        <p:nvPr/>
+      </p:nvGrpSpPr>
+      <p:grpSpPr>
+        <a:xfrm>
+          <a:off x="0" y="0"/>
+          <a:ext cx="0" cy="0"/>
+          <a:chOff x="0" y="0"/>
+          <a:chExt cx="0" cy="0"/>
+        </a:xfrm>
+      </p:grpSpPr>
+      <p:sp>
+        <p:nvSpPr>
+          <p:cNvPr id="2" name="Text 0"/>
+          <p:cNvSpPr/>
+          <p:nvPr/>
+        </p:nvSpPr>
+        <p:spPr>
+          <a:xfrm>
+            <a:off x="822960" y="6446520"/>
+            <a:ext cx="5486400" cy="274320"/>
+          </a:xfrm>
+          <a:prstGeom prst="rect">
+            <a:avLst/>
+          </a:prstGeom>
+          <a:noFill/>
+          <a:ln/>
+        </p:spPr>
+        <p:txBody>
+          <a:bodyPr wrap="square" rtlCol="0" anchor="ctr"/>
+          <a:lstStyle/>
+          <a:p>
+            <a:pPr indent="0" marL="0">
+              <a:buNone/>
+            </a:pPr>
+            <a:r>
+              <a:rPr lang="en-US" sz="1100" spc="100" kern="0" dirty="0">
+                <a:solidFill>
+                  <a:srgbClr val="AAB4C0"/>
+                </a:solidFill>
+                <a:latin typeface="Calibri" pitchFamily="34" charset="0"/>
+                <a:ea typeface="Calibri" pitchFamily="34" charset="-122"/>
+                <a:cs typeface="Calibri" pitchFamily="34" charset="-120"/>
+              </a:rPr>
+              <a:t>arjunthakur.dev</a:t>
+            </a:r>
+            <a:endParaRPr lang="en-US" sz="1100" dirty="0"/>
+          </a:p>
+        </p:txBody>
+      </p:sp>
+      <p:sp>
+        <p:nvSpPr>
+          <p:cNvPr id="3" name="Text 1"/>
+          <p:cNvSpPr/>
+          <p:nvPr/>
+        </p:nvSpPr>
+        <p:spPr>
+          <a:xfrm>
+            <a:off x="822960" y="658368"/>
+            <a:ext cx="10515600" cy="365760"/>
+          </a:xfrm>
+          <a:prstGeom prst="rect">
+            <a:avLst/>
+          </a:prstGeom>
+          <a:noFill/>
+          <a:ln/>
+        </p:spPr>
+        <p:txBody>
+          <a:bodyPr wrap="square" rtlCol="0" anchor="ctr"/>
+          <a:lstStyle/>
+          <a:p>
+            <a:pPr indent="0" marL="0">
+              <a:buNone/>
+            </a:pPr>
+            <a:r>
+              <a:rPr lang="en-US" sz="1400" b="1" spc="400" kern="0" dirty="0">
+                <a:solidFill>
+                  <a:srgbClr val="22D3EE"/>
+                </a:solidFill>
+                <a:latin typeface="Calibri" pitchFamily="34" charset="0"/>
+                <a:ea typeface="Calibri" pitchFamily="34" charset="-122"/>
+                <a:cs typeface="Calibri" pitchFamily="34" charset="-120"/>
+              </a:rPr>
+              <a:t>MODULE 3 · AGENTS · WHY GEMINI</a:t>
+            </a:r>
+            <a:endParaRPr lang="en-US" sz="1400" dirty="0"/>
+          </a:p>
+        </p:txBody>
+      </p:sp>
+      <p:sp>
+        <p:nvSpPr>
+          <p:cNvPr id="4" name="Text 2"/>
+          <p:cNvSpPr/>
+          <p:nvPr/>
+        </p:nvSpPr>
+        <p:spPr>
+          <a:xfrm>
+            <a:off x="822960" y="1078992"/>
+            <a:ext cx="10607040" cy="822960"/>
+          </a:xfrm>
+          <a:prstGeom prst="rect">
+            <a:avLst/>
+          </a:prstGeom>
+          <a:noFill/>
+          <a:ln/>
+        </p:spPr>
+        <p:txBody>
+          <a:bodyPr wrap="square" rtlCol="0" anchor="ctr"/>
+          <a:lstStyle/>
+          <a:p>
+            <a:pPr indent="0" marL="0">
+              <a:buNone/>
+            </a:pPr>
+            <a:r>
+              <a:rPr lang="en-US" sz="3200" b="1" dirty="0">
+                <a:solidFill>
+                  <a:srgbClr val="E6EDF3"/>
+                </a:solidFill>
+                <a:latin typeface="Calibri" pitchFamily="34" charset="0"/>
+                <a:ea typeface="Calibri" pitchFamily="34" charset="-122"/>
+                <a:cs typeface="Calibri" pitchFamily="34" charset="-120"/>
+              </a:rPr>
+              <a:t>Why Google Gemini - and a word on limits</a:t>
+            </a:r>
+            <a:endParaRPr lang="en-US" sz="3200" dirty="0"/>
+          </a:p>
+        </p:txBody>
+      </p:sp>
+      <p:sp>
+        <p:nvSpPr>
+          <p:cNvPr id="5" name="animList"/>
+          <p:cNvSpPr/>
+          <p:nvPr/>
+        </p:nvSpPr>
+        <p:spPr>
+          <a:xfrm>
+            <a:off x="822960" y="2148840"/>
+            <a:ext cx="10515600" cy="3657600"/>
+          </a:xfrm>
+          <a:prstGeom prst="rect">
+            <a:avLst/>
+          </a:prstGeom>
+          <a:noFill/>
+          <a:ln/>
+        </p:spPr>
+        <p:txBody>
+          <a:bodyPr wrap="square" rtlCol="0" anchor="t"/>
+          <a:lstStyle/>
+          <a:p>
+            <a:pPr indent="0" marL="0">
+              <a:buNone/>
+            </a:pPr>
+            <a:r>
+              <a:rPr lang="en-US" sz="1900" b="1" dirty="0">
+                <a:solidFill>
+                  <a:srgbClr val="22D3EE"/>
+                </a:solidFill>
+                <a:latin typeface="Calibri" pitchFamily="34" charset="0"/>
+                <a:ea typeface="Calibri" pitchFamily="34" charset="-122"/>
+                <a:cs typeface="Calibri" pitchFamily="34" charset="-120"/>
+              </a:rPr>
+              <a:t>▸  </a:t>
+            </a:r>
+            <a:pPr indent="0" marL="0">
+              <a:spcAft>
+                <a:spcPts val="1400"/>
+              </a:spcAft>
+              <a:buNone/>
+            </a:pPr>
+            <a:r>
+              <a:rPr lang="en-US" sz="1900" dirty="0">
+                <a:solidFill>
+                  <a:srgbClr val="E6EDF3"/>
+                </a:solidFill>
+                <a:latin typeface="Calibri" pitchFamily="34" charset="0"/>
+                <a:ea typeface="Calibri" pitchFamily="34" charset="-122"/>
+                <a:cs typeface="Calibri" pitchFamily="34" charset="-120"/>
+              </a:rPr>
+              <a:t>Free API tier, strong, instant key from Google AI Studio.</a:t>
+            </a:r>
+            <a:endParaRPr lang="en-US" sz="1900" dirty="0"/>
+          </a:p>
+          <a:p>
+            <a:pPr indent="0" marL="0">
+              <a:buNone/>
+            </a:pPr>
+            <a:r>
+              <a:rPr lang="en-US" sz="1900" b="1" dirty="0">
+                <a:solidFill>
+                  <a:srgbClr val="22D3EE"/>
+                </a:solidFill>
+                <a:latin typeface="Calibri" pitchFamily="34" charset="0"/>
+                <a:ea typeface="Calibri" pitchFamily="34" charset="-122"/>
+                <a:cs typeface="Calibri" pitchFamily="34" charset="-120"/>
+              </a:rPr>
+              <a:t>▸  </a:t>
+            </a:r>
+            <a:pPr indent="0" marL="0">
+              <a:spcAft>
+                <a:spcPts val="1400"/>
+              </a:spcAft>
+              <a:buNone/>
+            </a:pPr>
+            <a:r>
+              <a:rPr lang="en-US" sz="1900" dirty="0">
+                <a:solidFill>
+                  <a:srgbClr val="E6EDF3"/>
+                </a:solidFill>
+                <a:latin typeface="Calibri" pitchFamily="34" charset="0"/>
+                <a:ea typeface="Calibri" pitchFamily="34" charset="-122"/>
+                <a:cs typeface="Calibri" pitchFamily="34" charset="-120"/>
+              </a:rPr>
+              <a:t>Use a STABLE flash model (e.g. gemini-3.6-flash) - not a "preview" one.</a:t>
+            </a:r>
+            <a:endParaRPr lang="en-US" sz="1900" dirty="0"/>
+          </a:p>
+          <a:p>
+            <a:pPr indent="0" marL="0">
+              <a:buNone/>
+            </a:pPr>
+            <a:r>
+              <a:rPr lang="en-US" sz="1900" b="1" dirty="0">
+                <a:solidFill>
+                  <a:srgbClr val="22D3EE"/>
+                </a:solidFill>
+                <a:latin typeface="Calibri" pitchFamily="34" charset="0"/>
+                <a:ea typeface="Calibri" pitchFamily="34" charset="-122"/>
+                <a:cs typeface="Calibri" pitchFamily="34" charset="-120"/>
+              </a:rPr>
+              <a:t>▸  </a:t>
+            </a:r>
+            <a:pPr indent="0" marL="0">
+              <a:spcAft>
+                <a:spcPts val="1400"/>
+              </a:spcAft>
+              <a:buNone/>
+            </a:pPr>
+            <a:r>
+              <a:rPr lang="en-US" sz="1900" dirty="0">
+                <a:solidFill>
+                  <a:srgbClr val="E6EDF3"/>
+                </a:solidFill>
+                <a:latin typeface="Calibri" pitchFamily="34" charset="0"/>
+                <a:ea typeface="Calibri" pitchFamily="34" charset="-122"/>
+                <a:cs typeface="Calibri" pitchFamily="34" charset="-120"/>
+              </a:rPr>
+              <a:t>Preview models cap at ~20 requests/day; stable at ~1,500/day. Hit a limit? Switch to another stable model - the quota is per-model.</a:t>
+            </a:r>
+            <a:endParaRPr lang="en-US" sz="1900" dirty="0"/>
+          </a:p>
+        </p:txBody>
+      </p:sp>
+      <p:sp>
+        <p:nvSpPr>
+          <p:cNvPr id="6" name="Text 4"/>
+          <p:cNvSpPr/>
+          <p:nvPr/>
+        </p:nvSpPr>
+        <p:spPr>
+          <a:xfrm>
+            <a:off x="822960" y="6053328"/>
+            <a:ext cx="10515600" cy="292608"/>
+          </a:xfrm>
+          <a:prstGeom prst="rect">
+            <a:avLst/>
+          </a:prstGeom>
+          <a:noFill/>
+          <a:ln/>
+        </p:spPr>
+        <p:txBody>
+          <a:bodyPr wrap="square" rtlCol="0" anchor="ctr"/>
+          <a:lstStyle/>
+          <a:p>
+            <a:pPr indent="0" marL="0">
+              <a:buNone/>
+            </a:pPr>
+            <a:r>
+              <a:rPr lang="en-US" sz="1400" b="1" dirty="0">
+                <a:solidFill>
+                  <a:srgbClr val="F59E0B"/>
+                </a:solidFill>
+                <a:latin typeface="Calibri" pitchFamily="34" charset="0"/>
+                <a:ea typeface="Calibri" pitchFamily="34" charset="-122"/>
+                <a:cs typeface="Calibri" pitchFamily="34" charset="-120"/>
+              </a:rPr>
+              <a:t>↗  </a:t>
+            </a:r>
+            <a:pPr indent="0" marL="0">
+              <a:buNone/>
+            </a:pPr>
+            <a:r>
+              <a:rPr lang="en-US" sz="1400" dirty="0">
+                <a:solidFill>
+                  <a:srgbClr val="22D3EE"/>
+                </a:solidFill>
+                <a:latin typeface="Calibri" pitchFamily="34" charset="0"/>
+                <a:ea typeface="Calibri" pitchFamily="34" charset="-122"/>
+                <a:cs typeface="Calibri" pitchFamily="34" charset="-120"/>
+              </a:rPr>
+              <a:t>aistudio.google.com   (Get API key)</a:t>
+            </a:r>
+            <a:endParaRPr lang="en-US" sz="1400" dirty="0"/>
+          </a:p>
+        </p:txBody>
+      </p:sp>
+    </p:spTree>
+  </p:cSld>
+  <p:clrMapOvr>
+    <a:masterClrMapping/>
+  </p:clrMapOvr>
+</p:sld>
+</file>
+
+<file path=ppt/slides/slide24.xml><?xml version="1.0" encoding="utf-8"?>
+<p:sld xmlns:a="http://schemas.openxmlformats.org/drawingml/2006/main" xmlns:r="http://schemas.openxmlformats.org/officeDocument/2006/relationships" xmlns:p="http://schemas.openxmlformats.org/presentationml/2006/main">
+  <p:cSld name="Slide 24">
     <p:bg>
       <p:bgPr>
         <a:solidFill>
@@ -8619,7 +8577,7 @@
         <p:spPr>
           <a:xfrm>
             <a:off x="822960" y="2743200"/>
-            <a:ext cx="10515600" cy="3017520"/>
+            <a:ext cx="10515600" cy="2834640"/>
           </a:xfrm>
           <a:prstGeom prst="rect">
             <a:avLst/>
@@ -8660,7 +8618,7 @@
                 <a:ea typeface="Calibri" pitchFamily="34" charset="-122"/>
                 <a:cs typeface="Calibri" pitchFamily="34" charset="-120"/>
               </a:rPr>
-              <a:t>Chat Trigger → AI Agent → Google Gemini Chat Model → paste the system prompt (IM-500 thresholds inline).</a:t>
+              <a:t>Chat Trigger -&gt; AI Agent -&gt; Google Gemini Chat Model -&gt; paste the system prompt.</a:t>
             </a:r>
             <a:endParaRPr lang="en-US" sz="1900" dirty="0"/>
           </a:p>
@@ -8694,7 +8652,7 @@
                 <a:ea typeface="Calibri" pitchFamily="34" charset="-122"/>
                 <a:cs typeface="Calibri" pitchFamily="34" charset="-120"/>
               </a:rPr>
-              <a:t>Test: "vibration 3.9 mm/s for 4 shifts" → pump bearing wear, ~7 days.</a:t>
+              <a:t>Test: "vibration 3.9 mm/s for 4 shifts" -&gt; pump bearing wear, ~7 days.</a:t>
             </a:r>
             <a:endParaRPr lang="en-US" sz="1900" dirty="0"/>
           </a:p>
@@ -8728,9 +8686,62 @@
                 <a:ea typeface="Calibri" pitchFamily="34" charset="-122"/>
                 <a:cs typeface="Calibri" pitchFamily="34" charset="-120"/>
               </a:rPr>
-              <a:t>Grounding check: ask something not in the data → it refuses, no hallucination.</a:t>
+              <a:t>Grounding check: ask something not in the data -&gt; it refuses, no hallucination.</a:t>
             </a:r>
             <a:endParaRPr lang="en-US" sz="1900" dirty="0"/>
+          </a:p>
+        </p:txBody>
+      </p:sp>
+      <p:sp>
+        <p:nvSpPr>
+          <p:cNvPr id="7" name="Text 5"/>
+          <p:cNvSpPr/>
+          <p:nvPr/>
+        </p:nvSpPr>
+        <p:spPr>
+          <a:xfrm>
+            <a:off x="822960" y="5943600"/>
+            <a:ext cx="10515600" cy="292608"/>
+          </a:xfrm>
+          <a:prstGeom prst="rect">
+            <a:avLst/>
+          </a:prstGeom>
+          <a:noFill/>
+          <a:ln/>
+        </p:spPr>
+        <p:txBody>
+          <a:bodyPr wrap="square" rtlCol="0" anchor="ctr"/>
+          <a:lstStyle/>
+          <a:p>
+            <a:pPr indent="0" marL="0">
+              <a:buNone/>
+            </a:pPr>
+            <a:r>
+              <a:rPr lang="en-US" sz="1400" b="1" dirty="0">
+                <a:solidFill>
+                  <a:srgbClr val="F59E0B"/>
+                </a:solidFill>
+                <a:latin typeface="Calibri" pitchFamily="34" charset="0"/>
+                <a:ea typeface="Calibri" pitchFamily="34" charset="-122"/>
+                <a:cs typeface="Calibri" pitchFamily="34" charset="-120"/>
+              </a:rPr>
+              <a:t>↗  </a:t>
+            </a:r>
+            <a:pPr indent="0" marL="0">
+              <a:buNone/>
+            </a:pPr>
+            <a:r>
+              <a:rPr lang="en-US" sz="1400" dirty="0">
+                <a:solidFill>
+                  <a:srgbClr val="22D3EE"/>
+                </a:solidFill>
+                <a:latin typeface="Calibri" pitchFamily="34" charset="0"/>
+                <a:ea typeface="Calibri" pitchFamily="34" charset="-122"/>
+                <a:cs typeface="Calibri" pitchFamily="34" charset="-120"/>
+              </a:rPr>
+              <a:t>your n8n workflows home</a:t>
+            </a:r>
+            <a:endParaRPr lang="en-US" sz="1400" dirty="0"/>
           </a:p>
         </p:txBody>
       </p:sp>
@@ -8742,9 +8753,9 @@
 </p:sld>
 </file>
 
-<file path=ppt/slides/slide24.xml><?xml version="1.0" encoding="utf-8"?>
+<file path=ppt/slides/slide25.xml><?xml version="1.0" encoding="utf-8"?>
 <p:sld xmlns:a="http://schemas.openxmlformats.org/drawingml/2006/main" xmlns:r="http://schemas.openxmlformats.org/officeDocument/2006/relationships" xmlns:p="http://schemas.openxmlformats.org/presentationml/2006/main">
-  <p:cSld name="Slide 24">
+  <p:cSld name="Slide 25">
     <p:bg>
       <p:bgPr>
         <a:solidFill>
@@ -8877,7 +8888,7 @@
                 <a:ea typeface="Calibri" pitchFamily="34" charset="-122"/>
                 <a:cs typeface="Calibri" pitchFamily="34" charset="-120"/>
               </a:rPr>
-              <a:t>Agent B — same pattern, different data</a:t>
+              <a:t>Agent B - same pattern, different data</a:t>
             </a:r>
             <a:endParaRPr lang="en-US" sz="3200" dirty="0"/>
           </a:p>
@@ -8892,280 +8903,7 @@
         <p:spPr>
           <a:xfrm>
             <a:off x="822960" y="2148840"/>
-            <a:ext cx="10515600" cy="3840480"/>
-          </a:xfrm>
-          <a:prstGeom prst="rect">
-            <a:avLst/>
-          </a:prstGeom>
-          <a:noFill/>
-          <a:ln/>
-        </p:spPr>
-        <p:txBody>
-          <a:bodyPr wrap="square" rtlCol="0" anchor="t"/>
-          <a:lstStyle/>
-          <a:p>
-            <a:pPr indent="0" marL="0">
-              <a:buNone/>
-            </a:pPr>
-            <a:r>
-              <a:rPr lang="en-US" sz="2000" b="1" dirty="0">
-                <a:solidFill>
-                  <a:srgbClr val="22D3EE"/>
-                </a:solidFill>
-                <a:latin typeface="Calibri" pitchFamily="34" charset="0"/>
-                <a:ea typeface="Calibri" pitchFamily="34" charset="-122"/>
-                <a:cs typeface="Calibri" pitchFamily="34" charset="-120"/>
-              </a:rPr>
-              <a:t>▸  </a:t>
-            </a:r>
-            <a:pPr indent="0" marL="0">
-              <a:spcAft>
-                <a:spcPts val="1800"/>
-              </a:spcAft>
-              <a:buNone/>
-            </a:pPr>
-            <a:r>
-              <a:rPr lang="en-US" sz="2000" dirty="0">
-                <a:solidFill>
-                  <a:srgbClr val="E6EDF3"/>
-                </a:solidFill>
-                <a:latin typeface="Calibri" pitchFamily="34" charset="0"/>
-                <a:ea typeface="Calibri" pitchFamily="34" charset="-122"/>
-                <a:cs typeface="Calibri" pitchFamily="34" charset="-120"/>
-              </a:rPr>
-              <a:t>Agent B = Spare Parts: given a failing part, returns stock + lead time + order decision.</a:t>
-            </a:r>
-            <a:endParaRPr lang="en-US" sz="2000" dirty="0"/>
-          </a:p>
-          <a:p>
-            <a:pPr indent="0" marL="0">
-              <a:buNone/>
-            </a:pPr>
-            <a:r>
-              <a:rPr lang="en-US" sz="2000" b="1" dirty="0">
-                <a:solidFill>
-                  <a:srgbClr val="22D3EE"/>
-                </a:solidFill>
-                <a:latin typeface="Calibri" pitchFamily="34" charset="0"/>
-                <a:ea typeface="Calibri" pitchFamily="34" charset="-122"/>
-                <a:cs typeface="Calibri" pitchFamily="34" charset="-120"/>
-              </a:rPr>
-              <a:t>▸  </a:t>
-            </a:r>
-            <a:pPr indent="0" marL="0">
-              <a:spcAft>
-                <a:spcPts val="1800"/>
-              </a:spcAft>
-              <a:buNone/>
-            </a:pPr>
-            <a:r>
-              <a:rPr lang="en-US" sz="2000" dirty="0">
-                <a:solidFill>
-                  <a:srgbClr val="E6EDF3"/>
-                </a:solidFill>
-                <a:latin typeface="Calibri" pitchFamily="34" charset="0"/>
-                <a:ea typeface="Calibri" pitchFamily="34" charset="-122"/>
-                <a:cs typeface="Calibri" pitchFamily="34" charset="-120"/>
-              </a:rPr>
-              <a:t>Identical steps to Agent A; only the reference data changes.</a:t>
-            </a:r>
-            <a:endParaRPr lang="en-US" sz="2000" dirty="0"/>
-          </a:p>
-          <a:p>
-            <a:pPr indent="0" marL="0">
-              <a:buNone/>
-            </a:pPr>
-            <a:r>
-              <a:rPr lang="en-US" sz="2000" b="1" dirty="0">
-                <a:solidFill>
-                  <a:srgbClr val="22D3EE"/>
-                </a:solidFill>
-                <a:latin typeface="Calibri" pitchFamily="34" charset="0"/>
-                <a:ea typeface="Calibri" pitchFamily="34" charset="-122"/>
-                <a:cs typeface="Calibri" pitchFamily="34" charset="-120"/>
-              </a:rPr>
-              <a:t>▸  </a:t>
-            </a:r>
-            <a:pPr indent="0" marL="0">
-              <a:spcAft>
-                <a:spcPts val="1800"/>
-              </a:spcAft>
-              <a:buNone/>
-            </a:pPr>
-            <a:r>
-              <a:rPr lang="en-US" sz="2000" dirty="0">
-                <a:solidFill>
-                  <a:srgbClr val="E6EDF3"/>
-                </a:solidFill>
-                <a:latin typeface="Calibri" pitchFamily="34" charset="0"/>
-                <a:ea typeface="Calibri" pitchFamily="34" charset="-122"/>
-                <a:cs typeface="Calibri" pitchFamily="34" charset="-120"/>
-              </a:rPr>
-              <a:t>Take-home: participants rebuild Agent B themselves from the manual.</a:t>
-            </a:r>
-            <a:endParaRPr lang="en-US" sz="2000" dirty="0"/>
-          </a:p>
-        </p:txBody>
-      </p:sp>
-    </p:spTree>
-  </p:cSld>
-  <p:clrMapOvr>
-    <a:masterClrMapping/>
-  </p:clrMapOvr>
-</p:sld>
-</file>
-
-<file path=ppt/slides/slide25.xml><?xml version="1.0" encoding="utf-8"?>
-<p:sld xmlns:a="http://schemas.openxmlformats.org/drawingml/2006/main" xmlns:r="http://schemas.openxmlformats.org/officeDocument/2006/relationships" xmlns:p="http://schemas.openxmlformats.org/presentationml/2006/main">
-  <p:cSld name="Slide 25">
-    <p:bg>
-      <p:bgPr>
-        <a:solidFill>
-          <a:srgbClr val="06090D"/>
-        </a:solidFill>
-      </p:bgPr>
-    </p:bg>
-    <p:spTree>
-      <p:nvGrpSpPr>
-        <p:cNvPr id="1" name=""/>
-        <p:cNvGrpSpPr/>
-        <p:nvPr/>
-      </p:nvGrpSpPr>
-      <p:grpSpPr>
-        <a:xfrm>
-          <a:off x="0" y="0"/>
-          <a:ext cx="0" cy="0"/>
-          <a:chOff x="0" y="0"/>
-          <a:chExt cx="0" cy="0"/>
-        </a:xfrm>
-      </p:grpSpPr>
-      <p:sp>
-        <p:nvSpPr>
-          <p:cNvPr id="2" name="Text 0"/>
-          <p:cNvSpPr/>
-          <p:nvPr/>
-        </p:nvSpPr>
-        <p:spPr>
-          <a:xfrm>
-            <a:off x="822960" y="6446520"/>
-            <a:ext cx="5486400" cy="274320"/>
-          </a:xfrm>
-          <a:prstGeom prst="rect">
-            <a:avLst/>
-          </a:prstGeom>
-          <a:noFill/>
-          <a:ln/>
-        </p:spPr>
-        <p:txBody>
-          <a:bodyPr wrap="square" rtlCol="0" anchor="ctr"/>
-          <a:lstStyle/>
-          <a:p>
-            <a:pPr indent="0" marL="0">
-              <a:buNone/>
-            </a:pPr>
-            <a:r>
-              <a:rPr lang="en-US" sz="1100" spc="100" kern="0" dirty="0">
-                <a:solidFill>
-                  <a:srgbClr val="AAB4C0"/>
-                </a:solidFill>
-                <a:latin typeface="Calibri" pitchFamily="34" charset="0"/>
-                <a:ea typeface="Calibri" pitchFamily="34" charset="-122"/>
-                <a:cs typeface="Calibri" pitchFamily="34" charset="-120"/>
-              </a:rPr>
-              <a:t>arjunthakur.dev</a:t>
-            </a:r>
-            <a:endParaRPr lang="en-US" sz="1100" dirty="0"/>
-          </a:p>
-        </p:txBody>
-      </p:sp>
-      <p:sp>
-        <p:nvSpPr>
-          <p:cNvPr id="3" name="Text 1"/>
-          <p:cNvSpPr/>
-          <p:nvPr/>
-        </p:nvSpPr>
-        <p:spPr>
-          <a:xfrm>
-            <a:off x="822960" y="1005840"/>
-            <a:ext cx="10515600" cy="365760"/>
-          </a:xfrm>
-          <a:prstGeom prst="rect">
-            <a:avLst/>
-          </a:prstGeom>
-          <a:noFill/>
-          <a:ln/>
-        </p:spPr>
-        <p:txBody>
-          <a:bodyPr wrap="square" rtlCol="0" anchor="ctr"/>
-          <a:lstStyle/>
-          <a:p>
-            <a:pPr indent="0" marL="0">
-              <a:buNone/>
-            </a:pPr>
-            <a:r>
-              <a:rPr lang="en-US" sz="1400" b="1" spc="400" kern="0" dirty="0">
-                <a:solidFill>
-                  <a:srgbClr val="22D3EE"/>
-                </a:solidFill>
-                <a:latin typeface="Calibri" pitchFamily="34" charset="0"/>
-                <a:ea typeface="Calibri" pitchFamily="34" charset="-122"/>
-                <a:cs typeface="Calibri" pitchFamily="34" charset="-120"/>
-              </a:rPr>
-              <a:t>Q &amp; A</a:t>
-            </a:r>
-            <a:endParaRPr lang="en-US" sz="1400" dirty="0"/>
-          </a:p>
-        </p:txBody>
-      </p:sp>
-      <p:sp>
-        <p:nvSpPr>
-          <p:cNvPr id="4" name="Text 2"/>
-          <p:cNvSpPr/>
-          <p:nvPr/>
-        </p:nvSpPr>
-        <p:spPr>
-          <a:xfrm>
-            <a:off x="822960" y="1371600"/>
-            <a:ext cx="10515600" cy="1097280"/>
-          </a:xfrm>
-          <a:prstGeom prst="rect">
-            <a:avLst/>
-          </a:prstGeom>
-          <a:noFill/>
-          <a:ln/>
-        </p:spPr>
-        <p:txBody>
-          <a:bodyPr wrap="square" rtlCol="0" anchor="ctr"/>
-          <a:lstStyle/>
-          <a:p>
-            <a:pPr indent="0" marL="0">
-              <a:buNone/>
-            </a:pPr>
-            <a:r>
-              <a:rPr lang="en-US" sz="5000" b="1" dirty="0">
-                <a:solidFill>
-                  <a:srgbClr val="E6EDF3"/>
-                </a:solidFill>
-                <a:latin typeface="Calibri" pitchFamily="34" charset="0"/>
-                <a:ea typeface="Calibri" pitchFamily="34" charset="-122"/>
-                <a:cs typeface="Calibri" pitchFamily="34" charset="-120"/>
-              </a:rPr>
-              <a:t>Agents — questions</a:t>
-            </a:r>
-            <a:endParaRPr lang="en-US" sz="5000" dirty="0"/>
-          </a:p>
-        </p:txBody>
-      </p:sp>
-      <p:sp>
-        <p:nvSpPr>
-          <p:cNvPr id="5" name="Text 3"/>
-          <p:cNvSpPr/>
-          <p:nvPr/>
-        </p:nvSpPr>
-        <p:spPr>
-          <a:xfrm>
-            <a:off x="822960" y="2788920"/>
-            <a:ext cx="10515600" cy="2011680"/>
+            <a:ext cx="10515600" cy="3657600"/>
           </a:xfrm>
           <a:prstGeom prst="rect">
             <a:avLst/>
@@ -9206,7 +8944,7 @@
                 <a:ea typeface="Calibri" pitchFamily="34" charset="-122"/>
                 <a:cs typeface="Calibri" pitchFamily="34" charset="-120"/>
               </a:rPr>
-              <a:t>Which repetitive task could an agent take the first pass at?</a:t>
+              <a:t>Agent B = Spare Parts: given a failing part, returns stock + lead time + order decision.</a:t>
             </a:r>
             <a:endParaRPr lang="en-US" sz="2000" dirty="0"/>
           </a:p>
@@ -9240,9 +8978,96 @@
                 <a:ea typeface="Calibri" pitchFamily="34" charset="-122"/>
                 <a:cs typeface="Calibri" pitchFamily="34" charset="-120"/>
               </a:rPr>
-              <a:t>Where must a human always stay in the loop?</a:t>
+              <a:t>Identical steps to Agent A; only the reference data changes.</a:t>
             </a:r>
             <a:endParaRPr lang="en-US" sz="2000" dirty="0"/>
+          </a:p>
+          <a:p>
+            <a:pPr indent="0" marL="0">
+              <a:buNone/>
+            </a:pPr>
+            <a:r>
+              <a:rPr lang="en-US" sz="2000" b="1" dirty="0">
+                <a:solidFill>
+                  <a:srgbClr val="22D3EE"/>
+                </a:solidFill>
+                <a:latin typeface="Calibri" pitchFamily="34" charset="0"/>
+                <a:ea typeface="Calibri" pitchFamily="34" charset="-122"/>
+                <a:cs typeface="Calibri" pitchFamily="34" charset="-120"/>
+              </a:rPr>
+              <a:t>▸  </a:t>
+            </a:r>
+            <a:pPr indent="0" marL="0">
+              <a:spcAft>
+                <a:spcPts val="1600"/>
+              </a:spcAft>
+              <a:buNone/>
+            </a:pPr>
+            <a:r>
+              <a:rPr lang="en-US" sz="2000" dirty="0">
+                <a:solidFill>
+                  <a:srgbClr val="E6EDF3"/>
+                </a:solidFill>
+                <a:latin typeface="Calibri" pitchFamily="34" charset="0"/>
+                <a:ea typeface="Calibri" pitchFamily="34" charset="-122"/>
+                <a:cs typeface="Calibri" pitchFamily="34" charset="-120"/>
+              </a:rPr>
+              <a:t>Take-home: participants rebuild Agent B themselves from the manual.</a:t>
+            </a:r>
+            <a:endParaRPr lang="en-US" sz="2000" dirty="0"/>
+          </a:p>
+        </p:txBody>
+      </p:sp>
+      <p:sp>
+        <p:nvSpPr>
+          <p:cNvPr id="6" name="Text 4"/>
+          <p:cNvSpPr/>
+          <p:nvPr/>
+        </p:nvSpPr>
+        <p:spPr>
+          <a:xfrm>
+            <a:off x="822960" y="5806440"/>
+            <a:ext cx="10515600" cy="457200"/>
+          </a:xfrm>
+          <a:prstGeom prst="rect">
+            <a:avLst/>
+          </a:prstGeom>
+          <a:noFill/>
+          <a:ln/>
+        </p:spPr>
+        <p:txBody>
+          <a:bodyPr wrap="square" rtlCol="0" anchor="ctr"/>
+          <a:lstStyle/>
+          <a:p>
+            <a:pPr indent="0" marL="0">
+              <a:buNone/>
+            </a:pPr>
+            <a:r>
+              <a:rPr lang="en-US" sz="1600" b="1" dirty="0">
+                <a:solidFill>
+                  <a:srgbClr val="F59E0B"/>
+                </a:solidFill>
+                <a:latin typeface="Calibri" pitchFamily="34" charset="0"/>
+                <a:ea typeface="Calibri" pitchFamily="34" charset="-122"/>
+                <a:cs typeface="Calibri" pitchFamily="34" charset="-120"/>
+              </a:rPr>
+              <a:t>Ask the room:  </a:t>
+            </a:r>
+            <a:pPr indent="0" marL="0">
+              <a:buNone/>
+            </a:pPr>
+            <a:r>
+              <a:rPr lang="en-US" sz="1600" i="1" dirty="0">
+                <a:solidFill>
+                  <a:srgbClr val="E6EDF3"/>
+                </a:solidFill>
+                <a:latin typeface="Calibri" pitchFamily="34" charset="0"/>
+                <a:ea typeface="Calibri" pitchFamily="34" charset="-122"/>
+                <a:cs typeface="Calibri" pitchFamily="34" charset="-120"/>
+              </a:rPr>
+              <a:t>what's one lookup your team does by hand that an agent could do?</a:t>
+            </a:r>
+            <a:endParaRPr lang="en-US" sz="1600" dirty="0"/>
           </a:p>
         </p:txBody>
       </p:sp>
@@ -9325,8 +9150,8 @@
         </p:nvSpPr>
         <p:spPr>
           <a:xfrm>
-            <a:off x="822960" y="1965960"/>
-            <a:ext cx="10515600" cy="914400"/>
+            <a:off x="822960" y="1005840"/>
+            <a:ext cx="10515600" cy="365760"/>
           </a:xfrm>
           <a:prstGeom prst="rect">
             <a:avLst/>
@@ -9338,11 +9163,11 @@
           <a:bodyPr wrap="square" rtlCol="0" anchor="ctr"/>
           <a:lstStyle/>
           <a:p>
-            <a:pPr algn="ctr" indent="0" marL="0">
-              <a:buNone/>
-            </a:pPr>
-            <a:r>
-              <a:rPr lang="en-US" sz="6000" b="1" spc="800" kern="0" dirty="0">
+            <a:pPr indent="0" marL="0">
+              <a:buNone/>
+            </a:pPr>
+            <a:r>
+              <a:rPr lang="en-US" sz="1400" b="1" spc="400" kern="0" dirty="0">
                 <a:solidFill>
                   <a:srgbClr val="22D3EE"/>
                 </a:solidFill>
@@ -9350,9 +9175,9 @@
                 <a:ea typeface="Calibri" pitchFamily="34" charset="-122"/>
                 <a:cs typeface="Calibri" pitchFamily="34" charset="-120"/>
               </a:rPr>
-              <a:t>BREAK</a:t>
-            </a:r>
-            <a:endParaRPr lang="en-US" sz="6000" dirty="0"/>
+              <a:t>Q &amp; A</a:t>
+            </a:r>
+            <a:endParaRPr lang="en-US" sz="1400" dirty="0"/>
           </a:p>
         </p:txBody>
       </p:sp>
@@ -9364,8 +9189,8 @@
         </p:nvSpPr>
         <p:spPr>
           <a:xfrm>
-            <a:off x="822960" y="3154680"/>
-            <a:ext cx="10515600" cy="731520"/>
+            <a:off x="822960" y="1371600"/>
+            <a:ext cx="10515600" cy="1097280"/>
           </a:xfrm>
           <a:prstGeom prst="rect">
             <a:avLst/>
@@ -9377,11 +9202,11 @@
           <a:bodyPr wrap="square" rtlCol="0" anchor="ctr"/>
           <a:lstStyle/>
           <a:p>
-            <a:pPr algn="ctr" indent="0" marL="0">
-              <a:buNone/>
-            </a:pPr>
-            <a:r>
-              <a:rPr lang="en-US" sz="2800" dirty="0">
+            <a:pPr indent="0" marL="0">
+              <a:buNone/>
+            </a:pPr>
+            <a:r>
+              <a:rPr lang="en-US" sz="5000" b="1" dirty="0">
                 <a:solidFill>
                   <a:srgbClr val="E6EDF3"/>
                 </a:solidFill>
@@ -9389,9 +9214,9 @@
                 <a:ea typeface="Calibri" pitchFamily="34" charset="-122"/>
                 <a:cs typeface="Calibri" pitchFamily="34" charset="-120"/>
               </a:rPr>
-              <a:t>7 minutes</a:t>
-            </a:r>
-            <a:endParaRPr lang="en-US" sz="2800" dirty="0"/>
+              <a:t>Agents - questions</a:t>
+            </a:r>
+            <a:endParaRPr lang="en-US" sz="5000" dirty="0"/>
           </a:p>
         </p:txBody>
       </p:sp>
@@ -9403,34 +9228,85 @@
         </p:nvSpPr>
         <p:spPr>
           <a:xfrm>
-            <a:off x="822960" y="3977640"/>
-            <a:ext cx="10515600" cy="548640"/>
-          </a:xfrm>
-          <a:prstGeom prst="rect">
-            <a:avLst/>
-          </a:prstGeom>
-          <a:noFill/>
-          <a:ln/>
-        </p:spPr>
-        <p:txBody>
-          <a:bodyPr wrap="square" rtlCol="0" anchor="ctr"/>
-          <a:lstStyle/>
-          <a:p>
-            <a:pPr algn="ctr" indent="0" marL="0">
-              <a:buNone/>
-            </a:pPr>
-            <a:r>
-              <a:rPr lang="en-US" sz="1700" i="1" dirty="0">
-                <a:solidFill>
-                  <a:srgbClr val="8592A3"/>
-                </a:solidFill>
-                <a:latin typeface="Calibri" pitchFamily="34" charset="0"/>
-                <a:ea typeface="Calibri" pitchFamily="34" charset="-122"/>
-                <a:cs typeface="Calibri" pitchFamily="34" charset="-120"/>
-              </a:rPr>
-              <a:t>We'll resume right on time.</a:t>
-            </a:r>
-            <a:endParaRPr lang="en-US" sz="1700" dirty="0"/>
+            <a:off x="822960" y="2788920"/>
+            <a:ext cx="10515600" cy="2011680"/>
+          </a:xfrm>
+          <a:prstGeom prst="rect">
+            <a:avLst/>
+          </a:prstGeom>
+          <a:noFill/>
+          <a:ln/>
+        </p:spPr>
+        <p:txBody>
+          <a:bodyPr wrap="square" rtlCol="0" anchor="t"/>
+          <a:lstStyle/>
+          <a:p>
+            <a:pPr indent="0" marL="0">
+              <a:buNone/>
+            </a:pPr>
+            <a:r>
+              <a:rPr lang="en-US" sz="2000" b="1" dirty="0">
+                <a:solidFill>
+                  <a:srgbClr val="22D3EE"/>
+                </a:solidFill>
+                <a:latin typeface="Calibri" pitchFamily="34" charset="0"/>
+                <a:ea typeface="Calibri" pitchFamily="34" charset="-122"/>
+                <a:cs typeface="Calibri" pitchFamily="34" charset="-120"/>
+              </a:rPr>
+              <a:t>▸  </a:t>
+            </a:r>
+            <a:pPr indent="0" marL="0">
+              <a:spcAft>
+                <a:spcPts val="1600"/>
+              </a:spcAft>
+              <a:buNone/>
+            </a:pPr>
+            <a:r>
+              <a:rPr lang="en-US" sz="2000" dirty="0">
+                <a:solidFill>
+                  <a:srgbClr val="E6EDF3"/>
+                </a:solidFill>
+                <a:latin typeface="Calibri" pitchFamily="34" charset="0"/>
+                <a:ea typeface="Calibri" pitchFamily="34" charset="-122"/>
+                <a:cs typeface="Calibri" pitchFamily="34" charset="-120"/>
+              </a:rPr>
+              <a:t>Which repetitive task could an agent take the first pass at?</a:t>
+            </a:r>
+            <a:endParaRPr lang="en-US" sz="2000" dirty="0"/>
+          </a:p>
+          <a:p>
+            <a:pPr indent="0" marL="0">
+              <a:buNone/>
+            </a:pPr>
+            <a:r>
+              <a:rPr lang="en-US" sz="2000" b="1" dirty="0">
+                <a:solidFill>
+                  <a:srgbClr val="22D3EE"/>
+                </a:solidFill>
+                <a:latin typeface="Calibri" pitchFamily="34" charset="0"/>
+                <a:ea typeface="Calibri" pitchFamily="34" charset="-122"/>
+                <a:cs typeface="Calibri" pitchFamily="34" charset="-120"/>
+              </a:rPr>
+              <a:t>▸  </a:t>
+            </a:r>
+            <a:pPr indent="0" marL="0">
+              <a:spcAft>
+                <a:spcPts val="1600"/>
+              </a:spcAft>
+              <a:buNone/>
+            </a:pPr>
+            <a:r>
+              <a:rPr lang="en-US" sz="2000" dirty="0">
+                <a:solidFill>
+                  <a:srgbClr val="E6EDF3"/>
+                </a:solidFill>
+                <a:latin typeface="Calibri" pitchFamily="34" charset="0"/>
+                <a:ea typeface="Calibri" pitchFamily="34" charset="-122"/>
+                <a:cs typeface="Calibri" pitchFamily="34" charset="-120"/>
+              </a:rPr>
+              <a:t>Where must a human always stay in the loop?</a:t>
+            </a:r>
+            <a:endParaRPr lang="en-US" sz="2000" dirty="0"/>
           </a:p>
         </p:txBody>
       </p:sp>
@@ -9513,8 +9389,8 @@
         </p:nvSpPr>
         <p:spPr>
           <a:xfrm>
-            <a:off x="749808" y="457200"/>
-            <a:ext cx="5486400" cy="2377440"/>
+            <a:off x="822960" y="1965960"/>
+            <a:ext cx="10515600" cy="914400"/>
           </a:xfrm>
           <a:prstGeom prst="rect">
             <a:avLst/>
@@ -9526,21 +9402,21 @@
           <a:bodyPr wrap="square" rtlCol="0" anchor="ctr"/>
           <a:lstStyle/>
           <a:p>
-            <a:pPr indent="0" marL="0">
-              <a:buNone/>
-            </a:pPr>
-            <a:r>
-              <a:rPr lang="en-US" sz="15000" b="1" dirty="0">
-                <a:solidFill>
-                  <a:srgbClr val="0E7490"/>
-                </a:solidFill>
-                <a:latin typeface="Calibri" pitchFamily="34" charset="0"/>
-                <a:ea typeface="Calibri" pitchFamily="34" charset="-122"/>
-                <a:cs typeface="Calibri" pitchFamily="34" charset="-120"/>
-              </a:rPr>
-              <a:t>04</a:t>
-            </a:r>
-            <a:endParaRPr lang="en-US" sz="15000" dirty="0"/>
+            <a:pPr algn="ctr" indent="0" marL="0">
+              <a:buNone/>
+            </a:pPr>
+            <a:r>
+              <a:rPr lang="en-US" sz="6000" b="1" spc="800" kern="0" dirty="0">
+                <a:solidFill>
+                  <a:srgbClr val="22D3EE"/>
+                </a:solidFill>
+                <a:latin typeface="Calibri" pitchFamily="34" charset="0"/>
+                <a:ea typeface="Calibri" pitchFamily="34" charset="-122"/>
+                <a:cs typeface="Calibri" pitchFamily="34" charset="-120"/>
+              </a:rPr>
+              <a:t>BREAK</a:t>
+            </a:r>
+            <a:endParaRPr lang="en-US" sz="6000" dirty="0"/>
           </a:p>
         </p:txBody>
       </p:sp>
@@ -9552,8 +9428,8 @@
         </p:nvSpPr>
         <p:spPr>
           <a:xfrm>
-            <a:off x="868680" y="3200400"/>
-            <a:ext cx="10515600" cy="365760"/>
+            <a:off x="822960" y="3154680"/>
+            <a:ext cx="10515600" cy="731520"/>
           </a:xfrm>
           <a:prstGeom prst="rect">
             <a:avLst/>
@@ -9565,21 +9441,21 @@
           <a:bodyPr wrap="square" rtlCol="0" anchor="ctr"/>
           <a:lstStyle/>
           <a:p>
-            <a:pPr indent="0" marL="0">
-              <a:buNone/>
-            </a:pPr>
-            <a:r>
-              <a:rPr lang="en-US" sz="1400" b="1" spc="400" kern="0" dirty="0">
-                <a:solidFill>
-                  <a:srgbClr val="22D3EE"/>
-                </a:solidFill>
-                <a:latin typeface="Calibri" pitchFamily="34" charset="0"/>
-                <a:ea typeface="Calibri" pitchFamily="34" charset="-122"/>
-                <a:cs typeface="Calibri" pitchFamily="34" charset="-120"/>
-              </a:rPr>
-              <a:t>SECTION 4</a:t>
-            </a:r>
-            <a:endParaRPr lang="en-US" sz="1400" dirty="0"/>
+            <a:pPr algn="ctr" indent="0" marL="0">
+              <a:buNone/>
+            </a:pPr>
+            <a:r>
+              <a:rPr lang="en-US" sz="2800" dirty="0">
+                <a:solidFill>
+                  <a:srgbClr val="E6EDF3"/>
+                </a:solidFill>
+                <a:latin typeface="Calibri" pitchFamily="34" charset="0"/>
+                <a:ea typeface="Calibri" pitchFamily="34" charset="-122"/>
+                <a:cs typeface="Calibri" pitchFamily="34" charset="-120"/>
+              </a:rPr>
+              <a:t>7 minutes</a:t>
+            </a:r>
+            <a:endParaRPr lang="en-US" sz="2800" dirty="0"/>
           </a:p>
         </p:txBody>
       </p:sp>
@@ -9591,8 +9467,8 @@
         </p:nvSpPr>
         <p:spPr>
           <a:xfrm>
-            <a:off x="822960" y="3566160"/>
-            <a:ext cx="10607040" cy="1005840"/>
+            <a:off x="822960" y="3977640"/>
+            <a:ext cx="10515600" cy="548640"/>
           </a:xfrm>
           <a:prstGeom prst="rect">
             <a:avLst/>
@@ -9604,46 +9480,7 @@
           <a:bodyPr wrap="square" rtlCol="0" anchor="ctr"/>
           <a:lstStyle/>
           <a:p>
-            <a:pPr indent="0" marL="0">
-              <a:buNone/>
-            </a:pPr>
-            <a:r>
-              <a:rPr lang="en-US" sz="4400" b="1" dirty="0">
-                <a:solidFill>
-                  <a:srgbClr val="E6EDF3"/>
-                </a:solidFill>
-                <a:latin typeface="Calibri" pitchFamily="34" charset="0"/>
-                <a:ea typeface="Calibri" pitchFamily="34" charset="-122"/>
-                <a:cs typeface="Calibri" pitchFamily="34" charset="-120"/>
-              </a:rPr>
-              <a:t>Agentic AI &amp; Orchestration</a:t>
-            </a:r>
-            <a:endParaRPr lang="en-US" sz="4400" dirty="0"/>
-          </a:p>
-        </p:txBody>
-      </p:sp>
-      <p:sp>
-        <p:nvSpPr>
-          <p:cNvPr id="6" name="Text 4"/>
-          <p:cNvSpPr/>
-          <p:nvPr/>
-        </p:nvSpPr>
-        <p:spPr>
-          <a:xfrm>
-            <a:off x="859536" y="4617720"/>
-            <a:ext cx="10241280" cy="548640"/>
-          </a:xfrm>
-          <a:prstGeom prst="rect">
-            <a:avLst/>
-          </a:prstGeom>
-          <a:noFill/>
-          <a:ln/>
-        </p:spPr>
-        <p:txBody>
-          <a:bodyPr wrap="square" rtlCol="0" anchor="ctr"/>
-          <a:lstStyle/>
-          <a:p>
-            <a:pPr indent="0" marL="0">
+            <a:pPr algn="ctr" indent="0" marL="0">
               <a:buNone/>
             </a:pPr>
             <a:r>
@@ -9655,7 +9492,7 @@
                 <a:ea typeface="Calibri" pitchFamily="34" charset="-122"/>
                 <a:cs typeface="Calibri" pitchFamily="34" charset="-120"/>
               </a:rPr>
-              <a:t>Many agents, working together</a:t>
+              <a:t>We'll resume right on time.</a:t>
             </a:r>
             <a:endParaRPr lang="en-US" sz="1700" dirty="0"/>
           </a:p>
@@ -9675,7 +9512,7 @@
     <p:bg>
       <p:bgPr>
         <a:solidFill>
-          <a:srgbClr val="0B0F15"/>
+          <a:srgbClr val="06090D"/>
         </a:solidFill>
       </p:bgPr>
     </p:bg>
@@ -9740,7 +9577,46 @@
         </p:nvSpPr>
         <p:spPr>
           <a:xfrm>
-            <a:off x="822960" y="566928"/>
+            <a:off x="749808" y="457200"/>
+            <a:ext cx="5486400" cy="2377440"/>
+          </a:xfrm>
+          <a:prstGeom prst="rect">
+            <a:avLst/>
+          </a:prstGeom>
+          <a:noFill/>
+          <a:ln/>
+        </p:spPr>
+        <p:txBody>
+          <a:bodyPr wrap="square" rtlCol="0" anchor="ctr"/>
+          <a:lstStyle/>
+          <a:p>
+            <a:pPr indent="0" marL="0">
+              <a:buNone/>
+            </a:pPr>
+            <a:r>
+              <a:rPr lang="en-US" sz="15000" b="1" dirty="0">
+                <a:solidFill>
+                  <a:srgbClr val="0E7490"/>
+                </a:solidFill>
+                <a:latin typeface="Calibri" pitchFamily="34" charset="0"/>
+                <a:ea typeface="Calibri" pitchFamily="34" charset="-122"/>
+                <a:cs typeface="Calibri" pitchFamily="34" charset="-120"/>
+              </a:rPr>
+              <a:t>04</a:t>
+            </a:r>
+            <a:endParaRPr lang="en-US" sz="15000" dirty="0"/>
+          </a:p>
+        </p:txBody>
+      </p:sp>
+      <p:sp>
+        <p:nvSpPr>
+          <p:cNvPr id="4" name="Text 2"/>
+          <p:cNvSpPr/>
+          <p:nvPr/>
+        </p:nvSpPr>
+        <p:spPr>
+          <a:xfrm>
+            <a:off x="868680" y="3200400"/>
             <a:ext cx="10515600" cy="365760"/>
           </a:xfrm>
           <a:prstGeom prst="rect">
@@ -9765,7 +9641,7 @@
                 <a:ea typeface="Calibri" pitchFamily="34" charset="-122"/>
                 <a:cs typeface="Calibri" pitchFamily="34" charset="-120"/>
               </a:rPr>
-              <a:t>MODULE 4 · ORCHESTRATION</a:t>
+              <a:t>SECTION 4</a:t>
             </a:r>
             <a:endParaRPr lang="en-US" sz="1400" dirty="0"/>
           </a:p>
@@ -9773,14 +9649,14 @@
       </p:sp>
       <p:sp>
         <p:nvSpPr>
-          <p:cNvPr id="4" name="Text 2"/>
-          <p:cNvSpPr/>
-          <p:nvPr/>
-        </p:nvSpPr>
-        <p:spPr>
-          <a:xfrm>
-            <a:off x="822960" y="932688"/>
-            <a:ext cx="10607040" cy="640080"/>
+          <p:cNvPr id="5" name="Text 3"/>
+          <p:cNvSpPr/>
+          <p:nvPr/>
+        </p:nvSpPr>
+        <p:spPr>
+          <a:xfrm>
+            <a:off x="822960" y="3566160"/>
+            <a:ext cx="10607040" cy="1005840"/>
           </a:xfrm>
           <a:prstGeom prst="rect">
             <a:avLst/>
@@ -9796,7 +9672,7 @@
               <a:buNone/>
             </a:pPr>
             <a:r>
-              <a:rPr lang="en-US" sz="3000" b="1" dirty="0">
+              <a:rPr lang="en-US" sz="4400" b="1" dirty="0">
                 <a:solidFill>
                   <a:srgbClr val="E6EDF3"/>
                 </a:solidFill>
@@ -9804,62 +9680,51 @@
                 <a:ea typeface="Calibri" pitchFamily="34" charset="-122"/>
                 <a:cs typeface="Calibri" pitchFamily="34" charset="-120"/>
               </a:rPr>
-              <a:t>Agents as a team — A → B → C</a:t>
-            </a:r>
-            <a:endParaRPr lang="en-US" sz="3000" dirty="0"/>
-          </a:p>
-        </p:txBody>
-      </p:sp>
-      <p:sp>
-        <p:nvSpPr>
-          <p:cNvPr id="5" name="Shape 3"/>
-          <p:cNvSpPr/>
-          <p:nvPr/>
-        </p:nvSpPr>
-        <p:spPr>
-          <a:xfrm>
-            <a:off x="822960" y="1755648"/>
-            <a:ext cx="10543032" cy="4297680"/>
-          </a:xfrm>
-          <a:prstGeom prst="roundRect">
-            <a:avLst>
-              <a:gd name="adj" fmla="val 1702"/>
-            </a:avLst>
-          </a:prstGeom>
-          <a:solidFill>
-            <a:srgbClr val="0B0F15"/>
-          </a:solidFill>
-          <a:ln w="15875">
-            <a:solidFill>
-              <a:srgbClr val="1F2937"/>
-            </a:solidFill>
-            <a:prstDash val="solid"/>
-          </a:ln>
-        </p:spPr>
-      </p:sp>
-      <p:pic>
-        <p:nvPicPr>
-          <p:cNvPr id="6" name="Image 0" descr="preencoded.png">    </p:cNvPr>
-          <p:cNvPicPr>
-            <a:picLocks noChangeAspect="1"/>
-          </p:cNvPicPr>
-          <p:nvPr/>
-        </p:nvPicPr>
-        <p:blipFill>
-          <a:blip r:embed="rId1"/>
-          <a:srcRect l="0" r="0" t="0" b="0"/>
-          <a:stretch/>
-        </p:blipFill>
-        <p:spPr>
-          <a:xfrm>
-            <a:off x="960120" y="1892808"/>
-            <a:ext cx="10268712" cy="4023360"/>
-          </a:xfrm>
-          <a:prstGeom prst="rect">
-            <a:avLst/>
-          </a:prstGeom>
-        </p:spPr>
-      </p:pic>
+              <a:t>Agentic AI &amp; Orchestration</a:t>
+            </a:r>
+            <a:endParaRPr lang="en-US" sz="4400" dirty="0"/>
+          </a:p>
+        </p:txBody>
+      </p:sp>
+      <p:sp>
+        <p:nvSpPr>
+          <p:cNvPr id="6" name="Text 4"/>
+          <p:cNvSpPr/>
+          <p:nvPr/>
+        </p:nvSpPr>
+        <p:spPr>
+          <a:xfrm>
+            <a:off x="859536" y="4617720"/>
+            <a:ext cx="10241280" cy="548640"/>
+          </a:xfrm>
+          <a:prstGeom prst="rect">
+            <a:avLst/>
+          </a:prstGeom>
+          <a:noFill/>
+          <a:ln/>
+        </p:spPr>
+        <p:txBody>
+          <a:bodyPr wrap="square" rtlCol="0" anchor="ctr"/>
+          <a:lstStyle/>
+          <a:p>
+            <a:pPr indent="0" marL="0">
+              <a:buNone/>
+            </a:pPr>
+            <a:r>
+              <a:rPr lang="en-US" sz="1700" i="1" dirty="0">
+                <a:solidFill>
+                  <a:srgbClr val="8592A3"/>
+                </a:solidFill>
+                <a:latin typeface="Calibri" pitchFamily="34" charset="0"/>
+                <a:ea typeface="Calibri" pitchFamily="34" charset="-122"/>
+                <a:cs typeface="Calibri" pitchFamily="34" charset="-120"/>
+              </a:rPr>
+              <a:t>Many agents, working together</a:t>
+            </a:r>
+            <a:endParaRPr lang="en-US" sz="1700" dirty="0"/>
+          </a:p>
+        </p:txBody>
+      </p:sp>
     </p:spTree>
   </p:cSld>
   <p:clrMapOvr>
@@ -9964,7 +9829,7 @@
                 <a:ea typeface="Calibri" pitchFamily="34" charset="-122"/>
                 <a:cs typeface="Calibri" pitchFamily="34" charset="-120"/>
               </a:rPr>
-              <a:t>MODULE 4 · PATTERNS</a:t>
+              <a:t>MODULE 4 · ORCHESTRATION</a:t>
             </a:r>
             <a:endParaRPr lang="en-US" sz="1400" dirty="0"/>
           </a:p>
@@ -10003,7 +9868,7 @@
                 <a:ea typeface="Calibri" pitchFamily="34" charset="-122"/>
                 <a:cs typeface="Calibri" pitchFamily="34" charset="-120"/>
               </a:rPr>
-              <a:t>Three ways agents work together</a:t>
+              <a:t>Agents as a team - A -&gt; B -&gt; C</a:t>
             </a:r>
             <a:endParaRPr lang="en-US" sz="3000" dirty="0"/>
           </a:p>
@@ -10138,7 +10003,7 @@
         </p:nvSpPr>
         <p:spPr>
           <a:xfrm>
-            <a:off x="822960" y="658368"/>
+            <a:off x="822960" y="640080"/>
             <a:ext cx="10515600" cy="365760"/>
           </a:xfrm>
           <a:prstGeom prst="rect">
@@ -10163,7 +10028,7 @@
                 <a:ea typeface="Calibri" pitchFamily="34" charset="-122"/>
                 <a:cs typeface="Calibri" pitchFamily="34" charset="-120"/>
               </a:rPr>
-              <a:t>HOW TODAY RUNS</a:t>
+              <a:t>TODAY IN 4 HOURS</a:t>
             </a:r>
             <a:endParaRPr lang="en-US" sz="1400" dirty="0"/>
           </a:p>
@@ -10177,8 +10042,8 @@
         </p:nvSpPr>
         <p:spPr>
           <a:xfrm>
-            <a:off x="822960" y="1078992"/>
-            <a:ext cx="10607040" cy="822960"/>
+            <a:off x="822960" y="1024128"/>
+            <a:ext cx="10607040" cy="731520"/>
           </a:xfrm>
           <a:prstGeom prst="rect">
             <a:avLst/>
@@ -10202,7 +10067,7 @@
                 <a:ea typeface="Calibri" pitchFamily="34" charset="-122"/>
                 <a:cs typeface="Calibri" pitchFamily="34" charset="-120"/>
               </a:rPr>
-              <a:t>Ground rules</a:t>
+              <a:t>What we'll cover</a:t>
             </a:r>
             <a:endParaRPr lang="en-US" sz="3200" dirty="0"/>
           </a:p>
@@ -10210,14 +10075,635 @@
       </p:sp>
       <p:sp>
         <p:nvSpPr>
-          <p:cNvPr id="5" name="animList"/>
-          <p:cNvSpPr/>
-          <p:nvPr/>
-        </p:nvSpPr>
-        <p:spPr>
-          <a:xfrm>
-            <a:off x="822960" y="2148840"/>
-            <a:ext cx="10515600" cy="3840480"/>
+          <p:cNvPr id="5" name="Shape 3"/>
+          <p:cNvSpPr/>
+          <p:nvPr/>
+        </p:nvSpPr>
+        <p:spPr>
+          <a:xfrm>
+            <a:off x="822960" y="2468880"/>
+            <a:ext cx="1700784" cy="1188720"/>
+          </a:xfrm>
+          <a:prstGeom prst="roundRect">
+            <a:avLst>
+              <a:gd name="adj" fmla="val 6154"/>
+            </a:avLst>
+          </a:prstGeom>
+          <a:solidFill>
+            <a:srgbClr val="11161E"/>
+          </a:solidFill>
+          <a:ln w="19050">
+            <a:solidFill>
+              <a:srgbClr val="22D3EE"/>
+            </a:solidFill>
+            <a:prstDash val="solid"/>
+          </a:ln>
+        </p:spPr>
+      </p:sp>
+      <p:sp>
+        <p:nvSpPr>
+          <p:cNvPr id="6" name="Text 4"/>
+          <p:cNvSpPr/>
+          <p:nvPr/>
+        </p:nvSpPr>
+        <p:spPr>
+          <a:xfrm>
+            <a:off x="896112" y="2560320"/>
+            <a:ext cx="1554480" cy="685800"/>
+          </a:xfrm>
+          <a:prstGeom prst="rect">
+            <a:avLst/>
+          </a:prstGeom>
+          <a:noFill/>
+          <a:ln/>
+        </p:spPr>
+        <p:txBody>
+          <a:bodyPr wrap="square" rtlCol="0" anchor="ctr"/>
+          <a:lstStyle/>
+          <a:p>
+            <a:pPr algn="ctr" indent="0" marL="0">
+              <a:buNone/>
+            </a:pPr>
+            <a:r>
+              <a:rPr lang="en-US" sz="1500" b="1" dirty="0">
+                <a:solidFill>
+                  <a:srgbClr val="E6EDF3"/>
+                </a:solidFill>
+                <a:latin typeface="Calibri" pitchFamily="34" charset="0"/>
+                <a:ea typeface="Calibri" pitchFamily="34" charset="-122"/>
+                <a:cs typeface="Calibri" pitchFamily="34" charset="-120"/>
+              </a:rPr>
+              <a:t>Concepts</a:t>
+            </a:r>
+            <a:endParaRPr lang="en-US" sz="1500" dirty="0"/>
+          </a:p>
+        </p:txBody>
+      </p:sp>
+      <p:sp>
+        <p:nvSpPr>
+          <p:cNvPr id="7" name="Text 5"/>
+          <p:cNvSpPr/>
+          <p:nvPr/>
+        </p:nvSpPr>
+        <p:spPr>
+          <a:xfrm>
+            <a:off x="896112" y="3182112"/>
+            <a:ext cx="1554480" cy="402336"/>
+          </a:xfrm>
+          <a:prstGeom prst="rect">
+            <a:avLst/>
+          </a:prstGeom>
+          <a:noFill/>
+          <a:ln/>
+        </p:spPr>
+        <p:txBody>
+          <a:bodyPr wrap="square" rtlCol="0" anchor="ctr"/>
+          <a:lstStyle/>
+          <a:p>
+            <a:pPr algn="ctr" indent="0" marL="0">
+              <a:buNone/>
+            </a:pPr>
+            <a:r>
+              <a:rPr lang="en-US" sz="1100" dirty="0">
+                <a:solidFill>
+                  <a:srgbClr val="AAB4C0"/>
+                </a:solidFill>
+                <a:latin typeface="Calibri" pitchFamily="34" charset="0"/>
+                <a:ea typeface="Calibri" pitchFamily="34" charset="-122"/>
+                <a:cs typeface="Calibri" pitchFamily="34" charset="-120"/>
+              </a:rPr>
+              <a:t>the words, plainly</a:t>
+            </a:r>
+            <a:endParaRPr lang="en-US" sz="1100" dirty="0"/>
+          </a:p>
+        </p:txBody>
+      </p:sp>
+      <p:sp>
+        <p:nvSpPr>
+          <p:cNvPr id="8" name="Shape 6"/>
+          <p:cNvSpPr/>
+          <p:nvPr/>
+        </p:nvSpPr>
+        <p:spPr>
+          <a:xfrm>
+            <a:off x="2587752" y="3063240"/>
+            <a:ext cx="374904" cy="0"/>
+          </a:xfrm>
+          <a:prstGeom prst="line">
+            <a:avLst/>
+          </a:prstGeom>
+          <a:noFill/>
+          <a:ln w="34925">
+            <a:solidFill>
+              <a:srgbClr val="22D3EE"/>
+            </a:solidFill>
+            <a:prstDash val="solid"/>
+            <a:tailEnd type="triangle"/>
+          </a:ln>
+        </p:spPr>
+      </p:sp>
+      <p:sp>
+        <p:nvSpPr>
+          <p:cNvPr id="9" name="Shape 7"/>
+          <p:cNvSpPr/>
+          <p:nvPr/>
+        </p:nvSpPr>
+        <p:spPr>
+          <a:xfrm>
+            <a:off x="3026664" y="2468880"/>
+            <a:ext cx="1700784" cy="1188720"/>
+          </a:xfrm>
+          <a:prstGeom prst="roundRect">
+            <a:avLst>
+              <a:gd name="adj" fmla="val 6154"/>
+            </a:avLst>
+          </a:prstGeom>
+          <a:solidFill>
+            <a:srgbClr val="11161E"/>
+          </a:solidFill>
+          <a:ln w="19050">
+            <a:solidFill>
+              <a:srgbClr val="22D3EE"/>
+            </a:solidFill>
+            <a:prstDash val="solid"/>
+          </a:ln>
+        </p:spPr>
+      </p:sp>
+      <p:sp>
+        <p:nvSpPr>
+          <p:cNvPr id="10" name="Text 8"/>
+          <p:cNvSpPr/>
+          <p:nvPr/>
+        </p:nvSpPr>
+        <p:spPr>
+          <a:xfrm>
+            <a:off x="3099816" y="2560320"/>
+            <a:ext cx="1554480" cy="685800"/>
+          </a:xfrm>
+          <a:prstGeom prst="rect">
+            <a:avLst/>
+          </a:prstGeom>
+          <a:noFill/>
+          <a:ln/>
+        </p:spPr>
+        <p:txBody>
+          <a:bodyPr wrap="square" rtlCol="0" anchor="ctr"/>
+          <a:lstStyle/>
+          <a:p>
+            <a:pPr algn="ctr" indent="0" marL="0">
+              <a:buNone/>
+            </a:pPr>
+            <a:r>
+              <a:rPr lang="en-US" sz="1500" b="1" dirty="0">
+                <a:solidFill>
+                  <a:srgbClr val="E6EDF3"/>
+                </a:solidFill>
+                <a:latin typeface="Calibri" pitchFamily="34" charset="0"/>
+                <a:ea typeface="Calibri" pitchFamily="34" charset="-122"/>
+                <a:cs typeface="Calibri" pitchFamily="34" charset="-120"/>
+              </a:rPr>
+              <a:t>RAG</a:t>
+            </a:r>
+            <a:endParaRPr lang="en-US" sz="1500" dirty="0"/>
+          </a:p>
+        </p:txBody>
+      </p:sp>
+      <p:sp>
+        <p:nvSpPr>
+          <p:cNvPr id="11" name="Text 9"/>
+          <p:cNvSpPr/>
+          <p:nvPr/>
+        </p:nvSpPr>
+        <p:spPr>
+          <a:xfrm>
+            <a:off x="3099816" y="3182112"/>
+            <a:ext cx="1554480" cy="402336"/>
+          </a:xfrm>
+          <a:prstGeom prst="rect">
+            <a:avLst/>
+          </a:prstGeom>
+          <a:noFill/>
+          <a:ln/>
+        </p:spPr>
+        <p:txBody>
+          <a:bodyPr wrap="square" rtlCol="0" anchor="ctr"/>
+          <a:lstStyle/>
+          <a:p>
+            <a:pPr algn="ctr" indent="0" marL="0">
+              <a:buNone/>
+            </a:pPr>
+            <a:r>
+              <a:rPr lang="en-US" sz="1100" dirty="0">
+                <a:solidFill>
+                  <a:srgbClr val="AAB4C0"/>
+                </a:solidFill>
+                <a:latin typeface="Calibri" pitchFamily="34" charset="0"/>
+                <a:ea typeface="Calibri" pitchFamily="34" charset="-122"/>
+                <a:cs typeface="Calibri" pitchFamily="34" charset="-120"/>
+              </a:rPr>
+              <a:t>AI + your docs</a:t>
+            </a:r>
+            <a:endParaRPr lang="en-US" sz="1100" dirty="0"/>
+          </a:p>
+        </p:txBody>
+      </p:sp>
+      <p:sp>
+        <p:nvSpPr>
+          <p:cNvPr id="12" name="Shape 10"/>
+          <p:cNvSpPr/>
+          <p:nvPr/>
+        </p:nvSpPr>
+        <p:spPr>
+          <a:xfrm>
+            <a:off x="4791456" y="3063240"/>
+            <a:ext cx="374904" cy="0"/>
+          </a:xfrm>
+          <a:prstGeom prst="line">
+            <a:avLst/>
+          </a:prstGeom>
+          <a:noFill/>
+          <a:ln w="34925">
+            <a:solidFill>
+              <a:srgbClr val="22D3EE"/>
+            </a:solidFill>
+            <a:prstDash val="solid"/>
+            <a:tailEnd type="triangle"/>
+          </a:ln>
+        </p:spPr>
+      </p:sp>
+      <p:sp>
+        <p:nvSpPr>
+          <p:cNvPr id="13" name="Shape 11"/>
+          <p:cNvSpPr/>
+          <p:nvPr/>
+        </p:nvSpPr>
+        <p:spPr>
+          <a:xfrm>
+            <a:off x="5230368" y="2468880"/>
+            <a:ext cx="1700784" cy="1188720"/>
+          </a:xfrm>
+          <a:prstGeom prst="roundRect">
+            <a:avLst>
+              <a:gd name="adj" fmla="val 6154"/>
+            </a:avLst>
+          </a:prstGeom>
+          <a:solidFill>
+            <a:srgbClr val="11161E"/>
+          </a:solidFill>
+          <a:ln w="19050">
+            <a:solidFill>
+              <a:srgbClr val="22D3EE"/>
+            </a:solidFill>
+            <a:prstDash val="solid"/>
+          </a:ln>
+        </p:spPr>
+      </p:sp>
+      <p:sp>
+        <p:nvSpPr>
+          <p:cNvPr id="14" name="Text 12"/>
+          <p:cNvSpPr/>
+          <p:nvPr/>
+        </p:nvSpPr>
+        <p:spPr>
+          <a:xfrm>
+            <a:off x="5303520" y="2560320"/>
+            <a:ext cx="1554480" cy="685800"/>
+          </a:xfrm>
+          <a:prstGeom prst="rect">
+            <a:avLst/>
+          </a:prstGeom>
+          <a:noFill/>
+          <a:ln/>
+        </p:spPr>
+        <p:txBody>
+          <a:bodyPr wrap="square" rtlCol="0" anchor="ctr"/>
+          <a:lstStyle/>
+          <a:p>
+            <a:pPr algn="ctr" indent="0" marL="0">
+              <a:buNone/>
+            </a:pPr>
+            <a:r>
+              <a:rPr lang="en-US" sz="1500" b="1" dirty="0">
+                <a:solidFill>
+                  <a:srgbClr val="E6EDF3"/>
+                </a:solidFill>
+                <a:latin typeface="Calibri" pitchFamily="34" charset="0"/>
+                <a:ea typeface="Calibri" pitchFamily="34" charset="-122"/>
+                <a:cs typeface="Calibri" pitchFamily="34" charset="-120"/>
+              </a:rPr>
+              <a:t>One Agent</a:t>
+            </a:r>
+            <a:endParaRPr lang="en-US" sz="1500" dirty="0"/>
+          </a:p>
+        </p:txBody>
+      </p:sp>
+      <p:sp>
+        <p:nvSpPr>
+          <p:cNvPr id="15" name="Text 13"/>
+          <p:cNvSpPr/>
+          <p:nvPr/>
+        </p:nvSpPr>
+        <p:spPr>
+          <a:xfrm>
+            <a:off x="5303520" y="3182112"/>
+            <a:ext cx="1554480" cy="402336"/>
+          </a:xfrm>
+          <a:prstGeom prst="rect">
+            <a:avLst/>
+          </a:prstGeom>
+          <a:noFill/>
+          <a:ln/>
+        </p:spPr>
+        <p:txBody>
+          <a:bodyPr wrap="square" rtlCol="0" anchor="ctr"/>
+          <a:lstStyle/>
+          <a:p>
+            <a:pPr algn="ctr" indent="0" marL="0">
+              <a:buNone/>
+            </a:pPr>
+            <a:r>
+              <a:rPr lang="en-US" sz="1100" dirty="0">
+                <a:solidFill>
+                  <a:srgbClr val="AAB4C0"/>
+                </a:solidFill>
+                <a:latin typeface="Calibri" pitchFamily="34" charset="0"/>
+                <a:ea typeface="Calibri" pitchFamily="34" charset="-122"/>
+                <a:cs typeface="Calibri" pitchFamily="34" charset="-120"/>
+              </a:rPr>
+              <a:t>AI that acts</a:t>
+            </a:r>
+            <a:endParaRPr lang="en-US" sz="1100" dirty="0"/>
+          </a:p>
+        </p:txBody>
+      </p:sp>
+      <p:sp>
+        <p:nvSpPr>
+          <p:cNvPr id="16" name="Shape 14"/>
+          <p:cNvSpPr/>
+          <p:nvPr/>
+        </p:nvSpPr>
+        <p:spPr>
+          <a:xfrm>
+            <a:off x="6995160" y="3063240"/>
+            <a:ext cx="374904" cy="0"/>
+          </a:xfrm>
+          <a:prstGeom prst="line">
+            <a:avLst/>
+          </a:prstGeom>
+          <a:noFill/>
+          <a:ln w="34925">
+            <a:solidFill>
+              <a:srgbClr val="22D3EE"/>
+            </a:solidFill>
+            <a:prstDash val="solid"/>
+            <a:tailEnd type="triangle"/>
+          </a:ln>
+        </p:spPr>
+      </p:sp>
+      <p:sp>
+        <p:nvSpPr>
+          <p:cNvPr id="17" name="Shape 15"/>
+          <p:cNvSpPr/>
+          <p:nvPr/>
+        </p:nvSpPr>
+        <p:spPr>
+          <a:xfrm>
+            <a:off x="7434072" y="2468880"/>
+            <a:ext cx="1700784" cy="1188720"/>
+          </a:xfrm>
+          <a:prstGeom prst="roundRect">
+            <a:avLst>
+              <a:gd name="adj" fmla="val 6154"/>
+            </a:avLst>
+          </a:prstGeom>
+          <a:solidFill>
+            <a:srgbClr val="11161E"/>
+          </a:solidFill>
+          <a:ln w="19050">
+            <a:solidFill>
+              <a:srgbClr val="22D3EE"/>
+            </a:solidFill>
+            <a:prstDash val="solid"/>
+          </a:ln>
+        </p:spPr>
+      </p:sp>
+      <p:sp>
+        <p:nvSpPr>
+          <p:cNvPr id="18" name="Text 16"/>
+          <p:cNvSpPr/>
+          <p:nvPr/>
+        </p:nvSpPr>
+        <p:spPr>
+          <a:xfrm>
+            <a:off x="7507224" y="2560320"/>
+            <a:ext cx="1554480" cy="685800"/>
+          </a:xfrm>
+          <a:prstGeom prst="rect">
+            <a:avLst/>
+          </a:prstGeom>
+          <a:noFill/>
+          <a:ln/>
+        </p:spPr>
+        <p:txBody>
+          <a:bodyPr wrap="square" rtlCol="0" anchor="ctr"/>
+          <a:lstStyle/>
+          <a:p>
+            <a:pPr algn="ctr" indent="0" marL="0">
+              <a:buNone/>
+            </a:pPr>
+            <a:r>
+              <a:rPr lang="en-US" sz="1500" b="1" dirty="0">
+                <a:solidFill>
+                  <a:srgbClr val="E6EDF3"/>
+                </a:solidFill>
+                <a:latin typeface="Calibri" pitchFamily="34" charset="0"/>
+                <a:ea typeface="Calibri" pitchFamily="34" charset="-122"/>
+                <a:cs typeface="Calibri" pitchFamily="34" charset="-120"/>
+              </a:rPr>
+              <a:t>Orchestration</a:t>
+            </a:r>
+            <a:endParaRPr lang="en-US" sz="1500" dirty="0"/>
+          </a:p>
+        </p:txBody>
+      </p:sp>
+      <p:sp>
+        <p:nvSpPr>
+          <p:cNvPr id="19" name="Text 17"/>
+          <p:cNvSpPr/>
+          <p:nvPr/>
+        </p:nvSpPr>
+        <p:spPr>
+          <a:xfrm>
+            <a:off x="7507224" y="3182112"/>
+            <a:ext cx="1554480" cy="402336"/>
+          </a:xfrm>
+          <a:prstGeom prst="rect">
+            <a:avLst/>
+          </a:prstGeom>
+          <a:noFill/>
+          <a:ln/>
+        </p:spPr>
+        <p:txBody>
+          <a:bodyPr wrap="square" rtlCol="0" anchor="ctr"/>
+          <a:lstStyle/>
+          <a:p>
+            <a:pPr algn="ctr" indent="0" marL="0">
+              <a:buNone/>
+            </a:pPr>
+            <a:r>
+              <a:rPr lang="en-US" sz="1100" dirty="0">
+                <a:solidFill>
+                  <a:srgbClr val="AAB4C0"/>
+                </a:solidFill>
+                <a:latin typeface="Calibri" pitchFamily="34" charset="0"/>
+                <a:ea typeface="Calibri" pitchFamily="34" charset="-122"/>
+                <a:cs typeface="Calibri" pitchFamily="34" charset="-120"/>
+              </a:rPr>
+              <a:t>agents together</a:t>
+            </a:r>
+            <a:endParaRPr lang="en-US" sz="1100" dirty="0"/>
+          </a:p>
+        </p:txBody>
+      </p:sp>
+      <p:sp>
+        <p:nvSpPr>
+          <p:cNvPr id="20" name="Shape 18"/>
+          <p:cNvSpPr/>
+          <p:nvPr/>
+        </p:nvSpPr>
+        <p:spPr>
+          <a:xfrm>
+            <a:off x="9198864" y="3063240"/>
+            <a:ext cx="374904" cy="0"/>
+          </a:xfrm>
+          <a:prstGeom prst="line">
+            <a:avLst/>
+          </a:prstGeom>
+          <a:noFill/>
+          <a:ln w="34925">
+            <a:solidFill>
+              <a:srgbClr val="22D3EE"/>
+            </a:solidFill>
+            <a:prstDash val="solid"/>
+            <a:tailEnd type="triangle"/>
+          </a:ln>
+        </p:spPr>
+      </p:sp>
+      <p:sp>
+        <p:nvSpPr>
+          <p:cNvPr id="21" name="Shape 19"/>
+          <p:cNvSpPr/>
+          <p:nvPr/>
+        </p:nvSpPr>
+        <p:spPr>
+          <a:xfrm>
+            <a:off x="9637776" y="2468880"/>
+            <a:ext cx="1700784" cy="1188720"/>
+          </a:xfrm>
+          <a:prstGeom prst="roundRect">
+            <a:avLst>
+              <a:gd name="adj" fmla="val 6154"/>
+            </a:avLst>
+          </a:prstGeom>
+          <a:solidFill>
+            <a:srgbClr val="11161E"/>
+          </a:solidFill>
+          <a:ln w="19050">
+            <a:solidFill>
+              <a:srgbClr val="22D3EE"/>
+            </a:solidFill>
+            <a:prstDash val="solid"/>
+          </a:ln>
+        </p:spPr>
+      </p:sp>
+      <p:sp>
+        <p:nvSpPr>
+          <p:cNvPr id="22" name="Text 20"/>
+          <p:cNvSpPr/>
+          <p:nvPr/>
+        </p:nvSpPr>
+        <p:spPr>
+          <a:xfrm>
+            <a:off x="9710928" y="2560320"/>
+            <a:ext cx="1554480" cy="685800"/>
+          </a:xfrm>
+          <a:prstGeom prst="rect">
+            <a:avLst/>
+          </a:prstGeom>
+          <a:noFill/>
+          <a:ln/>
+        </p:spPr>
+        <p:txBody>
+          <a:bodyPr wrap="square" rtlCol="0" anchor="ctr"/>
+          <a:lstStyle/>
+          <a:p>
+            <a:pPr algn="ctr" indent="0" marL="0">
+              <a:buNone/>
+            </a:pPr>
+            <a:r>
+              <a:rPr lang="en-US" sz="1500" b="1" dirty="0">
+                <a:solidFill>
+                  <a:srgbClr val="E6EDF3"/>
+                </a:solidFill>
+                <a:latin typeface="Calibri" pitchFamily="34" charset="0"/>
+                <a:ea typeface="Calibri" pitchFamily="34" charset="-122"/>
+                <a:cs typeface="Calibri" pitchFamily="34" charset="-120"/>
+              </a:rPr>
+              <a:t>Log</a:t>
+            </a:r>
+            <a:endParaRPr lang="en-US" sz="1500" dirty="0"/>
+          </a:p>
+        </p:txBody>
+      </p:sp>
+      <p:sp>
+        <p:nvSpPr>
+          <p:cNvPr id="23" name="Text 21"/>
+          <p:cNvSpPr/>
+          <p:nvPr/>
+        </p:nvSpPr>
+        <p:spPr>
+          <a:xfrm>
+            <a:off x="9710928" y="3182112"/>
+            <a:ext cx="1554480" cy="402336"/>
+          </a:xfrm>
+          <a:prstGeom prst="rect">
+            <a:avLst/>
+          </a:prstGeom>
+          <a:noFill/>
+          <a:ln/>
+        </p:spPr>
+        <p:txBody>
+          <a:bodyPr wrap="square" rtlCol="0" anchor="ctr"/>
+          <a:lstStyle/>
+          <a:p>
+            <a:pPr algn="ctr" indent="0" marL="0">
+              <a:buNone/>
+            </a:pPr>
+            <a:r>
+              <a:rPr lang="en-US" sz="1100" dirty="0">
+                <a:solidFill>
+                  <a:srgbClr val="AAB4C0"/>
+                </a:solidFill>
+                <a:latin typeface="Calibri" pitchFamily="34" charset="0"/>
+                <a:ea typeface="Calibri" pitchFamily="34" charset="-122"/>
+                <a:cs typeface="Calibri" pitchFamily="34" charset="-120"/>
+              </a:rPr>
+              <a:t>to a Sheet</a:t>
+            </a:r>
+            <a:endParaRPr lang="en-US" sz="1100" dirty="0"/>
+          </a:p>
+        </p:txBody>
+      </p:sp>
+      <p:sp>
+        <p:nvSpPr>
+          <p:cNvPr id="24" name="Text 22"/>
+          <p:cNvSpPr/>
+          <p:nvPr/>
+        </p:nvSpPr>
+        <p:spPr>
+          <a:xfrm>
+            <a:off x="822960" y="4251960"/>
+            <a:ext cx="10515600" cy="1737360"/>
           </a:xfrm>
           <a:prstGeom prst="rect">
             <a:avLst/>
@@ -10233,7 +10719,7 @@
               <a:buNone/>
             </a:pPr>
             <a:r>
-              <a:rPr lang="en-US" sz="2000" b="1" dirty="0">
+              <a:rPr lang="en-US" sz="1800" b="1" dirty="0">
                 <a:solidFill>
                   <a:srgbClr val="22D3EE"/>
                 </a:solidFill>
@@ -10245,12 +10731,12 @@
             </a:r>
             <a:pPr indent="0" marL="0">
               <a:spcAft>
-                <a:spcPts val="1600"/>
+                <a:spcPts val="1300"/>
               </a:spcAft>
               <a:buNone/>
             </a:pPr>
             <a:r>
-              <a:rPr lang="en-US" sz="2000" dirty="0">
+              <a:rPr lang="en-US" sz="1800" dirty="0">
                 <a:solidFill>
                   <a:srgbClr val="E6EDF3"/>
                 </a:solidFill>
@@ -10258,16 +10744,16 @@
                 <a:ea typeface="Calibri" pitchFamily="34" charset="-122"/>
                 <a:cs typeface="Calibri" pitchFamily="34" charset="-120"/>
               </a:rPr>
-              <a:t>Everything is no-code and free — NotebookLM, n8n, Google Gemini, Google Sheets.</a:t>
-            </a:r>
-            <a:endParaRPr lang="en-US" sz="2000" dirty="0"/>
-          </a:p>
-          <a:p>
-            <a:pPr indent="0" marL="0">
-              <a:buNone/>
-            </a:pPr>
-            <a:r>
-              <a:rPr lang="en-US" sz="2000" b="1" dirty="0">
+              <a:t>One example, grown all day - predictive maintenance on an IM-500 machine.</a:t>
+            </a:r>
+            <a:endParaRPr lang="en-US" sz="1800" dirty="0"/>
+          </a:p>
+          <a:p>
+            <a:pPr indent="0" marL="0">
+              <a:buNone/>
+            </a:pPr>
+            <a:r>
+              <a:rPr lang="en-US" sz="1800" b="1" dirty="0">
                 <a:solidFill>
                   <a:srgbClr val="22D3EE"/>
                 </a:solidFill>
@@ -10279,12 +10765,12 @@
             </a:r>
             <a:pPr indent="0" marL="0">
               <a:spcAft>
-                <a:spcPts val="1600"/>
+                <a:spcPts val="1300"/>
               </a:spcAft>
               <a:buNone/>
             </a:pPr>
             <a:r>
-              <a:rPr lang="en-US" sz="2000" dirty="0">
+              <a:rPr lang="en-US" sz="1800" dirty="0">
                 <a:solidFill>
                   <a:srgbClr val="E6EDF3"/>
                 </a:solidFill>
@@ -10292,16 +10778,16 @@
                 <a:ea typeface="Calibri" pitchFamily="34" charset="-122"/>
                 <a:cs typeface="Calibri" pitchFamily="34" charset="-120"/>
               </a:rPr>
-              <a:t>I run every demo live; you get the manual + prompts afterward to rebuild it.</a:t>
-            </a:r>
-            <a:endParaRPr lang="en-US" sz="2000" dirty="0"/>
-          </a:p>
-          <a:p>
-            <a:pPr indent="0" marL="0">
-              <a:buNone/>
-            </a:pPr>
-            <a:r>
-              <a:rPr lang="en-US" sz="2000" b="1" dirty="0">
+              <a:t>I build live; you watch and ask. Short breaks along the way.</a:t>
+            </a:r>
+            <a:endParaRPr lang="en-US" sz="1800" dirty="0"/>
+          </a:p>
+          <a:p>
+            <a:pPr indent="0" marL="0">
+              <a:buNone/>
+            </a:pPr>
+            <a:r>
+              <a:rPr lang="en-US" sz="1800" b="1" dirty="0">
                 <a:solidFill>
                   <a:srgbClr val="22D3EE"/>
                 </a:solidFill>
@@ -10313,12 +10799,12 @@
             </a:r>
             <a:pPr indent="0" marL="0">
               <a:spcAft>
-                <a:spcPts val="1600"/>
+                <a:spcPts val="1300"/>
               </a:spcAft>
               <a:buNone/>
             </a:pPr>
             <a:r>
-              <a:rPr lang="en-US" sz="2000" dirty="0">
+              <a:rPr lang="en-US" sz="1800" dirty="0">
                 <a:solidFill>
                   <a:srgbClr val="E6EDF3"/>
                 </a:solidFill>
@@ -10326,43 +10812,9 @@
                 <a:ea typeface="Calibri" pitchFamily="34" charset="-122"/>
                 <a:cs typeface="Calibri" pitchFamily="34" charset="-120"/>
               </a:rPr>
-              <a:t>No setup needed from you today — just follow along.</a:t>
-            </a:r>
-            <a:endParaRPr lang="en-US" sz="2000" dirty="0"/>
-          </a:p>
-          <a:p>
-            <a:pPr indent="0" marL="0">
-              <a:buNone/>
-            </a:pPr>
-            <a:r>
-              <a:rPr lang="en-US" sz="2000" b="1" dirty="0">
-                <a:solidFill>
-                  <a:srgbClr val="22D3EE"/>
-                </a:solidFill>
-                <a:latin typeface="Calibri" pitchFamily="34" charset="0"/>
-                <a:ea typeface="Calibri" pitchFamily="34" charset="-122"/>
-                <a:cs typeface="Calibri" pitchFamily="34" charset="-120"/>
-              </a:rPr>
-              <a:t>▸  </a:t>
-            </a:r>
-            <a:pPr indent="0" marL="0">
-              <a:spcAft>
-                <a:spcPts val="1600"/>
-              </a:spcAft>
-              <a:buNone/>
-            </a:pPr>
-            <a:r>
-              <a:rPr lang="en-US" sz="2000" dirty="0">
-                <a:solidFill>
-                  <a:srgbClr val="E6EDF3"/>
-                </a:solidFill>
-                <a:latin typeface="Calibri" pitchFamily="34" charset="0"/>
-                <a:ea typeface="Calibri" pitchFamily="34" charset="-122"/>
-                <a:cs typeface="Calibri" pitchFamily="34" charset="-120"/>
-              </a:rPr>
-              <a:t>One machine all day (the IM-500) so each idea builds on the last.</a:t>
-            </a:r>
-            <a:endParaRPr lang="en-US" sz="2000" dirty="0"/>
+              <a:t>You leave with a manual, prompts and a glossary to redo it yourself, free.</a:t>
+            </a:r>
+            <a:endParaRPr lang="en-US" sz="1800" dirty="0"/>
           </a:p>
         </p:txBody>
       </p:sp>
@@ -10380,7 +10832,7 @@
     <p:bg>
       <p:bgPr>
         <a:solidFill>
-          <a:srgbClr val="06090D"/>
+          <a:srgbClr val="0B0F15"/>
         </a:solidFill>
       </p:bgPr>
     </p:bg>
@@ -10445,8 +10897,8 @@
         </p:nvSpPr>
         <p:spPr>
           <a:xfrm>
-            <a:off x="822960" y="658368"/>
-            <a:ext cx="10515600" cy="457200"/>
+            <a:off x="822960" y="566928"/>
+            <a:ext cx="10515600" cy="365760"/>
           </a:xfrm>
           <a:prstGeom prst="rect">
             <a:avLst/>
@@ -10462,17 +10914,17 @@
               <a:buNone/>
             </a:pPr>
             <a:r>
-              <a:rPr lang="en-US" sz="1800" b="1" spc="300" kern="0" dirty="0">
-                <a:solidFill>
-                  <a:srgbClr val="F59E0B"/>
-                </a:solidFill>
-                <a:latin typeface="Calibri" pitchFamily="34" charset="0"/>
-                <a:ea typeface="Calibri" pitchFamily="34" charset="-122"/>
-                <a:cs typeface="Calibri" pitchFamily="34" charset="-120"/>
-              </a:rPr>
-              <a:t>▶  LIVE DEMO</a:t>
-            </a:r>
-            <a:endParaRPr lang="en-US" sz="1800" dirty="0"/>
+              <a:rPr lang="en-US" sz="1400" b="1" spc="400" kern="0" dirty="0">
+                <a:solidFill>
+                  <a:srgbClr val="22D3EE"/>
+                </a:solidFill>
+                <a:latin typeface="Calibri" pitchFamily="34" charset="0"/>
+                <a:ea typeface="Calibri" pitchFamily="34" charset="-122"/>
+                <a:cs typeface="Calibri" pitchFamily="34" charset="-120"/>
+              </a:rPr>
+              <a:t>MODULE 4 · PATTERNS</a:t>
+            </a:r>
+            <a:endParaRPr lang="en-US" sz="1400" dirty="0"/>
           </a:p>
         </p:txBody>
       </p:sp>
@@ -10484,8 +10936,8 @@
         </p:nvSpPr>
         <p:spPr>
           <a:xfrm>
-            <a:off x="822960" y="1170432"/>
-            <a:ext cx="10607040" cy="822960"/>
+            <a:off x="822960" y="932688"/>
+            <a:ext cx="10607040" cy="640080"/>
           </a:xfrm>
           <a:prstGeom prst="rect">
             <a:avLst/>
@@ -10501,7 +10953,7 @@
               <a:buNone/>
             </a:pPr>
             <a:r>
-              <a:rPr lang="en-US" sz="3400" b="1" dirty="0">
+              <a:rPr lang="en-US" sz="3000" b="1" dirty="0">
                 <a:solidFill>
                   <a:srgbClr val="E6EDF3"/>
                 </a:solidFill>
@@ -10509,189 +10961,62 @@
                 <a:ea typeface="Calibri" pitchFamily="34" charset="-122"/>
                 <a:cs typeface="Calibri" pitchFamily="34" charset="-120"/>
               </a:rPr>
-              <a:t>Wire A → B → C into one workflow</a:t>
-            </a:r>
-            <a:endParaRPr lang="en-US" sz="3400" dirty="0"/>
-          </a:p>
-        </p:txBody>
-      </p:sp>
-      <p:sp>
-        <p:nvSpPr>
-          <p:cNvPr id="5" name="Text 3"/>
-          <p:cNvSpPr/>
-          <p:nvPr/>
-        </p:nvSpPr>
-        <p:spPr>
-          <a:xfrm>
-            <a:off x="841248" y="2057400"/>
-            <a:ext cx="10515600" cy="457200"/>
-          </a:xfrm>
-          <a:prstGeom prst="rect">
-            <a:avLst/>
-          </a:prstGeom>
-          <a:noFill/>
-          <a:ln/>
-        </p:spPr>
-        <p:txBody>
-          <a:bodyPr wrap="square" rtlCol="0" anchor="ctr"/>
-          <a:lstStyle/>
-          <a:p>
-            <a:pPr indent="0" marL="0">
-              <a:buNone/>
-            </a:pPr>
-            <a:r>
-              <a:rPr lang="en-US" sz="1800" i="1" dirty="0">
-                <a:solidFill>
-                  <a:srgbClr val="AAB4C0"/>
-                </a:solidFill>
-                <a:latin typeface="Calibri" pitchFamily="34" charset="0"/>
-                <a:ea typeface="Calibri" pitchFamily="34" charset="-122"/>
-                <a:cs typeface="Calibri" pitchFamily="34" charset="-120"/>
-              </a:rPr>
-              <a:t>Leave the deck → </a:t>
-            </a:r>
-            <a:pPr indent="0" marL="0">
-              <a:buNone/>
-            </a:pPr>
-            <a:r>
-              <a:rPr lang="en-US" sz="1800" b="1" i="1" dirty="0">
-                <a:solidFill>
-                  <a:srgbClr val="22D3EE"/>
-                </a:solidFill>
-                <a:latin typeface="Calibri" pitchFamily="34" charset="0"/>
-                <a:ea typeface="Calibri" pitchFamily="34" charset="-122"/>
-                <a:cs typeface="Calibri" pitchFamily="34" charset="-120"/>
-              </a:rPr>
-              <a:t>n8n</a:t>
-            </a:r>
-            <a:endParaRPr lang="en-US" sz="1800" dirty="0"/>
-          </a:p>
-        </p:txBody>
-      </p:sp>
-      <p:sp>
-        <p:nvSpPr>
-          <p:cNvPr id="6" name="Text 4"/>
-          <p:cNvSpPr/>
-          <p:nvPr/>
-        </p:nvSpPr>
-        <p:spPr>
-          <a:xfrm>
-            <a:off x="822960" y="2743200"/>
-            <a:ext cx="10515600" cy="3017520"/>
-          </a:xfrm>
-          <a:prstGeom prst="rect">
-            <a:avLst/>
-          </a:prstGeom>
-          <a:noFill/>
-          <a:ln/>
-        </p:spPr>
-        <p:txBody>
-          <a:bodyPr wrap="square" rtlCol="0" anchor="t"/>
-          <a:lstStyle/>
-          <a:p>
-            <a:pPr indent="0" marL="0">
-              <a:buNone/>
-            </a:pPr>
-            <a:r>
-              <a:rPr lang="en-US" sz="1900" b="1" dirty="0">
-                <a:solidFill>
-                  <a:srgbClr val="22D3EE"/>
-                </a:solidFill>
-                <a:latin typeface="Calibri" pitchFamily="34" charset="0"/>
-                <a:ea typeface="Calibri" pitchFamily="34" charset="-122"/>
-                <a:cs typeface="Calibri" pitchFamily="34" charset="-120"/>
-              </a:rPr>
-              <a:t>▸  </a:t>
-            </a:r>
-            <a:pPr indent="0" marL="0">
-              <a:spcAft>
-                <a:spcPts val="1400"/>
-              </a:spcAft>
-              <a:buNone/>
-            </a:pPr>
-            <a:r>
-              <a:rPr lang="en-US" sz="1900" dirty="0">
-                <a:solidFill>
-                  <a:srgbClr val="E6EDF3"/>
-                </a:solidFill>
-                <a:latin typeface="Calibri" pitchFamily="34" charset="0"/>
-                <a:ea typeface="Calibri" pitchFamily="34" charset="-122"/>
-                <a:cs typeface="Calibri" pitchFamily="34" charset="-120"/>
-              </a:rPr>
-              <a:t>Copy the three agents onto one canvas; connect Chat → A → B → C.</a:t>
-            </a:r>
-            <a:endParaRPr lang="en-US" sz="1900" dirty="0"/>
-          </a:p>
-          <a:p>
-            <a:pPr indent="0" marL="0">
-              <a:buNone/>
-            </a:pPr>
-            <a:r>
-              <a:rPr lang="en-US" sz="1900" b="1" dirty="0">
-                <a:solidFill>
-                  <a:srgbClr val="22D3EE"/>
-                </a:solidFill>
-                <a:latin typeface="Calibri" pitchFamily="34" charset="0"/>
-                <a:ea typeface="Calibri" pitchFamily="34" charset="-122"/>
-                <a:cs typeface="Calibri" pitchFamily="34" charset="-120"/>
-              </a:rPr>
-              <a:t>▸  </a:t>
-            </a:r>
-            <a:pPr indent="0" marL="0">
-              <a:spcAft>
-                <a:spcPts val="1400"/>
-              </a:spcAft>
-              <a:buNone/>
-            </a:pPr>
-            <a:r>
-              <a:rPr lang="en-US" sz="1900" dirty="0">
-                <a:solidFill>
-                  <a:srgbClr val="E6EDF3"/>
-                </a:solidFill>
-                <a:latin typeface="Calibri" pitchFamily="34" charset="0"/>
-                <a:ea typeface="Calibri" pitchFamily="34" charset="-122"/>
-                <a:cs typeface="Calibri" pitchFamily="34" charset="-120"/>
-              </a:rPr>
-              <a:t>Set the handoff prompts so each agent's output feeds the next.</a:t>
-            </a:r>
-            <a:endParaRPr lang="en-US" sz="1900" dirty="0"/>
-          </a:p>
-          <a:p>
-            <a:pPr indent="0" marL="0">
-              <a:buNone/>
-            </a:pPr>
-            <a:r>
-              <a:rPr lang="en-US" sz="1900" b="1" dirty="0">
-                <a:solidFill>
-                  <a:srgbClr val="22D3EE"/>
-                </a:solidFill>
-                <a:latin typeface="Calibri" pitchFamily="34" charset="0"/>
-                <a:ea typeface="Calibri" pitchFamily="34" charset="-122"/>
-                <a:cs typeface="Calibri" pitchFamily="34" charset="-120"/>
-              </a:rPr>
-              <a:t>▸  </a:t>
-            </a:r>
-            <a:pPr indent="0" marL="0">
-              <a:spcAft>
-                <a:spcPts val="1400"/>
-              </a:spcAft>
-              <a:buNone/>
-            </a:pPr>
-            <a:r>
-              <a:rPr lang="en-US" sz="1900" dirty="0">
-                <a:solidFill>
-                  <a:srgbClr val="E6EDF3"/>
-                </a:solidFill>
-                <a:latin typeface="Calibri" pitchFamily="34" charset="0"/>
-                <a:ea typeface="Calibri" pitchFamily="34" charset="-122"/>
-                <a:cs typeface="Calibri" pitchFamily="34" charset="-120"/>
-              </a:rPr>
-              <a:t>Ask ONE question — "servo error 140 counts" — and watch it flow to a final URGENT maintenance request.</a:t>
-            </a:r>
-            <a:endParaRPr lang="en-US" sz="1900" dirty="0"/>
-          </a:p>
-        </p:txBody>
-      </p:sp>
+              <a:t>Three ways agents work together</a:t>
+            </a:r>
+            <a:endParaRPr lang="en-US" sz="3000" dirty="0"/>
+          </a:p>
+        </p:txBody>
+      </p:sp>
+      <p:sp>
+        <p:nvSpPr>
+          <p:cNvPr id="5" name="Shape 3"/>
+          <p:cNvSpPr/>
+          <p:nvPr/>
+        </p:nvSpPr>
+        <p:spPr>
+          <a:xfrm>
+            <a:off x="822960" y="1755648"/>
+            <a:ext cx="10543032" cy="4297680"/>
+          </a:xfrm>
+          <a:prstGeom prst="roundRect">
+            <a:avLst>
+              <a:gd name="adj" fmla="val 1702"/>
+            </a:avLst>
+          </a:prstGeom>
+          <a:solidFill>
+            <a:srgbClr val="0B0F15"/>
+          </a:solidFill>
+          <a:ln w="15875">
+            <a:solidFill>
+              <a:srgbClr val="1F2937"/>
+            </a:solidFill>
+            <a:prstDash val="solid"/>
+          </a:ln>
+        </p:spPr>
+      </p:sp>
+      <p:pic>
+        <p:nvPicPr>
+          <p:cNvPr id="6" name="Image 0" descr="preencoded.png">    </p:cNvPr>
+          <p:cNvPicPr>
+            <a:picLocks noChangeAspect="1"/>
+          </p:cNvPicPr>
+          <p:nvPr/>
+        </p:nvPicPr>
+        <p:blipFill>
+          <a:blip r:embed="rId1"/>
+          <a:srcRect l="0" r="0" t="0" b="0"/>
+          <a:stretch/>
+        </p:blipFill>
+        <p:spPr>
+          <a:xfrm>
+            <a:off x="960120" y="1892808"/>
+            <a:ext cx="10268712" cy="4023360"/>
+          </a:xfrm>
+          <a:prstGeom prst="rect">
+            <a:avLst/>
+          </a:prstGeom>
+        </p:spPr>
+      </p:pic>
     </p:spTree>
   </p:cSld>
   <p:clrMapOvr>
@@ -10772,7 +11097,7 @@
         <p:spPr>
           <a:xfrm>
             <a:off x="822960" y="658368"/>
-            <a:ext cx="10515600" cy="365760"/>
+            <a:ext cx="10515600" cy="457200"/>
           </a:xfrm>
           <a:prstGeom prst="rect">
             <a:avLst/>
@@ -10788,7 +11113,99 @@
               <a:buNone/>
             </a:pPr>
             <a:r>
-              <a:rPr lang="en-US" sz="1400" b="1" spc="400" kern="0" dirty="0">
+              <a:rPr lang="en-US" sz="1800" b="1" spc="300" kern="0" dirty="0">
+                <a:solidFill>
+                  <a:srgbClr val="F59E0B"/>
+                </a:solidFill>
+                <a:latin typeface="Calibri" pitchFamily="34" charset="0"/>
+                <a:ea typeface="Calibri" pitchFamily="34" charset="-122"/>
+                <a:cs typeface="Calibri" pitchFamily="34" charset="-120"/>
+              </a:rPr>
+              <a:t>▶  LIVE DEMO</a:t>
+            </a:r>
+            <a:endParaRPr lang="en-US" sz="1800" dirty="0"/>
+          </a:p>
+        </p:txBody>
+      </p:sp>
+      <p:sp>
+        <p:nvSpPr>
+          <p:cNvPr id="4" name="Text 2"/>
+          <p:cNvSpPr/>
+          <p:nvPr/>
+        </p:nvSpPr>
+        <p:spPr>
+          <a:xfrm>
+            <a:off x="822960" y="1170432"/>
+            <a:ext cx="10607040" cy="822960"/>
+          </a:xfrm>
+          <a:prstGeom prst="rect">
+            <a:avLst/>
+          </a:prstGeom>
+          <a:noFill/>
+          <a:ln/>
+        </p:spPr>
+        <p:txBody>
+          <a:bodyPr wrap="square" rtlCol="0" anchor="ctr"/>
+          <a:lstStyle/>
+          <a:p>
+            <a:pPr indent="0" marL="0">
+              <a:buNone/>
+            </a:pPr>
+            <a:r>
+              <a:rPr lang="en-US" sz="3400" b="1" dirty="0">
+                <a:solidFill>
+                  <a:srgbClr val="E6EDF3"/>
+                </a:solidFill>
+                <a:latin typeface="Calibri" pitchFamily="34" charset="0"/>
+                <a:ea typeface="Calibri" pitchFamily="34" charset="-122"/>
+                <a:cs typeface="Calibri" pitchFamily="34" charset="-120"/>
+              </a:rPr>
+              <a:t>Wire A -&gt; B -&gt; C into one workflow</a:t>
+            </a:r>
+            <a:endParaRPr lang="en-US" sz="3400" dirty="0"/>
+          </a:p>
+        </p:txBody>
+      </p:sp>
+      <p:sp>
+        <p:nvSpPr>
+          <p:cNvPr id="5" name="Text 3"/>
+          <p:cNvSpPr/>
+          <p:nvPr/>
+        </p:nvSpPr>
+        <p:spPr>
+          <a:xfrm>
+            <a:off x="841248" y="2057400"/>
+            <a:ext cx="10515600" cy="457200"/>
+          </a:xfrm>
+          <a:prstGeom prst="rect">
+            <a:avLst/>
+          </a:prstGeom>
+          <a:noFill/>
+          <a:ln/>
+        </p:spPr>
+        <p:txBody>
+          <a:bodyPr wrap="square" rtlCol="0" anchor="ctr"/>
+          <a:lstStyle/>
+          <a:p>
+            <a:pPr indent="0" marL="0">
+              <a:buNone/>
+            </a:pPr>
+            <a:r>
+              <a:rPr lang="en-US" sz="1800" i="1" dirty="0">
+                <a:solidFill>
+                  <a:srgbClr val="AAB4C0"/>
+                </a:solidFill>
+                <a:latin typeface="Calibri" pitchFamily="34" charset="0"/>
+                <a:ea typeface="Calibri" pitchFamily="34" charset="-122"/>
+                <a:cs typeface="Calibri" pitchFamily="34" charset="-120"/>
+              </a:rPr>
+              <a:t>Leave the deck → </a:t>
+            </a:r>
+            <a:pPr indent="0" marL="0">
+              <a:buNone/>
+            </a:pPr>
+            <a:r>
+              <a:rPr lang="en-US" sz="1800" b="1" i="1" dirty="0">
                 <a:solidFill>
                   <a:srgbClr val="22D3EE"/>
                 </a:solidFill>
@@ -10796,38 +11213,55 @@
                 <a:ea typeface="Calibri" pitchFamily="34" charset="-122"/>
                 <a:cs typeface="Calibri" pitchFamily="34" charset="-120"/>
               </a:rPr>
-              <a:t>MODULE 4 · ORCHESTRATION</a:t>
-            </a:r>
-            <a:endParaRPr lang="en-US" sz="1400" dirty="0"/>
-          </a:p>
-        </p:txBody>
-      </p:sp>
-      <p:sp>
-        <p:nvSpPr>
-          <p:cNvPr id="4" name="Text 2"/>
-          <p:cNvSpPr/>
-          <p:nvPr/>
-        </p:nvSpPr>
-        <p:spPr>
-          <a:xfrm>
-            <a:off x="822960" y="1078992"/>
-            <a:ext cx="10607040" cy="822960"/>
-          </a:xfrm>
-          <a:prstGeom prst="rect">
-            <a:avLst/>
-          </a:prstGeom>
-          <a:noFill/>
-          <a:ln/>
-        </p:spPr>
-        <p:txBody>
-          <a:bodyPr wrap="square" rtlCol="0" anchor="ctr"/>
-          <a:lstStyle/>
-          <a:p>
-            <a:pPr indent="0" marL="0">
-              <a:buNone/>
-            </a:pPr>
-            <a:r>
-              <a:rPr lang="en-US" sz="3200" b="1" dirty="0">
+              <a:t>n8n</a:t>
+            </a:r>
+            <a:endParaRPr lang="en-US" sz="1800" dirty="0"/>
+          </a:p>
+        </p:txBody>
+      </p:sp>
+      <p:sp>
+        <p:nvSpPr>
+          <p:cNvPr id="6" name="Text 4"/>
+          <p:cNvSpPr/>
+          <p:nvPr/>
+        </p:nvSpPr>
+        <p:spPr>
+          <a:xfrm>
+            <a:off x="822960" y="2743200"/>
+            <a:ext cx="10515600" cy="2834640"/>
+          </a:xfrm>
+          <a:prstGeom prst="rect">
+            <a:avLst/>
+          </a:prstGeom>
+          <a:noFill/>
+          <a:ln/>
+        </p:spPr>
+        <p:txBody>
+          <a:bodyPr wrap="square" rtlCol="0" anchor="t"/>
+          <a:lstStyle/>
+          <a:p>
+            <a:pPr indent="0" marL="0">
+              <a:buNone/>
+            </a:pPr>
+            <a:r>
+              <a:rPr lang="en-US" sz="1900" b="1" dirty="0">
+                <a:solidFill>
+                  <a:srgbClr val="22D3EE"/>
+                </a:solidFill>
+                <a:latin typeface="Calibri" pitchFamily="34" charset="0"/>
+                <a:ea typeface="Calibri" pitchFamily="34" charset="-122"/>
+                <a:cs typeface="Calibri" pitchFamily="34" charset="-120"/>
+              </a:rPr>
+              <a:t>▸  </a:t>
+            </a:r>
+            <a:pPr indent="0" marL="0">
+              <a:spcAft>
+                <a:spcPts val="1400"/>
+              </a:spcAft>
+              <a:buNone/>
+            </a:pPr>
+            <a:r>
+              <a:rPr lang="en-US" sz="1900" dirty="0">
                 <a:solidFill>
                   <a:srgbClr val="E6EDF3"/>
                 </a:solidFill>
@@ -10835,38 +11269,16 @@
                 <a:ea typeface="Calibri" pitchFamily="34" charset="-122"/>
                 <a:cs typeface="Calibri" pitchFamily="34" charset="-120"/>
               </a:rPr>
-              <a:t>Why this is powerful</a:t>
-            </a:r>
-            <a:endParaRPr lang="en-US" sz="3200" dirty="0"/>
-          </a:p>
-        </p:txBody>
-      </p:sp>
-      <p:sp>
-        <p:nvSpPr>
-          <p:cNvPr id="5" name="animList"/>
-          <p:cNvSpPr/>
-          <p:nvPr/>
-        </p:nvSpPr>
-        <p:spPr>
-          <a:xfrm>
-            <a:off x="822960" y="2148840"/>
-            <a:ext cx="10515600" cy="3840480"/>
-          </a:xfrm>
-          <a:prstGeom prst="rect">
-            <a:avLst/>
-          </a:prstGeom>
-          <a:noFill/>
-          <a:ln/>
-        </p:spPr>
-        <p:txBody>
-          <a:bodyPr wrap="square" rtlCol="0" anchor="t"/>
-          <a:lstStyle/>
-          <a:p>
-            <a:pPr indent="0" marL="0">
-              <a:buNone/>
-            </a:pPr>
-            <a:r>
-              <a:rPr lang="en-US" sz="2100" b="1" dirty="0">
+              <a:t>Copy the three agents onto one canvas; connect Chat -&gt; A -&gt; B -&gt; C.</a:t>
+            </a:r>
+            <a:endParaRPr lang="en-US" sz="1900" dirty="0"/>
+          </a:p>
+          <a:p>
+            <a:pPr indent="0" marL="0">
+              <a:buNone/>
+            </a:pPr>
+            <a:r>
+              <a:rPr lang="en-US" sz="1900" b="1" dirty="0">
                 <a:solidFill>
                   <a:srgbClr val="22D3EE"/>
                 </a:solidFill>
@@ -10878,12 +11290,12 @@
             </a:r>
             <a:pPr indent="0" marL="0">
               <a:spcAft>
-                <a:spcPts val="2000"/>
+                <a:spcPts val="1400"/>
               </a:spcAft>
               <a:buNone/>
             </a:pPr>
             <a:r>
-              <a:rPr lang="en-US" sz="2100" dirty="0">
+              <a:rPr lang="en-US" sz="1900" dirty="0">
                 <a:solidFill>
                   <a:srgbClr val="E6EDF3"/>
                 </a:solidFill>
@@ -10891,16 +11303,16 @@
                 <a:ea typeface="Calibri" pitchFamily="34" charset="-122"/>
                 <a:cs typeface="Calibri" pitchFamily="34" charset="-120"/>
               </a:rPr>
-              <a:t>No single agent could produce the final decision.</a:t>
-            </a:r>
-            <a:endParaRPr lang="en-US" sz="2100" dirty="0"/>
-          </a:p>
-          <a:p>
-            <a:pPr indent="0" marL="0">
-              <a:buNone/>
-            </a:pPr>
-            <a:r>
-              <a:rPr lang="en-US" sz="2100" b="1" dirty="0">
+              <a:t>Set the handoff prompts so each agent's output feeds the next.</a:t>
+            </a:r>
+            <a:endParaRPr lang="en-US" sz="1900" dirty="0"/>
+          </a:p>
+          <a:p>
+            <a:pPr indent="0" marL="0">
+              <a:buNone/>
+            </a:pPr>
+            <a:r>
+              <a:rPr lang="en-US" sz="1900" b="1" dirty="0">
                 <a:solidFill>
                   <a:srgbClr val="22D3EE"/>
                 </a:solidFill>
@@ -10912,12 +11324,12 @@
             </a:r>
             <a:pPr indent="0" marL="0">
               <a:spcAft>
-                <a:spcPts val="2000"/>
+                <a:spcPts val="1400"/>
               </a:spcAft>
               <a:buNone/>
             </a:pPr>
             <a:r>
-              <a:rPr lang="en-US" sz="2100" dirty="0">
+              <a:rPr lang="en-US" sz="1900" dirty="0">
                 <a:solidFill>
                   <a:srgbClr val="E6EDF3"/>
                 </a:solidFill>
@@ -10925,43 +11337,9 @@
                 <a:ea typeface="Calibri" pitchFamily="34" charset="-122"/>
                 <a:cs typeface="Calibri" pitchFamily="34" charset="-120"/>
               </a:rPr>
-              <a:t>The escalation — 21-day part vs 6-day failure — emerges from the team, not one agent.</a:t>
-            </a:r>
-            <a:endParaRPr lang="en-US" sz="2100" dirty="0"/>
-          </a:p>
-          <a:p>
-            <a:pPr indent="0" marL="0">
-              <a:buNone/>
-            </a:pPr>
-            <a:r>
-              <a:rPr lang="en-US" sz="2100" b="1" dirty="0">
-                <a:solidFill>
-                  <a:srgbClr val="22D3EE"/>
-                </a:solidFill>
-                <a:latin typeface="Calibri" pitchFamily="34" charset="0"/>
-                <a:ea typeface="Calibri" pitchFamily="34" charset="-122"/>
-                <a:cs typeface="Calibri" pitchFamily="34" charset="-120"/>
-              </a:rPr>
-              <a:t>▸  </a:t>
-            </a:r>
-            <a:pPr indent="0" marL="0">
-              <a:spcAft>
-                <a:spcPts val="2000"/>
-              </a:spcAft>
-              <a:buNone/>
-            </a:pPr>
-            <a:r>
-              <a:rPr lang="en-US" sz="2100" dirty="0">
-                <a:solidFill>
-                  <a:srgbClr val="E6EDF3"/>
-                </a:solidFill>
-                <a:latin typeface="Calibri" pitchFamily="34" charset="0"/>
-                <a:ea typeface="Calibri" pitchFamily="34" charset="-122"/>
-                <a:cs typeface="Calibri" pitchFamily="34" charset="-120"/>
-              </a:rPr>
-              <a:t>This is "agentic AI": specialists coordinating toward a goal.</a:t>
-            </a:r>
-            <a:endParaRPr lang="en-US" sz="2100" dirty="0"/>
+              <a:t>Ask ONE question - "servo error 140 counts" - and watch it flow to a final URGENT request.</a:t>
+            </a:r>
+            <a:endParaRPr lang="en-US" sz="1900" dirty="0"/>
           </a:p>
         </p:txBody>
       </p:sp>
@@ -10976,6 +11354,332 @@
 <file path=ppt/slides/slide32.xml><?xml version="1.0" encoding="utf-8"?>
 <p:sld xmlns:a="http://schemas.openxmlformats.org/drawingml/2006/main" xmlns:r="http://schemas.openxmlformats.org/officeDocument/2006/relationships" xmlns:p="http://schemas.openxmlformats.org/presentationml/2006/main">
   <p:cSld name="Slide 32">
+    <p:bg>
+      <p:bgPr>
+        <a:solidFill>
+          <a:srgbClr val="06090D"/>
+        </a:solidFill>
+      </p:bgPr>
+    </p:bg>
+    <p:spTree>
+      <p:nvGrpSpPr>
+        <p:cNvPr id="1" name=""/>
+        <p:cNvGrpSpPr/>
+        <p:nvPr/>
+      </p:nvGrpSpPr>
+      <p:grpSpPr>
+        <a:xfrm>
+          <a:off x="0" y="0"/>
+          <a:ext cx="0" cy="0"/>
+          <a:chOff x="0" y="0"/>
+          <a:chExt cx="0" cy="0"/>
+        </a:xfrm>
+      </p:grpSpPr>
+      <p:sp>
+        <p:nvSpPr>
+          <p:cNvPr id="2" name="Text 0"/>
+          <p:cNvSpPr/>
+          <p:nvPr/>
+        </p:nvSpPr>
+        <p:spPr>
+          <a:xfrm>
+            <a:off x="822960" y="6446520"/>
+            <a:ext cx="5486400" cy="274320"/>
+          </a:xfrm>
+          <a:prstGeom prst="rect">
+            <a:avLst/>
+          </a:prstGeom>
+          <a:noFill/>
+          <a:ln/>
+        </p:spPr>
+        <p:txBody>
+          <a:bodyPr wrap="square" rtlCol="0" anchor="ctr"/>
+          <a:lstStyle/>
+          <a:p>
+            <a:pPr indent="0" marL="0">
+              <a:buNone/>
+            </a:pPr>
+            <a:r>
+              <a:rPr lang="en-US" sz="1100" spc="100" kern="0" dirty="0">
+                <a:solidFill>
+                  <a:srgbClr val="AAB4C0"/>
+                </a:solidFill>
+                <a:latin typeface="Calibri" pitchFamily="34" charset="0"/>
+                <a:ea typeface="Calibri" pitchFamily="34" charset="-122"/>
+                <a:cs typeface="Calibri" pitchFamily="34" charset="-120"/>
+              </a:rPr>
+              <a:t>arjunthakur.dev</a:t>
+            </a:r>
+            <a:endParaRPr lang="en-US" sz="1100" dirty="0"/>
+          </a:p>
+        </p:txBody>
+      </p:sp>
+      <p:sp>
+        <p:nvSpPr>
+          <p:cNvPr id="3" name="Text 1"/>
+          <p:cNvSpPr/>
+          <p:nvPr/>
+        </p:nvSpPr>
+        <p:spPr>
+          <a:xfrm>
+            <a:off x="822960" y="658368"/>
+            <a:ext cx="10515600" cy="365760"/>
+          </a:xfrm>
+          <a:prstGeom prst="rect">
+            <a:avLst/>
+          </a:prstGeom>
+          <a:noFill/>
+          <a:ln/>
+        </p:spPr>
+        <p:txBody>
+          <a:bodyPr wrap="square" rtlCol="0" anchor="ctr"/>
+          <a:lstStyle/>
+          <a:p>
+            <a:pPr indent="0" marL="0">
+              <a:buNone/>
+            </a:pPr>
+            <a:r>
+              <a:rPr lang="en-US" sz="1400" b="1" spc="400" kern="0" dirty="0">
+                <a:solidFill>
+                  <a:srgbClr val="22D3EE"/>
+                </a:solidFill>
+                <a:latin typeface="Calibri" pitchFamily="34" charset="0"/>
+                <a:ea typeface="Calibri" pitchFamily="34" charset="-122"/>
+                <a:cs typeface="Calibri" pitchFamily="34" charset="-120"/>
+              </a:rPr>
+              <a:t>MODULE 4 · ORCHESTRATION</a:t>
+            </a:r>
+            <a:endParaRPr lang="en-US" sz="1400" dirty="0"/>
+          </a:p>
+        </p:txBody>
+      </p:sp>
+      <p:sp>
+        <p:nvSpPr>
+          <p:cNvPr id="4" name="Text 2"/>
+          <p:cNvSpPr/>
+          <p:nvPr/>
+        </p:nvSpPr>
+        <p:spPr>
+          <a:xfrm>
+            <a:off x="822960" y="1078992"/>
+            <a:ext cx="10607040" cy="822960"/>
+          </a:xfrm>
+          <a:prstGeom prst="rect">
+            <a:avLst/>
+          </a:prstGeom>
+          <a:noFill/>
+          <a:ln/>
+        </p:spPr>
+        <p:txBody>
+          <a:bodyPr wrap="square" rtlCol="0" anchor="ctr"/>
+          <a:lstStyle/>
+          <a:p>
+            <a:pPr indent="0" marL="0">
+              <a:buNone/>
+            </a:pPr>
+            <a:r>
+              <a:rPr lang="en-US" sz="3200" b="1" dirty="0">
+                <a:solidFill>
+                  <a:srgbClr val="E6EDF3"/>
+                </a:solidFill>
+                <a:latin typeface="Calibri" pitchFamily="34" charset="0"/>
+                <a:ea typeface="Calibri" pitchFamily="34" charset="-122"/>
+                <a:cs typeface="Calibri" pitchFamily="34" charset="-120"/>
+              </a:rPr>
+              <a:t>Why this is powerful</a:t>
+            </a:r>
+            <a:endParaRPr lang="en-US" sz="3200" dirty="0"/>
+          </a:p>
+        </p:txBody>
+      </p:sp>
+      <p:sp>
+        <p:nvSpPr>
+          <p:cNvPr id="5" name="animList"/>
+          <p:cNvSpPr/>
+          <p:nvPr/>
+        </p:nvSpPr>
+        <p:spPr>
+          <a:xfrm>
+            <a:off x="822960" y="2148840"/>
+            <a:ext cx="10515600" cy="3657600"/>
+          </a:xfrm>
+          <a:prstGeom prst="rect">
+            <a:avLst/>
+          </a:prstGeom>
+          <a:noFill/>
+          <a:ln/>
+        </p:spPr>
+        <p:txBody>
+          <a:bodyPr wrap="square" rtlCol="0" anchor="t"/>
+          <a:lstStyle/>
+          <a:p>
+            <a:pPr indent="0" marL="0">
+              <a:buNone/>
+            </a:pPr>
+            <a:r>
+              <a:rPr lang="en-US" sz="2100" b="1" dirty="0">
+                <a:solidFill>
+                  <a:srgbClr val="22D3EE"/>
+                </a:solidFill>
+                <a:latin typeface="Calibri" pitchFamily="34" charset="0"/>
+                <a:ea typeface="Calibri" pitchFamily="34" charset="-122"/>
+                <a:cs typeface="Calibri" pitchFamily="34" charset="-120"/>
+              </a:rPr>
+              <a:t>▸  </a:t>
+            </a:r>
+            <a:pPr indent="0" marL="0">
+              <a:spcAft>
+                <a:spcPts val="1800"/>
+              </a:spcAft>
+              <a:buNone/>
+            </a:pPr>
+            <a:r>
+              <a:rPr lang="en-US" sz="2100" dirty="0">
+                <a:solidFill>
+                  <a:srgbClr val="E6EDF3"/>
+                </a:solidFill>
+                <a:latin typeface="Calibri" pitchFamily="34" charset="0"/>
+                <a:ea typeface="Calibri" pitchFamily="34" charset="-122"/>
+                <a:cs typeface="Calibri" pitchFamily="34" charset="-120"/>
+              </a:rPr>
+              <a:t>No single agent could produce the final decision.</a:t>
+            </a:r>
+            <a:endParaRPr lang="en-US" sz="2100" dirty="0"/>
+          </a:p>
+          <a:p>
+            <a:pPr indent="0" marL="0">
+              <a:buNone/>
+            </a:pPr>
+            <a:r>
+              <a:rPr lang="en-US" sz="2100" b="1" dirty="0">
+                <a:solidFill>
+                  <a:srgbClr val="22D3EE"/>
+                </a:solidFill>
+                <a:latin typeface="Calibri" pitchFamily="34" charset="0"/>
+                <a:ea typeface="Calibri" pitchFamily="34" charset="-122"/>
+                <a:cs typeface="Calibri" pitchFamily="34" charset="-120"/>
+              </a:rPr>
+              <a:t>▸  </a:t>
+            </a:r>
+            <a:pPr indent="0" marL="0">
+              <a:spcAft>
+                <a:spcPts val="1800"/>
+              </a:spcAft>
+              <a:buNone/>
+            </a:pPr>
+            <a:r>
+              <a:rPr lang="en-US" sz="2100" dirty="0">
+                <a:solidFill>
+                  <a:srgbClr val="E6EDF3"/>
+                </a:solidFill>
+                <a:latin typeface="Calibri" pitchFamily="34" charset="0"/>
+                <a:ea typeface="Calibri" pitchFamily="34" charset="-122"/>
+                <a:cs typeface="Calibri" pitchFamily="34" charset="-120"/>
+              </a:rPr>
+              <a:t>The escalation - 21-day part vs 6-day failure - emerges from the team, not one agent.</a:t>
+            </a:r>
+            <a:endParaRPr lang="en-US" sz="2100" dirty="0"/>
+          </a:p>
+          <a:p>
+            <a:pPr indent="0" marL="0">
+              <a:buNone/>
+            </a:pPr>
+            <a:r>
+              <a:rPr lang="en-US" sz="2100" b="1" dirty="0">
+                <a:solidFill>
+                  <a:srgbClr val="22D3EE"/>
+                </a:solidFill>
+                <a:latin typeface="Calibri" pitchFamily="34" charset="0"/>
+                <a:ea typeface="Calibri" pitchFamily="34" charset="-122"/>
+                <a:cs typeface="Calibri" pitchFamily="34" charset="-120"/>
+              </a:rPr>
+              <a:t>▸  </a:t>
+            </a:r>
+            <a:pPr indent="0" marL="0">
+              <a:spcAft>
+                <a:spcPts val="1800"/>
+              </a:spcAft>
+              <a:buNone/>
+            </a:pPr>
+            <a:r>
+              <a:rPr lang="en-US" sz="2100" dirty="0">
+                <a:solidFill>
+                  <a:srgbClr val="E6EDF3"/>
+                </a:solidFill>
+                <a:latin typeface="Calibri" pitchFamily="34" charset="0"/>
+                <a:ea typeface="Calibri" pitchFamily="34" charset="-122"/>
+                <a:cs typeface="Calibri" pitchFamily="34" charset="-120"/>
+              </a:rPr>
+              <a:t>This is "agentic AI": specialists coordinating toward a goal.</a:t>
+            </a:r>
+            <a:endParaRPr lang="en-US" sz="2100" dirty="0"/>
+          </a:p>
+        </p:txBody>
+      </p:sp>
+      <p:sp>
+        <p:nvSpPr>
+          <p:cNvPr id="6" name="Text 4"/>
+          <p:cNvSpPr/>
+          <p:nvPr/>
+        </p:nvSpPr>
+        <p:spPr>
+          <a:xfrm>
+            <a:off x="822960" y="5852160"/>
+            <a:ext cx="10515600" cy="457200"/>
+          </a:xfrm>
+          <a:prstGeom prst="rect">
+            <a:avLst/>
+          </a:prstGeom>
+          <a:noFill/>
+          <a:ln/>
+        </p:spPr>
+        <p:txBody>
+          <a:bodyPr wrap="square" rtlCol="0" anchor="ctr"/>
+          <a:lstStyle/>
+          <a:p>
+            <a:pPr indent="0" marL="0">
+              <a:buNone/>
+            </a:pPr>
+            <a:r>
+              <a:rPr lang="en-US" sz="1600" b="1" dirty="0">
+                <a:solidFill>
+                  <a:srgbClr val="F59E0B"/>
+                </a:solidFill>
+                <a:latin typeface="Calibri" pitchFamily="34" charset="0"/>
+                <a:ea typeface="Calibri" pitchFamily="34" charset="-122"/>
+                <a:cs typeface="Calibri" pitchFamily="34" charset="-120"/>
+              </a:rPr>
+              <a:t>Ask the room:  </a:t>
+            </a:r>
+            <a:pPr indent="0" marL="0">
+              <a:buNone/>
+            </a:pPr>
+            <a:r>
+              <a:rPr lang="en-US" sz="1600" i="1" dirty="0">
+                <a:solidFill>
+                  <a:srgbClr val="E6EDF3"/>
+                </a:solidFill>
+                <a:latin typeface="Calibri" pitchFamily="34" charset="0"/>
+                <a:ea typeface="Calibri" pitchFamily="34" charset="-122"/>
+                <a:cs typeface="Calibri" pitchFamily="34" charset="-120"/>
+              </a:rPr>
+              <a:t>where in your plant do several people already hand off like this?</a:t>
+            </a:r>
+            <a:endParaRPr lang="en-US" sz="1600" dirty="0"/>
+          </a:p>
+        </p:txBody>
+      </p:sp>
+    </p:spTree>
+  </p:cSld>
+  <p:clrMapOvr>
+    <a:masterClrMapping/>
+  </p:clrMapOvr>
+</p:sld>
+</file>
+
+<file path=ppt/slides/slide33.xml><?xml version="1.0" encoding="utf-8"?>
+<p:sld xmlns:a="http://schemas.openxmlformats.org/drawingml/2006/main" xmlns:r="http://schemas.openxmlformats.org/officeDocument/2006/relationships" xmlns:p="http://schemas.openxmlformats.org/presentationml/2006/main">
+  <p:cSld name="Slide 33">
     <p:bg>
       <p:bgPr>
         <a:solidFill>
@@ -11123,7 +11827,7 @@
         <p:spPr>
           <a:xfrm>
             <a:off x="822960" y="2148840"/>
-            <a:ext cx="10515600" cy="3840480"/>
+            <a:ext cx="10515600" cy="3657600"/>
           </a:xfrm>
           <a:prstGeom prst="rect">
             <a:avLst/>
@@ -11151,7 +11855,7 @@
             </a:r>
             <a:pPr indent="0" marL="0">
               <a:spcAft>
-                <a:spcPts val="1800"/>
+                <a:spcPts val="1600"/>
               </a:spcAft>
               <a:buNone/>
             </a:pPr>
@@ -11185,7 +11889,7 @@
             </a:r>
             <a:pPr indent="0" marL="0">
               <a:spcAft>
-                <a:spcPts val="1800"/>
+                <a:spcPts val="1600"/>
               </a:spcAft>
               <a:buNone/>
             </a:pPr>
@@ -11198,7 +11902,7 @@
                 <a:ea typeface="Calibri" pitchFamily="34" charset="-122"/>
                 <a:cs typeface="Calibri" pitchFamily="34" charset="-120"/>
               </a:rPr>
-              <a:t>Native n8n node, same Google login — no extra setup.</a:t>
+              <a:t>Native n8n node, same Google login - no extra setup.</a:t>
             </a:r>
             <a:endParaRPr lang="en-US" sz="2000" dirty="0"/>
           </a:p>
@@ -11219,7 +11923,7 @@
             </a:r>
             <a:pPr indent="0" marL="0">
               <a:spcAft>
-                <a:spcPts val="1800"/>
+                <a:spcPts val="1600"/>
               </a:spcAft>
               <a:buNone/>
             </a:pPr>
@@ -11235,6 +11939,59 @@
               <a:t>This is the agent taking a real action: it records, not just answers.</a:t>
             </a:r>
             <a:endParaRPr lang="en-US" sz="2000" dirty="0"/>
+          </a:p>
+        </p:txBody>
+      </p:sp>
+      <p:sp>
+        <p:nvSpPr>
+          <p:cNvPr id="6" name="Text 4"/>
+          <p:cNvSpPr/>
+          <p:nvPr/>
+        </p:nvSpPr>
+        <p:spPr>
+          <a:xfrm>
+            <a:off x="822960" y="6053328"/>
+            <a:ext cx="10515600" cy="292608"/>
+          </a:xfrm>
+          <a:prstGeom prst="rect">
+            <a:avLst/>
+          </a:prstGeom>
+          <a:noFill/>
+          <a:ln/>
+        </p:spPr>
+        <p:txBody>
+          <a:bodyPr wrap="square" rtlCol="0" anchor="ctr"/>
+          <a:lstStyle/>
+          <a:p>
+            <a:pPr indent="0" marL="0">
+              <a:buNone/>
+            </a:pPr>
+            <a:r>
+              <a:rPr lang="en-US" sz="1400" b="1" dirty="0">
+                <a:solidFill>
+                  <a:srgbClr val="F59E0B"/>
+                </a:solidFill>
+                <a:latin typeface="Calibri" pitchFamily="34" charset="0"/>
+                <a:ea typeface="Calibri" pitchFamily="34" charset="-122"/>
+                <a:cs typeface="Calibri" pitchFamily="34" charset="-120"/>
+              </a:rPr>
+              <a:t>↗  </a:t>
+            </a:r>
+            <a:pPr indent="0" marL="0">
+              <a:buNone/>
+            </a:pPr>
+            <a:r>
+              <a:rPr lang="en-US" sz="1400" dirty="0">
+                <a:solidFill>
+                  <a:srgbClr val="22D3EE"/>
+                </a:solidFill>
+                <a:latin typeface="Calibri" pitchFamily="34" charset="0"/>
+                <a:ea typeface="Calibri" pitchFamily="34" charset="-122"/>
+                <a:cs typeface="Calibri" pitchFamily="34" charset="-120"/>
+              </a:rPr>
+              <a:t>sheets.google.com</a:t>
+            </a:r>
+            <a:endParaRPr lang="en-US" sz="1400" dirty="0"/>
           </a:p>
         </p:txBody>
       </p:sp>
@@ -11246,9 +12003,9 @@
 </p:sld>
 </file>
 
-<file path=ppt/slides/slide33.xml><?xml version="1.0" encoding="utf-8"?>
+<file path=ppt/slides/slide34.xml><?xml version="1.0" encoding="utf-8"?>
 <p:sld xmlns:a="http://schemas.openxmlformats.org/drawingml/2006/main" xmlns:r="http://schemas.openxmlformats.org/officeDocument/2006/relationships" xmlns:p="http://schemas.openxmlformats.org/presentationml/2006/main">
-  <p:cSld name="Slide 33">
+  <p:cSld name="Slide 34">
     <p:bg>
       <p:bgPr>
         <a:solidFill>
@@ -11449,7 +12206,7 @@
         <p:spPr>
           <a:xfrm>
             <a:off x="822960" y="2743200"/>
-            <a:ext cx="10515600" cy="3017520"/>
+            <a:ext cx="10515600" cy="2834640"/>
           </a:xfrm>
           <a:prstGeom prst="rect">
             <a:avLst/>
@@ -11558,9 +12315,62 @@
                 <a:ea typeface="Calibri" pitchFamily="34" charset="-122"/>
                 <a:cs typeface="Calibri" pitchFamily="34" charset="-120"/>
               </a:rPr>
-              <a:t>Run the chat → a new row appears in the sheet — the logged maintenance request.</a:t>
+              <a:t>Run the chat -&gt; a new row appears in the sheet - the logged maintenance request.</a:t>
             </a:r>
             <a:endParaRPr lang="en-US" sz="1900" dirty="0"/>
+          </a:p>
+        </p:txBody>
+      </p:sp>
+      <p:sp>
+        <p:nvSpPr>
+          <p:cNvPr id="7" name="Text 5"/>
+          <p:cNvSpPr/>
+          <p:nvPr/>
+        </p:nvSpPr>
+        <p:spPr>
+          <a:xfrm>
+            <a:off x="822960" y="5943600"/>
+            <a:ext cx="10515600" cy="292608"/>
+          </a:xfrm>
+          <a:prstGeom prst="rect">
+            <a:avLst/>
+          </a:prstGeom>
+          <a:noFill/>
+          <a:ln/>
+        </p:spPr>
+        <p:txBody>
+          <a:bodyPr wrap="square" rtlCol="0" anchor="ctr"/>
+          <a:lstStyle/>
+          <a:p>
+            <a:pPr indent="0" marL="0">
+              <a:buNone/>
+            </a:pPr>
+            <a:r>
+              <a:rPr lang="en-US" sz="1400" b="1" dirty="0">
+                <a:solidFill>
+                  <a:srgbClr val="F59E0B"/>
+                </a:solidFill>
+                <a:latin typeface="Calibri" pitchFamily="34" charset="0"/>
+                <a:ea typeface="Calibri" pitchFamily="34" charset="-122"/>
+                <a:cs typeface="Calibri" pitchFamily="34" charset="-120"/>
+              </a:rPr>
+              <a:t>↗  </a:t>
+            </a:r>
+            <a:pPr indent="0" marL="0">
+              <a:buNone/>
+            </a:pPr>
+            <a:r>
+              <a:rPr lang="en-US" sz="1400" dirty="0">
+                <a:solidFill>
+                  <a:srgbClr val="22D3EE"/>
+                </a:solidFill>
+                <a:latin typeface="Calibri" pitchFamily="34" charset="0"/>
+                <a:ea typeface="Calibri" pitchFamily="34" charset="-122"/>
+                <a:cs typeface="Calibri" pitchFamily="34" charset="-120"/>
+              </a:rPr>
+              <a:t>sheets.google.com</a:t>
+            </a:r>
+            <a:endParaRPr lang="en-US" sz="1400" dirty="0"/>
           </a:p>
         </p:txBody>
       </p:sp>
@@ -11572,9 +12382,9 @@
 </p:sld>
 </file>
 
-<file path=ppt/slides/slide34.xml><?xml version="1.0" encoding="utf-8"?>
+<file path=ppt/slides/slide35.xml><?xml version="1.0" encoding="utf-8"?>
 <p:sld xmlns:a="http://schemas.openxmlformats.org/drawingml/2006/main" xmlns:r="http://schemas.openxmlformats.org/officeDocument/2006/relationships" xmlns:p="http://schemas.openxmlformats.org/presentationml/2006/main">
-  <p:cSld name="Slide 34">
+  <p:cSld name="Slide 35">
     <p:bg>
       <p:bgPr>
         <a:solidFill>
@@ -11763,245 +12573,6 @@
           </a:prstGeom>
         </p:spPr>
       </p:pic>
-    </p:spTree>
-  </p:cSld>
-  <p:clrMapOvr>
-    <a:masterClrMapping/>
-  </p:clrMapOvr>
-</p:sld>
-</file>
-
-<file path=ppt/slides/slide35.xml><?xml version="1.0" encoding="utf-8"?>
-<p:sld xmlns:a="http://schemas.openxmlformats.org/drawingml/2006/main" xmlns:r="http://schemas.openxmlformats.org/officeDocument/2006/relationships" xmlns:p="http://schemas.openxmlformats.org/presentationml/2006/main">
-  <p:cSld name="Slide 35">
-    <p:bg>
-      <p:bgPr>
-        <a:solidFill>
-          <a:srgbClr val="06090D"/>
-        </a:solidFill>
-      </p:bgPr>
-    </p:bg>
-    <p:spTree>
-      <p:nvGrpSpPr>
-        <p:cNvPr id="1" name=""/>
-        <p:cNvGrpSpPr/>
-        <p:nvPr/>
-      </p:nvGrpSpPr>
-      <p:grpSpPr>
-        <a:xfrm>
-          <a:off x="0" y="0"/>
-          <a:ext cx="0" cy="0"/>
-          <a:chOff x="0" y="0"/>
-          <a:chExt cx="0" cy="0"/>
-        </a:xfrm>
-      </p:grpSpPr>
-      <p:sp>
-        <p:nvSpPr>
-          <p:cNvPr id="2" name="Text 0"/>
-          <p:cNvSpPr/>
-          <p:nvPr/>
-        </p:nvSpPr>
-        <p:spPr>
-          <a:xfrm>
-            <a:off x="822960" y="6446520"/>
-            <a:ext cx="5486400" cy="274320"/>
-          </a:xfrm>
-          <a:prstGeom prst="rect">
-            <a:avLst/>
-          </a:prstGeom>
-          <a:noFill/>
-          <a:ln/>
-        </p:spPr>
-        <p:txBody>
-          <a:bodyPr wrap="square" rtlCol="0" anchor="ctr"/>
-          <a:lstStyle/>
-          <a:p>
-            <a:pPr indent="0" marL="0">
-              <a:buNone/>
-            </a:pPr>
-            <a:r>
-              <a:rPr lang="en-US" sz="1100" spc="100" kern="0" dirty="0">
-                <a:solidFill>
-                  <a:srgbClr val="AAB4C0"/>
-                </a:solidFill>
-                <a:latin typeface="Calibri" pitchFamily="34" charset="0"/>
-                <a:ea typeface="Calibri" pitchFamily="34" charset="-122"/>
-                <a:cs typeface="Calibri" pitchFamily="34" charset="-120"/>
-              </a:rPr>
-              <a:t>arjunthakur.dev</a:t>
-            </a:r>
-            <a:endParaRPr lang="en-US" sz="1100" dirty="0"/>
-          </a:p>
-        </p:txBody>
-      </p:sp>
-      <p:sp>
-        <p:nvSpPr>
-          <p:cNvPr id="3" name="Text 1"/>
-          <p:cNvSpPr/>
-          <p:nvPr/>
-        </p:nvSpPr>
-        <p:spPr>
-          <a:xfrm>
-            <a:off x="822960" y="1005840"/>
-            <a:ext cx="10515600" cy="365760"/>
-          </a:xfrm>
-          <a:prstGeom prst="rect">
-            <a:avLst/>
-          </a:prstGeom>
-          <a:noFill/>
-          <a:ln/>
-        </p:spPr>
-        <p:txBody>
-          <a:bodyPr wrap="square" rtlCol="0" anchor="ctr"/>
-          <a:lstStyle/>
-          <a:p>
-            <a:pPr indent="0" marL="0">
-              <a:buNone/>
-            </a:pPr>
-            <a:r>
-              <a:rPr lang="en-US" sz="1400" b="1" spc="400" kern="0" dirty="0">
-                <a:solidFill>
-                  <a:srgbClr val="22D3EE"/>
-                </a:solidFill>
-                <a:latin typeface="Calibri" pitchFamily="34" charset="0"/>
-                <a:ea typeface="Calibri" pitchFamily="34" charset="-122"/>
-                <a:cs typeface="Calibri" pitchFamily="34" charset="-120"/>
-              </a:rPr>
-              <a:t>Q &amp; A</a:t>
-            </a:r>
-            <a:endParaRPr lang="en-US" sz="1400" dirty="0"/>
-          </a:p>
-        </p:txBody>
-      </p:sp>
-      <p:sp>
-        <p:nvSpPr>
-          <p:cNvPr id="4" name="Text 2"/>
-          <p:cNvSpPr/>
-          <p:nvPr/>
-        </p:nvSpPr>
-        <p:spPr>
-          <a:xfrm>
-            <a:off x="822960" y="1371600"/>
-            <a:ext cx="10515600" cy="1097280"/>
-          </a:xfrm>
-          <a:prstGeom prst="rect">
-            <a:avLst/>
-          </a:prstGeom>
-          <a:noFill/>
-          <a:ln/>
-        </p:spPr>
-        <p:txBody>
-          <a:bodyPr wrap="square" rtlCol="0" anchor="ctr"/>
-          <a:lstStyle/>
-          <a:p>
-            <a:pPr indent="0" marL="0">
-              <a:buNone/>
-            </a:pPr>
-            <a:r>
-              <a:rPr lang="en-US" sz="5000" b="1" dirty="0">
-                <a:solidFill>
-                  <a:srgbClr val="E6EDF3"/>
-                </a:solidFill>
-                <a:latin typeface="Calibri" pitchFamily="34" charset="0"/>
-                <a:ea typeface="Calibri" pitchFamily="34" charset="-122"/>
-                <a:cs typeface="Calibri" pitchFamily="34" charset="-120"/>
-              </a:rPr>
-              <a:t>Orchestration — questions</a:t>
-            </a:r>
-            <a:endParaRPr lang="en-US" sz="5000" dirty="0"/>
-          </a:p>
-        </p:txBody>
-      </p:sp>
-      <p:sp>
-        <p:nvSpPr>
-          <p:cNvPr id="5" name="Text 3"/>
-          <p:cNvSpPr/>
-          <p:nvPr/>
-        </p:nvSpPr>
-        <p:spPr>
-          <a:xfrm>
-            <a:off x="822960" y="2788920"/>
-            <a:ext cx="10515600" cy="2011680"/>
-          </a:xfrm>
-          <a:prstGeom prst="rect">
-            <a:avLst/>
-          </a:prstGeom>
-          <a:noFill/>
-          <a:ln/>
-        </p:spPr>
-        <p:txBody>
-          <a:bodyPr wrap="square" rtlCol="0" anchor="t"/>
-          <a:lstStyle/>
-          <a:p>
-            <a:pPr indent="0" marL="0">
-              <a:buNone/>
-            </a:pPr>
-            <a:r>
-              <a:rPr lang="en-US" sz="2000" b="1" dirty="0">
-                <a:solidFill>
-                  <a:srgbClr val="22D3EE"/>
-                </a:solidFill>
-                <a:latin typeface="Calibri" pitchFamily="34" charset="0"/>
-                <a:ea typeface="Calibri" pitchFamily="34" charset="-122"/>
-                <a:cs typeface="Calibri" pitchFamily="34" charset="-120"/>
-              </a:rPr>
-              <a:t>▸  </a:t>
-            </a:r>
-            <a:pPr indent="0" marL="0">
-              <a:spcAft>
-                <a:spcPts val="1600"/>
-              </a:spcAft>
-              <a:buNone/>
-            </a:pPr>
-            <a:r>
-              <a:rPr lang="en-US" sz="2000" dirty="0">
-                <a:solidFill>
-                  <a:srgbClr val="E6EDF3"/>
-                </a:solidFill>
-                <a:latin typeface="Calibri" pitchFamily="34" charset="0"/>
-                <a:ea typeface="Calibri" pitchFamily="34" charset="-122"/>
-                <a:cs typeface="Calibri" pitchFamily="34" charset="-120"/>
-              </a:rPr>
-              <a:t>Which two departments would benefit from talking to each other?</a:t>
-            </a:r>
-            <a:endParaRPr lang="en-US" sz="2000" dirty="0"/>
-          </a:p>
-          <a:p>
-            <a:pPr indent="0" marL="0">
-              <a:buNone/>
-            </a:pPr>
-            <a:r>
-              <a:rPr lang="en-US" sz="2000" b="1" dirty="0">
-                <a:solidFill>
-                  <a:srgbClr val="22D3EE"/>
-                </a:solidFill>
-                <a:latin typeface="Calibri" pitchFamily="34" charset="0"/>
-                <a:ea typeface="Calibri" pitchFamily="34" charset="-122"/>
-                <a:cs typeface="Calibri" pitchFamily="34" charset="-120"/>
-              </a:rPr>
-              <a:t>▸  </a:t>
-            </a:r>
-            <a:pPr indent="0" marL="0">
-              <a:spcAft>
-                <a:spcPts val="1600"/>
-              </a:spcAft>
-              <a:buNone/>
-            </a:pPr>
-            <a:r>
-              <a:rPr lang="en-US" sz="2000" dirty="0">
-                <a:solidFill>
-                  <a:srgbClr val="E6EDF3"/>
-                </a:solidFill>
-                <a:latin typeface="Calibri" pitchFamily="34" charset="0"/>
-                <a:ea typeface="Calibri" pitchFamily="34" charset="-122"/>
-                <a:cs typeface="Calibri" pitchFamily="34" charset="-120"/>
-              </a:rPr>
-              <a:t>Where would you want a human approval step?</a:t>
-            </a:r>
-            <a:endParaRPr lang="en-US" sz="2000" dirty="0"/>
-          </a:p>
-        </p:txBody>
-      </p:sp>
     </p:spTree>
   </p:cSld>
   <p:clrMapOvr>
@@ -12081,7 +12652,7 @@
         </p:nvSpPr>
         <p:spPr>
           <a:xfrm>
-            <a:off x="822960" y="658368"/>
+            <a:off x="822960" y="1005840"/>
             <a:ext cx="10515600" cy="365760"/>
           </a:xfrm>
           <a:prstGeom prst="rect">
@@ -12106,7 +12677,7 @@
                 <a:ea typeface="Calibri" pitchFamily="34" charset="-122"/>
                 <a:cs typeface="Calibri" pitchFamily="34" charset="-120"/>
               </a:rPr>
-              <a:t>WRAP-UP</a:t>
+              <a:t>Q &amp; A</a:t>
             </a:r>
             <a:endParaRPr lang="en-US" sz="1400" dirty="0"/>
           </a:p>
@@ -12120,8 +12691,8 @@
         </p:nvSpPr>
         <p:spPr>
           <a:xfrm>
-            <a:off x="822960" y="1078992"/>
-            <a:ext cx="10607040" cy="822960"/>
+            <a:off x="822960" y="1371600"/>
+            <a:ext cx="10515600" cy="1097280"/>
           </a:xfrm>
           <a:prstGeom prst="rect">
             <a:avLst/>
@@ -12137,7 +12708,7 @@
               <a:buNone/>
             </a:pPr>
             <a:r>
-              <a:rPr lang="en-US" sz="3200" b="1" dirty="0">
+              <a:rPr lang="en-US" sz="5000" b="1" dirty="0">
                 <a:solidFill>
                   <a:srgbClr val="E6EDF3"/>
                 </a:solidFill>
@@ -12145,22 +12716,22 @@
                 <a:ea typeface="Calibri" pitchFamily="34" charset="-122"/>
                 <a:cs typeface="Calibri" pitchFamily="34" charset="-120"/>
               </a:rPr>
-              <a:t>What we covered today</a:t>
-            </a:r>
-            <a:endParaRPr lang="en-US" sz="3200" dirty="0"/>
-          </a:p>
-        </p:txBody>
-      </p:sp>
-      <p:sp>
-        <p:nvSpPr>
-          <p:cNvPr id="5" name="animList"/>
-          <p:cNvSpPr/>
-          <p:nvPr/>
-        </p:nvSpPr>
-        <p:spPr>
-          <a:xfrm>
-            <a:off x="822960" y="2148840"/>
-            <a:ext cx="10515600" cy="3840480"/>
+              <a:t>Orchestration - questions</a:t>
+            </a:r>
+            <a:endParaRPr lang="en-US" sz="5000" dirty="0"/>
+          </a:p>
+        </p:txBody>
+      </p:sp>
+      <p:sp>
+        <p:nvSpPr>
+          <p:cNvPr id="5" name="Text 3"/>
+          <p:cNvSpPr/>
+          <p:nvPr/>
+        </p:nvSpPr>
+        <p:spPr>
+          <a:xfrm>
+            <a:off x="822960" y="2788920"/>
+            <a:ext cx="10515600" cy="2011680"/>
           </a:xfrm>
           <a:prstGeom prst="rect">
             <a:avLst/>
@@ -12201,7 +12772,7 @@
                 <a:ea typeface="Calibri" pitchFamily="34" charset="-122"/>
                 <a:cs typeface="Calibri" pitchFamily="34" charset="-120"/>
               </a:rPr>
-              <a:t>Concepts: automation vs AI vs agents vs agentic — in plain words, on one machine.</a:t>
+              <a:t>Which two departments would benefit from talking to each other?</a:t>
             </a:r>
             <a:endParaRPr lang="en-US" sz="2000" dirty="0"/>
           </a:p>
@@ -12235,75 +12806,7 @@
                 <a:ea typeface="Calibri" pitchFamily="34" charset="-122"/>
                 <a:cs typeface="Calibri" pitchFamily="34" charset="-120"/>
               </a:rPr>
-              <a:t>RAG: making AI answer from your own documents, with citations.</a:t>
-            </a:r>
-            <a:endParaRPr lang="en-US" sz="2000" dirty="0"/>
-          </a:p>
-          <a:p>
-            <a:pPr indent="0" marL="0">
-              <a:buNone/>
-            </a:pPr>
-            <a:r>
-              <a:rPr lang="en-US" sz="2000" b="1" dirty="0">
-                <a:solidFill>
-                  <a:srgbClr val="22D3EE"/>
-                </a:solidFill>
-                <a:latin typeface="Calibri" pitchFamily="34" charset="0"/>
-                <a:ea typeface="Calibri" pitchFamily="34" charset="-122"/>
-                <a:cs typeface="Calibri" pitchFamily="34" charset="-120"/>
-              </a:rPr>
-              <a:t>▸  </a:t>
-            </a:r>
-            <a:pPr indent="0" marL="0">
-              <a:spcAft>
-                <a:spcPts val="1600"/>
-              </a:spcAft>
-              <a:buNone/>
-            </a:pPr>
-            <a:r>
-              <a:rPr lang="en-US" sz="2000" dirty="0">
-                <a:solidFill>
-                  <a:srgbClr val="E6EDF3"/>
-                </a:solidFill>
-                <a:latin typeface="Calibri" pitchFamily="34" charset="0"/>
-                <a:ea typeface="Calibri" pitchFamily="34" charset="-122"/>
-                <a:cs typeface="Calibri" pitchFamily="34" charset="-120"/>
-              </a:rPr>
-              <a:t>Agents: AI that reads, decides and acts — built no-code in n8n.</a:t>
-            </a:r>
-            <a:endParaRPr lang="en-US" sz="2000" dirty="0"/>
-          </a:p>
-          <a:p>
-            <a:pPr indent="0" marL="0">
-              <a:buNone/>
-            </a:pPr>
-            <a:r>
-              <a:rPr lang="en-US" sz="2000" b="1" dirty="0">
-                <a:solidFill>
-                  <a:srgbClr val="22D3EE"/>
-                </a:solidFill>
-                <a:latin typeface="Calibri" pitchFamily="34" charset="0"/>
-                <a:ea typeface="Calibri" pitchFamily="34" charset="-122"/>
-                <a:cs typeface="Calibri" pitchFamily="34" charset="-120"/>
-              </a:rPr>
-              <a:t>▸  </a:t>
-            </a:r>
-            <a:pPr indent="0" marL="0">
-              <a:spcAft>
-                <a:spcPts val="1600"/>
-              </a:spcAft>
-              <a:buNone/>
-            </a:pPr>
-            <a:r>
-              <a:rPr lang="en-US" sz="2000" dirty="0">
-                <a:solidFill>
-                  <a:srgbClr val="E6EDF3"/>
-                </a:solidFill>
-                <a:latin typeface="Calibri" pitchFamily="34" charset="0"/>
-                <a:ea typeface="Calibri" pitchFamily="34" charset="-122"/>
-                <a:cs typeface="Calibri" pitchFamily="34" charset="-120"/>
-              </a:rPr>
-              <a:t>Orchestration: three agents working together, logging a real decision.</a:t>
+              <a:t>Where would you want a human approval step?</a:t>
             </a:r>
             <a:endParaRPr lang="en-US" sz="2000" dirty="0"/>
           </a:p>
@@ -12320,6 +12823,313 @@
 <file path=ppt/slides/slide37.xml><?xml version="1.0" encoding="utf-8"?>
 <p:sld xmlns:a="http://schemas.openxmlformats.org/drawingml/2006/main" xmlns:r="http://schemas.openxmlformats.org/officeDocument/2006/relationships" xmlns:p="http://schemas.openxmlformats.org/presentationml/2006/main">
   <p:cSld name="Slide 37">
+    <p:bg>
+      <p:bgPr>
+        <a:solidFill>
+          <a:srgbClr val="06090D"/>
+        </a:solidFill>
+      </p:bgPr>
+    </p:bg>
+    <p:spTree>
+      <p:nvGrpSpPr>
+        <p:cNvPr id="1" name=""/>
+        <p:cNvGrpSpPr/>
+        <p:nvPr/>
+      </p:nvGrpSpPr>
+      <p:grpSpPr>
+        <a:xfrm>
+          <a:off x="0" y="0"/>
+          <a:ext cx="0" cy="0"/>
+          <a:chOff x="0" y="0"/>
+          <a:chExt cx="0" cy="0"/>
+        </a:xfrm>
+      </p:grpSpPr>
+      <p:sp>
+        <p:nvSpPr>
+          <p:cNvPr id="2" name="Text 0"/>
+          <p:cNvSpPr/>
+          <p:nvPr/>
+        </p:nvSpPr>
+        <p:spPr>
+          <a:xfrm>
+            <a:off x="822960" y="6446520"/>
+            <a:ext cx="5486400" cy="274320"/>
+          </a:xfrm>
+          <a:prstGeom prst="rect">
+            <a:avLst/>
+          </a:prstGeom>
+          <a:noFill/>
+          <a:ln/>
+        </p:spPr>
+        <p:txBody>
+          <a:bodyPr wrap="square" rtlCol="0" anchor="ctr"/>
+          <a:lstStyle/>
+          <a:p>
+            <a:pPr indent="0" marL="0">
+              <a:buNone/>
+            </a:pPr>
+            <a:r>
+              <a:rPr lang="en-US" sz="1100" spc="100" kern="0" dirty="0">
+                <a:solidFill>
+                  <a:srgbClr val="AAB4C0"/>
+                </a:solidFill>
+                <a:latin typeface="Calibri" pitchFamily="34" charset="0"/>
+                <a:ea typeface="Calibri" pitchFamily="34" charset="-122"/>
+                <a:cs typeface="Calibri" pitchFamily="34" charset="-120"/>
+              </a:rPr>
+              <a:t>arjunthakur.dev</a:t>
+            </a:r>
+            <a:endParaRPr lang="en-US" sz="1100" dirty="0"/>
+          </a:p>
+        </p:txBody>
+      </p:sp>
+      <p:sp>
+        <p:nvSpPr>
+          <p:cNvPr id="3" name="Text 1"/>
+          <p:cNvSpPr/>
+          <p:nvPr/>
+        </p:nvSpPr>
+        <p:spPr>
+          <a:xfrm>
+            <a:off x="822960" y="658368"/>
+            <a:ext cx="10515600" cy="365760"/>
+          </a:xfrm>
+          <a:prstGeom prst="rect">
+            <a:avLst/>
+          </a:prstGeom>
+          <a:noFill/>
+          <a:ln/>
+        </p:spPr>
+        <p:txBody>
+          <a:bodyPr wrap="square" rtlCol="0" anchor="ctr"/>
+          <a:lstStyle/>
+          <a:p>
+            <a:pPr indent="0" marL="0">
+              <a:buNone/>
+            </a:pPr>
+            <a:r>
+              <a:rPr lang="en-US" sz="1400" b="1" spc="400" kern="0" dirty="0">
+                <a:solidFill>
+                  <a:srgbClr val="22D3EE"/>
+                </a:solidFill>
+                <a:latin typeface="Calibri" pitchFamily="34" charset="0"/>
+                <a:ea typeface="Calibri" pitchFamily="34" charset="-122"/>
+                <a:cs typeface="Calibri" pitchFamily="34" charset="-120"/>
+              </a:rPr>
+              <a:t>WRAP-UP</a:t>
+            </a:r>
+            <a:endParaRPr lang="en-US" sz="1400" dirty="0"/>
+          </a:p>
+        </p:txBody>
+      </p:sp>
+      <p:sp>
+        <p:nvSpPr>
+          <p:cNvPr id="4" name="Text 2"/>
+          <p:cNvSpPr/>
+          <p:nvPr/>
+        </p:nvSpPr>
+        <p:spPr>
+          <a:xfrm>
+            <a:off x="822960" y="1078992"/>
+            <a:ext cx="10607040" cy="822960"/>
+          </a:xfrm>
+          <a:prstGeom prst="rect">
+            <a:avLst/>
+          </a:prstGeom>
+          <a:noFill/>
+          <a:ln/>
+        </p:spPr>
+        <p:txBody>
+          <a:bodyPr wrap="square" rtlCol="0" anchor="ctr"/>
+          <a:lstStyle/>
+          <a:p>
+            <a:pPr indent="0" marL="0">
+              <a:buNone/>
+            </a:pPr>
+            <a:r>
+              <a:rPr lang="en-US" sz="3200" b="1" dirty="0">
+                <a:solidFill>
+                  <a:srgbClr val="E6EDF3"/>
+                </a:solidFill>
+                <a:latin typeface="Calibri" pitchFamily="34" charset="0"/>
+                <a:ea typeface="Calibri" pitchFamily="34" charset="-122"/>
+                <a:cs typeface="Calibri" pitchFamily="34" charset="-120"/>
+              </a:rPr>
+              <a:t>What we covered today</a:t>
+            </a:r>
+            <a:endParaRPr lang="en-US" sz="3200" dirty="0"/>
+          </a:p>
+        </p:txBody>
+      </p:sp>
+      <p:sp>
+        <p:nvSpPr>
+          <p:cNvPr id="5" name="animList"/>
+          <p:cNvSpPr/>
+          <p:nvPr/>
+        </p:nvSpPr>
+        <p:spPr>
+          <a:xfrm>
+            <a:off x="822960" y="2148840"/>
+            <a:ext cx="10515600" cy="3657600"/>
+          </a:xfrm>
+          <a:prstGeom prst="rect">
+            <a:avLst/>
+          </a:prstGeom>
+          <a:noFill/>
+          <a:ln/>
+        </p:spPr>
+        <p:txBody>
+          <a:bodyPr wrap="square" rtlCol="0" anchor="t"/>
+          <a:lstStyle/>
+          <a:p>
+            <a:pPr indent="0" marL="0">
+              <a:buNone/>
+            </a:pPr>
+            <a:r>
+              <a:rPr lang="en-US" sz="2000" b="1" dirty="0">
+                <a:solidFill>
+                  <a:srgbClr val="22D3EE"/>
+                </a:solidFill>
+                <a:latin typeface="Calibri" pitchFamily="34" charset="0"/>
+                <a:ea typeface="Calibri" pitchFamily="34" charset="-122"/>
+                <a:cs typeface="Calibri" pitchFamily="34" charset="-120"/>
+              </a:rPr>
+              <a:t>▸  </a:t>
+            </a:r>
+            <a:pPr indent="0" marL="0">
+              <a:spcAft>
+                <a:spcPts val="1600"/>
+              </a:spcAft>
+              <a:buNone/>
+            </a:pPr>
+            <a:r>
+              <a:rPr lang="en-US" sz="2000" dirty="0">
+                <a:solidFill>
+                  <a:srgbClr val="E6EDF3"/>
+                </a:solidFill>
+                <a:latin typeface="Calibri" pitchFamily="34" charset="0"/>
+                <a:ea typeface="Calibri" pitchFamily="34" charset="-122"/>
+                <a:cs typeface="Calibri" pitchFamily="34" charset="-120"/>
+              </a:rPr>
+              <a:t>Concepts: automation vs AI vs agents vs agentic - in plain words, on one machine.</a:t>
+            </a:r>
+            <a:endParaRPr lang="en-US" sz="2000" dirty="0"/>
+          </a:p>
+          <a:p>
+            <a:pPr indent="0" marL="0">
+              <a:buNone/>
+            </a:pPr>
+            <a:r>
+              <a:rPr lang="en-US" sz="2000" b="1" dirty="0">
+                <a:solidFill>
+                  <a:srgbClr val="22D3EE"/>
+                </a:solidFill>
+                <a:latin typeface="Calibri" pitchFamily="34" charset="0"/>
+                <a:ea typeface="Calibri" pitchFamily="34" charset="-122"/>
+                <a:cs typeface="Calibri" pitchFamily="34" charset="-120"/>
+              </a:rPr>
+              <a:t>▸  </a:t>
+            </a:r>
+            <a:pPr indent="0" marL="0">
+              <a:spcAft>
+                <a:spcPts val="1600"/>
+              </a:spcAft>
+              <a:buNone/>
+            </a:pPr>
+            <a:r>
+              <a:rPr lang="en-US" sz="2000" dirty="0">
+                <a:solidFill>
+                  <a:srgbClr val="E6EDF3"/>
+                </a:solidFill>
+                <a:latin typeface="Calibri" pitchFamily="34" charset="0"/>
+                <a:ea typeface="Calibri" pitchFamily="34" charset="-122"/>
+                <a:cs typeface="Calibri" pitchFamily="34" charset="-120"/>
+              </a:rPr>
+              <a:t>RAG: making AI answer from your own documents, with citations.</a:t>
+            </a:r>
+            <a:endParaRPr lang="en-US" sz="2000" dirty="0"/>
+          </a:p>
+          <a:p>
+            <a:pPr indent="0" marL="0">
+              <a:buNone/>
+            </a:pPr>
+            <a:r>
+              <a:rPr lang="en-US" sz="2000" b="1" dirty="0">
+                <a:solidFill>
+                  <a:srgbClr val="22D3EE"/>
+                </a:solidFill>
+                <a:latin typeface="Calibri" pitchFamily="34" charset="0"/>
+                <a:ea typeface="Calibri" pitchFamily="34" charset="-122"/>
+                <a:cs typeface="Calibri" pitchFamily="34" charset="-120"/>
+              </a:rPr>
+              <a:t>▸  </a:t>
+            </a:r>
+            <a:pPr indent="0" marL="0">
+              <a:spcAft>
+                <a:spcPts val="1600"/>
+              </a:spcAft>
+              <a:buNone/>
+            </a:pPr>
+            <a:r>
+              <a:rPr lang="en-US" sz="2000" dirty="0">
+                <a:solidFill>
+                  <a:srgbClr val="E6EDF3"/>
+                </a:solidFill>
+                <a:latin typeface="Calibri" pitchFamily="34" charset="0"/>
+                <a:ea typeface="Calibri" pitchFamily="34" charset="-122"/>
+                <a:cs typeface="Calibri" pitchFamily="34" charset="-120"/>
+              </a:rPr>
+              <a:t>Agents: AI that reads, decides and acts - built no-code in n8n.</a:t>
+            </a:r>
+            <a:endParaRPr lang="en-US" sz="2000" dirty="0"/>
+          </a:p>
+          <a:p>
+            <a:pPr indent="0" marL="0">
+              <a:buNone/>
+            </a:pPr>
+            <a:r>
+              <a:rPr lang="en-US" sz="2000" b="1" dirty="0">
+                <a:solidFill>
+                  <a:srgbClr val="22D3EE"/>
+                </a:solidFill>
+                <a:latin typeface="Calibri" pitchFamily="34" charset="0"/>
+                <a:ea typeface="Calibri" pitchFamily="34" charset="-122"/>
+                <a:cs typeface="Calibri" pitchFamily="34" charset="-120"/>
+              </a:rPr>
+              <a:t>▸  </a:t>
+            </a:r>
+            <a:pPr indent="0" marL="0">
+              <a:spcAft>
+                <a:spcPts val="1600"/>
+              </a:spcAft>
+              <a:buNone/>
+            </a:pPr>
+            <a:r>
+              <a:rPr lang="en-US" sz="2000" dirty="0">
+                <a:solidFill>
+                  <a:srgbClr val="E6EDF3"/>
+                </a:solidFill>
+                <a:latin typeface="Calibri" pitchFamily="34" charset="0"/>
+                <a:ea typeface="Calibri" pitchFamily="34" charset="-122"/>
+                <a:cs typeface="Calibri" pitchFamily="34" charset="-120"/>
+              </a:rPr>
+              <a:t>Orchestration: three agents working together, logging a real decision.</a:t>
+            </a:r>
+            <a:endParaRPr lang="en-US" sz="2000" dirty="0"/>
+          </a:p>
+        </p:txBody>
+      </p:sp>
+    </p:spTree>
+  </p:cSld>
+  <p:clrMapOvr>
+    <a:masterClrMapping/>
+  </p:clrMapOvr>
+</p:sld>
+</file>
+
+<file path=ppt/slides/slide38.xml><?xml version="1.0" encoding="utf-8"?>
+<p:sld xmlns:a="http://schemas.openxmlformats.org/drawingml/2006/main" xmlns:r="http://schemas.openxmlformats.org/officeDocument/2006/relationships" xmlns:p="http://schemas.openxmlformats.org/presentationml/2006/main">
+  <p:cSld name="Slide 38">
     <p:bg>
       <p:bgPr>
         <a:solidFill>
@@ -12467,7 +13277,7 @@
         <p:spPr>
           <a:xfrm>
             <a:off x="822960" y="2148840"/>
-            <a:ext cx="10515600" cy="3840480"/>
+            <a:ext cx="10515600" cy="3657600"/>
           </a:xfrm>
           <a:prstGeom prst="rect">
             <a:avLst/>
@@ -12495,7 +13305,7 @@
             </a:r>
             <a:pPr indent="0" marL="0">
               <a:spcAft>
-                <a:spcPts val="1800"/>
+                <a:spcPts val="1600"/>
               </a:spcAft>
               <a:buNone/>
             </a:pPr>
@@ -12508,7 +13318,7 @@
                 <a:ea typeface="Calibri" pitchFamily="34" charset="-122"/>
                 <a:cs typeface="Calibri" pitchFamily="34" charset="-120"/>
               </a:rPr>
-              <a:t>You get: the how-to manual (Word), the agent prompts, a glossary, the sheet template, and this deck.</a:t>
+              <a:t>You get: the how-to manual, the agent prompts, a glossary, the sheet template, and this deck.</a:t>
             </a:r>
             <a:endParaRPr lang="en-US" sz="2000" dirty="0"/>
           </a:p>
@@ -12529,7 +13339,7 @@
             </a:r>
             <a:pPr indent="0" marL="0">
               <a:spcAft>
-                <a:spcPts val="1800"/>
+                <a:spcPts val="1600"/>
               </a:spcAft>
               <a:buNone/>
             </a:pPr>
@@ -12542,7 +13352,7 @@
                 <a:ea typeface="Calibri" pitchFamily="34" charset="-122"/>
                 <a:cs typeface="Calibri" pitchFamily="34" charset="-120"/>
               </a:rPr>
-              <a:t>Rebuild it yourself — then swap in your own machine and data.</a:t>
+              <a:t>Rebuild it yourself - then swap in your own machine and data.</a:t>
             </a:r>
             <a:endParaRPr lang="en-US" sz="2000" dirty="0"/>
           </a:p>
@@ -12563,7 +13373,7 @@
             </a:r>
             <a:pPr indent="0" marL="0">
               <a:spcAft>
-                <a:spcPts val="1800"/>
+                <a:spcPts val="1600"/>
               </a:spcAft>
               <a:buNone/>
             </a:pPr>
@@ -12579,6 +13389,59 @@
               <a:t>Pick one small, real problem on your line to try first.</a:t>
             </a:r>
             <a:endParaRPr lang="en-US" sz="2000" dirty="0"/>
+          </a:p>
+        </p:txBody>
+      </p:sp>
+      <p:sp>
+        <p:nvSpPr>
+          <p:cNvPr id="6" name="Text 4"/>
+          <p:cNvSpPr/>
+          <p:nvPr/>
+        </p:nvSpPr>
+        <p:spPr>
+          <a:xfrm>
+            <a:off x="822960" y="6053328"/>
+            <a:ext cx="10515600" cy="292608"/>
+          </a:xfrm>
+          <a:prstGeom prst="rect">
+            <a:avLst/>
+          </a:prstGeom>
+          <a:noFill/>
+          <a:ln/>
+        </p:spPr>
+        <p:txBody>
+          <a:bodyPr wrap="square" rtlCol="0" anchor="ctr"/>
+          <a:lstStyle/>
+          <a:p>
+            <a:pPr indent="0" marL="0">
+              <a:buNone/>
+            </a:pPr>
+            <a:r>
+              <a:rPr lang="en-US" sz="1400" b="1" dirty="0">
+                <a:solidFill>
+                  <a:srgbClr val="F59E0B"/>
+                </a:solidFill>
+                <a:latin typeface="Calibri" pitchFamily="34" charset="0"/>
+                <a:ea typeface="Calibri" pitchFamily="34" charset="-122"/>
+                <a:cs typeface="Calibri" pitchFamily="34" charset="-120"/>
+              </a:rPr>
+              <a:t>↗  </a:t>
+            </a:r>
+            <a:pPr indent="0" marL="0">
+              <a:buNone/>
+            </a:pPr>
+            <a:r>
+              <a:rPr lang="en-US" sz="1400" dirty="0">
+                <a:solidFill>
+                  <a:srgbClr val="22D3EE"/>
+                </a:solidFill>
+                <a:latin typeface="Calibri" pitchFamily="34" charset="0"/>
+                <a:ea typeface="Calibri" pitchFamily="34" charset="-122"/>
+                <a:cs typeface="Calibri" pitchFamily="34" charset="-120"/>
+              </a:rPr>
+              <a:t>notebooklm.google.com   ·   n8n.io   ·   aistudio.google.com   ·   sheets.google.com</a:t>
+            </a:r>
+            <a:endParaRPr lang="en-US" sz="1400" dirty="0"/>
           </a:p>
         </p:txBody>
       </p:sp>
@@ -12590,9 +13453,9 @@
 </p:sld>
 </file>
 
-<file path=ppt/slides/slide38.xml><?xml version="1.0" encoding="utf-8"?>
+<file path=ppt/slides/slide39.xml><?xml version="1.0" encoding="utf-8"?>
 <p:sld xmlns:a="http://schemas.openxmlformats.org/drawingml/2006/main" xmlns:r="http://schemas.openxmlformats.org/officeDocument/2006/relationships" xmlns:p="http://schemas.openxmlformats.org/presentationml/2006/main">
-  <p:cSld name="Slide 38">
+  <p:cSld name="Slide 39">
     <p:bg>
       <p:bgPr>
         <a:solidFill>
@@ -12725,7 +13588,7 @@
                 <a:ea typeface="Calibri" pitchFamily="34" charset="-122"/>
                 <a:cs typeface="Calibri" pitchFamily="34" charset="-120"/>
               </a:rPr>
-              <a:t>Questions any time.</a:t>
+              <a:t>Questions any time - in Hindi or English.</a:t>
             </a:r>
             <a:endParaRPr lang="en-US" sz="2000" dirty="0"/>
           </a:p>
@@ -12954,7 +13817,7 @@
         </p:nvSpPr>
         <p:spPr>
           <a:xfrm>
-            <a:off x="822960" y="566928"/>
+            <a:off x="822960" y="640080"/>
             <a:ext cx="10515600" cy="365760"/>
           </a:xfrm>
           <a:prstGeom prst="rect">
@@ -12979,7 +13842,7 @@
                 <a:ea typeface="Calibri" pitchFamily="34" charset="-122"/>
                 <a:cs typeface="Calibri" pitchFamily="34" charset="-120"/>
               </a:rPr>
-              <a:t>THE THREAD</a:t>
+              <a:t>HOW WE'LL WORK TODAY</a:t>
             </a:r>
             <a:endParaRPr lang="en-US" sz="1400" dirty="0"/>
           </a:p>
@@ -12993,8 +13856,8 @@
         </p:nvSpPr>
         <p:spPr>
           <a:xfrm>
-            <a:off x="822960" y="932688"/>
-            <a:ext cx="10607040" cy="640080"/>
+            <a:off x="822960" y="1024128"/>
+            <a:ext cx="10607040" cy="731520"/>
           </a:xfrm>
           <a:prstGeom prst="rect">
             <a:avLst/>
@@ -13010,7 +13873,7 @@
               <a:buNone/>
             </a:pPr>
             <a:r>
-              <a:rPr lang="en-US" sz="3000" b="1" dirty="0">
+              <a:rPr lang="en-US" sz="3200" b="1" dirty="0">
                 <a:solidFill>
                   <a:srgbClr val="E6EDF3"/>
                 </a:solidFill>
@@ -13018,62 +13881,170 @@
                 <a:ea typeface="Calibri" pitchFamily="34" charset="-122"/>
                 <a:cs typeface="Calibri" pitchFamily="34" charset="-120"/>
               </a:rPr>
-              <a:t>One example, grown all day</a:t>
-            </a:r>
-            <a:endParaRPr lang="en-US" sz="3000" dirty="0"/>
-          </a:p>
-        </p:txBody>
-      </p:sp>
-      <p:sp>
-        <p:nvSpPr>
-          <p:cNvPr id="5" name="Shape 3"/>
-          <p:cNvSpPr/>
-          <p:nvPr/>
-        </p:nvSpPr>
-        <p:spPr>
-          <a:xfrm>
-            <a:off x="822960" y="1755648"/>
-            <a:ext cx="10543032" cy="4297680"/>
-          </a:xfrm>
-          <a:prstGeom prst="roundRect">
-            <a:avLst>
-              <a:gd name="adj" fmla="val 1702"/>
-            </a:avLst>
-          </a:prstGeom>
-          <a:solidFill>
-            <a:srgbClr val="0B0F15"/>
-          </a:solidFill>
-          <a:ln w="15875">
-            <a:solidFill>
-              <a:srgbClr val="1F2937"/>
-            </a:solidFill>
-            <a:prstDash val="solid"/>
-          </a:ln>
-        </p:spPr>
-      </p:sp>
-      <p:pic>
-        <p:nvPicPr>
-          <p:cNvPr id="6" name="Image 0" descr="preencoded.png">    </p:cNvPr>
-          <p:cNvPicPr>
-            <a:picLocks noChangeAspect="1"/>
-          </p:cNvPicPr>
-          <p:nvPr/>
-        </p:nvPicPr>
-        <p:blipFill>
-          <a:blip r:embed="rId1"/>
-          <a:srcRect l="0" r="0" t="0" b="0"/>
-          <a:stretch/>
-        </p:blipFill>
-        <p:spPr>
-          <a:xfrm>
-            <a:off x="960120" y="1892808"/>
-            <a:ext cx="10268712" cy="4023360"/>
-          </a:xfrm>
-          <a:prstGeom prst="rect">
-            <a:avLst/>
-          </a:prstGeom>
-        </p:spPr>
-      </p:pic>
+              <a:t>A few house rules</a:t>
+            </a:r>
+            <a:endParaRPr lang="en-US" sz="3200" dirty="0"/>
+          </a:p>
+        </p:txBody>
+      </p:sp>
+      <p:sp>
+        <p:nvSpPr>
+          <p:cNvPr id="5" name="Text 3"/>
+          <p:cNvSpPr/>
+          <p:nvPr/>
+        </p:nvSpPr>
+        <p:spPr>
+          <a:xfrm>
+            <a:off x="822960" y="2148840"/>
+            <a:ext cx="10515600" cy="3657600"/>
+          </a:xfrm>
+          <a:prstGeom prst="rect">
+            <a:avLst/>
+          </a:prstGeom>
+          <a:noFill/>
+          <a:ln/>
+        </p:spPr>
+        <p:txBody>
+          <a:bodyPr wrap="square" rtlCol="0" anchor="t"/>
+          <a:lstStyle/>
+          <a:p>
+            <a:pPr indent="0" marL="0">
+              <a:buNone/>
+            </a:pPr>
+            <a:r>
+              <a:rPr lang="en-US" sz="1900" b="1" dirty="0">
+                <a:solidFill>
+                  <a:srgbClr val="22D3EE"/>
+                </a:solidFill>
+                <a:latin typeface="Calibri" pitchFamily="34" charset="0"/>
+                <a:ea typeface="Calibri" pitchFamily="34" charset="-122"/>
+                <a:cs typeface="Calibri" pitchFamily="34" charset="-120"/>
+              </a:rPr>
+              <a:t>▸  </a:t>
+            </a:r>
+            <a:pPr indent="0" marL="0">
+              <a:spcAft>
+                <a:spcPts val="1600"/>
+              </a:spcAft>
+              <a:buNone/>
+            </a:pPr>
+            <a:r>
+              <a:rPr lang="en-US" sz="1900" dirty="0">
+                <a:solidFill>
+                  <a:srgbClr val="E6EDF3"/>
+                </a:solidFill>
+                <a:latin typeface="Calibri" pitchFamily="34" charset="0"/>
+                <a:ea typeface="Calibri" pitchFamily="34" charset="-122"/>
+                <a:cs typeface="Calibri" pitchFamily="34" charset="-120"/>
+              </a:rPr>
+              <a:t>Ask the moment you have a question - don't wait for me to finish. The best time is right away.</a:t>
+            </a:r>
+            <a:endParaRPr lang="en-US" sz="1900" dirty="0"/>
+          </a:p>
+          <a:p>
+            <a:pPr indent="0" marL="0">
+              <a:buNone/>
+            </a:pPr>
+            <a:r>
+              <a:rPr lang="en-US" sz="1900" b="1" dirty="0">
+                <a:solidFill>
+                  <a:srgbClr val="22D3EE"/>
+                </a:solidFill>
+                <a:latin typeface="Calibri" pitchFamily="34" charset="0"/>
+                <a:ea typeface="Calibri" pitchFamily="34" charset="-122"/>
+                <a:cs typeface="Calibri" pitchFamily="34" charset="-120"/>
+              </a:rPr>
+              <a:t>▸  </a:t>
+            </a:r>
+            <a:pPr indent="0" marL="0">
+              <a:spcAft>
+                <a:spcPts val="1600"/>
+              </a:spcAft>
+              <a:buNone/>
+            </a:pPr>
+            <a:r>
+              <a:rPr lang="en-US" sz="1900" dirty="0">
+                <a:solidFill>
+                  <a:srgbClr val="E6EDF3"/>
+                </a:solidFill>
+                <a:latin typeface="Calibri" pitchFamily="34" charset="0"/>
+                <a:ea typeface="Calibri" pitchFamily="34" charset="-122"/>
+                <a:cs typeface="Calibri" pitchFamily="34" charset="-120"/>
+              </a:rPr>
+              <a:t>Stuck on a word or a term? Ask me to define it, anytime. No question is too basic.</a:t>
+            </a:r>
+            <a:endParaRPr lang="en-US" sz="1900" dirty="0"/>
+          </a:p>
+          <a:p>
+            <a:pPr indent="0" marL="0">
+              <a:buNone/>
+            </a:pPr>
+            <a:r>
+              <a:rPr lang="en-US" sz="1900" b="1" dirty="0">
+                <a:solidFill>
+                  <a:srgbClr val="22D3EE"/>
+                </a:solidFill>
+                <a:latin typeface="Calibri" pitchFamily="34" charset="0"/>
+                <a:ea typeface="Calibri" pitchFamily="34" charset="-122"/>
+                <a:cs typeface="Calibri" pitchFamily="34" charset="-120"/>
+              </a:rPr>
+              <a:t>▸  </a:t>
+            </a:r>
+            <a:pPr indent="0" marL="0">
+              <a:spcAft>
+                <a:spcPts val="1600"/>
+              </a:spcAft>
+              <a:buNone/>
+            </a:pPr>
+            <a:r>
+              <a:rPr lang="en-US" sz="1900" dirty="0">
+                <a:solidFill>
+                  <a:srgbClr val="E6EDF3"/>
+                </a:solidFill>
+                <a:latin typeface="Calibri" pitchFamily="34" charset="0"/>
+                <a:ea typeface="Calibri" pitchFamily="34" charset="-122"/>
+                <a:cs typeface="Calibri" pitchFamily="34" charset="-120"/>
+              </a:rPr>
+              <a:t>Language is no barrier - Hindi or English, whatever's comfortable. Hinglish is perfectly fine.</a:t>
+            </a:r>
+            <a:endParaRPr lang="en-US" sz="1900" dirty="0"/>
+          </a:p>
+          <a:p>
+            <a:pPr indent="0" marL="0">
+              <a:buNone/>
+            </a:pPr>
+            <a:r>
+              <a:rPr lang="en-US" sz="1900" b="1" dirty="0">
+                <a:solidFill>
+                  <a:srgbClr val="22D3EE"/>
+                </a:solidFill>
+                <a:latin typeface="Calibri" pitchFamily="34" charset="0"/>
+                <a:ea typeface="Calibri" pitchFamily="34" charset="-122"/>
+                <a:cs typeface="Calibri" pitchFamily="34" charset="-120"/>
+              </a:rPr>
+              <a:t>▸  </a:t>
+            </a:r>
+            <a:pPr indent="0" marL="0">
+              <a:spcAft>
+                <a:spcPts val="1600"/>
+              </a:spcAft>
+              <a:buNone/>
+            </a:pPr>
+            <a:r>
+              <a:rPr lang="en-US" sz="1900" dirty="0">
+                <a:solidFill>
+                  <a:srgbClr val="E6EDF3"/>
+                </a:solidFill>
+                <a:latin typeface="Calibri" pitchFamily="34" charset="0"/>
+                <a:ea typeface="Calibri" pitchFamily="34" charset="-122"/>
+                <a:cs typeface="Calibri" pitchFamily="34" charset="-120"/>
+              </a:rPr>
+              <a:t>Everything is no-code and free. I build live; you get the manual to redo it yourself.</a:t>
+            </a:r>
+            <a:endParaRPr lang="en-US" sz="1900" dirty="0"/>
+          </a:p>
+        </p:txBody>
+      </p:sp>
     </p:spTree>
   </p:cSld>
   <p:clrMapOvr>
@@ -13178,7 +14149,7 @@
                 <a:ea typeface="Calibri" pitchFamily="34" charset="-122"/>
                 <a:cs typeface="Calibri" pitchFamily="34" charset="-120"/>
               </a:rPr>
-              <a:t>MEET THE MACHINE</a:t>
+              <a:t>THE THREAD</a:t>
             </a:r>
             <a:endParaRPr lang="en-US" sz="1400" dirty="0"/>
           </a:p>
@@ -13217,7 +14188,7 @@
                 <a:ea typeface="Calibri" pitchFamily="34" charset="-122"/>
                 <a:cs typeface="Calibri" pitchFamily="34" charset="-120"/>
               </a:rPr>
-              <a:t>The IM-500 — what we'll work on</a:t>
+              <a:t>One example, grown all day</a:t>
             </a:r>
             <a:endParaRPr lang="en-US" sz="3000" dirty="0"/>
           </a:p>
@@ -13284,6 +14255,205 @@
 <file path=ppt/slides/slide6.xml><?xml version="1.0" encoding="utf-8"?>
 <p:sld xmlns:a="http://schemas.openxmlformats.org/drawingml/2006/main" xmlns:r="http://schemas.openxmlformats.org/officeDocument/2006/relationships" xmlns:p="http://schemas.openxmlformats.org/presentationml/2006/main">
   <p:cSld name="Slide 6">
+    <p:bg>
+      <p:bgPr>
+        <a:solidFill>
+          <a:srgbClr val="0B0F15"/>
+        </a:solidFill>
+      </p:bgPr>
+    </p:bg>
+    <p:spTree>
+      <p:nvGrpSpPr>
+        <p:cNvPr id="1" name=""/>
+        <p:cNvGrpSpPr/>
+        <p:nvPr/>
+      </p:nvGrpSpPr>
+      <p:grpSpPr>
+        <a:xfrm>
+          <a:off x="0" y="0"/>
+          <a:ext cx="0" cy="0"/>
+          <a:chOff x="0" y="0"/>
+          <a:chExt cx="0" cy="0"/>
+        </a:xfrm>
+      </p:grpSpPr>
+      <p:sp>
+        <p:nvSpPr>
+          <p:cNvPr id="2" name="Text 0"/>
+          <p:cNvSpPr/>
+          <p:nvPr/>
+        </p:nvSpPr>
+        <p:spPr>
+          <a:xfrm>
+            <a:off x="822960" y="6446520"/>
+            <a:ext cx="5486400" cy="274320"/>
+          </a:xfrm>
+          <a:prstGeom prst="rect">
+            <a:avLst/>
+          </a:prstGeom>
+          <a:noFill/>
+          <a:ln/>
+        </p:spPr>
+        <p:txBody>
+          <a:bodyPr wrap="square" rtlCol="0" anchor="ctr"/>
+          <a:lstStyle/>
+          <a:p>
+            <a:pPr indent="0" marL="0">
+              <a:buNone/>
+            </a:pPr>
+            <a:r>
+              <a:rPr lang="en-US" sz="1100" spc="100" kern="0" dirty="0">
+                <a:solidFill>
+                  <a:srgbClr val="AAB4C0"/>
+                </a:solidFill>
+                <a:latin typeface="Calibri" pitchFamily="34" charset="0"/>
+                <a:ea typeface="Calibri" pitchFamily="34" charset="-122"/>
+                <a:cs typeface="Calibri" pitchFamily="34" charset="-120"/>
+              </a:rPr>
+              <a:t>arjunthakur.dev</a:t>
+            </a:r>
+            <a:endParaRPr lang="en-US" sz="1100" dirty="0"/>
+          </a:p>
+        </p:txBody>
+      </p:sp>
+      <p:sp>
+        <p:nvSpPr>
+          <p:cNvPr id="3" name="Text 1"/>
+          <p:cNvSpPr/>
+          <p:nvPr/>
+        </p:nvSpPr>
+        <p:spPr>
+          <a:xfrm>
+            <a:off x="822960" y="566928"/>
+            <a:ext cx="10515600" cy="365760"/>
+          </a:xfrm>
+          <a:prstGeom prst="rect">
+            <a:avLst/>
+          </a:prstGeom>
+          <a:noFill/>
+          <a:ln/>
+        </p:spPr>
+        <p:txBody>
+          <a:bodyPr wrap="square" rtlCol="0" anchor="ctr"/>
+          <a:lstStyle/>
+          <a:p>
+            <a:pPr indent="0" marL="0">
+              <a:buNone/>
+            </a:pPr>
+            <a:r>
+              <a:rPr lang="en-US" sz="1400" b="1" spc="400" kern="0" dirty="0">
+                <a:solidFill>
+                  <a:srgbClr val="22D3EE"/>
+                </a:solidFill>
+                <a:latin typeface="Calibri" pitchFamily="34" charset="0"/>
+                <a:ea typeface="Calibri" pitchFamily="34" charset="-122"/>
+                <a:cs typeface="Calibri" pitchFamily="34" charset="-120"/>
+              </a:rPr>
+              <a:t>MEET THE MACHINE</a:t>
+            </a:r>
+            <a:endParaRPr lang="en-US" sz="1400" dirty="0"/>
+          </a:p>
+        </p:txBody>
+      </p:sp>
+      <p:sp>
+        <p:nvSpPr>
+          <p:cNvPr id="4" name="Text 2"/>
+          <p:cNvSpPr/>
+          <p:nvPr/>
+        </p:nvSpPr>
+        <p:spPr>
+          <a:xfrm>
+            <a:off x="822960" y="932688"/>
+            <a:ext cx="10607040" cy="640080"/>
+          </a:xfrm>
+          <a:prstGeom prst="rect">
+            <a:avLst/>
+          </a:prstGeom>
+          <a:noFill/>
+          <a:ln/>
+        </p:spPr>
+        <p:txBody>
+          <a:bodyPr wrap="square" rtlCol="0" anchor="ctr"/>
+          <a:lstStyle/>
+          <a:p>
+            <a:pPr indent="0" marL="0">
+              <a:buNone/>
+            </a:pPr>
+            <a:r>
+              <a:rPr lang="en-US" sz="3000" b="1" dirty="0">
+                <a:solidFill>
+                  <a:srgbClr val="E6EDF3"/>
+                </a:solidFill>
+                <a:latin typeface="Calibri" pitchFamily="34" charset="0"/>
+                <a:ea typeface="Calibri" pitchFamily="34" charset="-122"/>
+                <a:cs typeface="Calibri" pitchFamily="34" charset="-120"/>
+              </a:rPr>
+              <a:t>The IM-500 - what we'll work on</a:t>
+            </a:r>
+            <a:endParaRPr lang="en-US" sz="3000" dirty="0"/>
+          </a:p>
+        </p:txBody>
+      </p:sp>
+      <p:sp>
+        <p:nvSpPr>
+          <p:cNvPr id="5" name="Shape 3"/>
+          <p:cNvSpPr/>
+          <p:nvPr/>
+        </p:nvSpPr>
+        <p:spPr>
+          <a:xfrm>
+            <a:off x="822960" y="1755648"/>
+            <a:ext cx="10543032" cy="4297680"/>
+          </a:xfrm>
+          <a:prstGeom prst="roundRect">
+            <a:avLst>
+              <a:gd name="adj" fmla="val 1702"/>
+            </a:avLst>
+          </a:prstGeom>
+          <a:solidFill>
+            <a:srgbClr val="0B0F15"/>
+          </a:solidFill>
+          <a:ln w="15875">
+            <a:solidFill>
+              <a:srgbClr val="1F2937"/>
+            </a:solidFill>
+            <a:prstDash val="solid"/>
+          </a:ln>
+        </p:spPr>
+      </p:sp>
+      <p:pic>
+        <p:nvPicPr>
+          <p:cNvPr id="6" name="Image 0" descr="preencoded.png">    </p:cNvPr>
+          <p:cNvPicPr>
+            <a:picLocks noChangeAspect="1"/>
+          </p:cNvPicPr>
+          <p:nvPr/>
+        </p:nvPicPr>
+        <p:blipFill>
+          <a:blip r:embed="rId1"/>
+          <a:srcRect l="0" r="0" t="0" b="0"/>
+          <a:stretch/>
+        </p:blipFill>
+        <p:spPr>
+          <a:xfrm>
+            <a:off x="960120" y="1892808"/>
+            <a:ext cx="10268712" cy="4023360"/>
+          </a:xfrm>
+          <a:prstGeom prst="rect">
+            <a:avLst/>
+          </a:prstGeom>
+        </p:spPr>
+      </p:pic>
+    </p:spTree>
+  </p:cSld>
+  <p:clrMapOvr>
+    <a:masterClrMapping/>
+  </p:clrMapOvr>
+</p:sld>
+</file>
+
+<file path=ppt/slides/slide7.xml><?xml version="1.0" encoding="utf-8"?>
+<p:sld xmlns:a="http://schemas.openxmlformats.org/drawingml/2006/main" xmlns:r="http://schemas.openxmlformats.org/officeDocument/2006/relationships" xmlns:p="http://schemas.openxmlformats.org/presentationml/2006/main">
+  <p:cSld name="Slide 7">
     <p:bg>
       <p:bgPr>
         <a:solidFill>
@@ -13494,211 +14664,12 @@
                 <a:ea typeface="Calibri" pitchFamily="34" charset="-122"/>
                 <a:cs typeface="Calibri" pitchFamily="34" charset="-120"/>
               </a:rPr>
-              <a:t>The four words everyone mixes up — on the IM-500</a:t>
+              <a:t>The four words everyone mixes up - on the IM-500</a:t>
             </a:r>
             <a:endParaRPr lang="en-US" sz="1700" dirty="0"/>
           </a:p>
         </p:txBody>
       </p:sp>
-    </p:spTree>
-  </p:cSld>
-  <p:clrMapOvr>
-    <a:masterClrMapping/>
-  </p:clrMapOvr>
-</p:sld>
-</file>
-
-<file path=ppt/slides/slide7.xml><?xml version="1.0" encoding="utf-8"?>
-<p:sld xmlns:a="http://schemas.openxmlformats.org/drawingml/2006/main" xmlns:r="http://schemas.openxmlformats.org/officeDocument/2006/relationships" xmlns:p="http://schemas.openxmlformats.org/presentationml/2006/main">
-  <p:cSld name="Slide 7">
-    <p:bg>
-      <p:bgPr>
-        <a:solidFill>
-          <a:srgbClr val="0B0F15"/>
-        </a:solidFill>
-      </p:bgPr>
-    </p:bg>
-    <p:spTree>
-      <p:nvGrpSpPr>
-        <p:cNvPr id="1" name=""/>
-        <p:cNvGrpSpPr/>
-        <p:nvPr/>
-      </p:nvGrpSpPr>
-      <p:grpSpPr>
-        <a:xfrm>
-          <a:off x="0" y="0"/>
-          <a:ext cx="0" cy="0"/>
-          <a:chOff x="0" y="0"/>
-          <a:chExt cx="0" cy="0"/>
-        </a:xfrm>
-      </p:grpSpPr>
-      <p:sp>
-        <p:nvSpPr>
-          <p:cNvPr id="2" name="Text 0"/>
-          <p:cNvSpPr/>
-          <p:nvPr/>
-        </p:nvSpPr>
-        <p:spPr>
-          <a:xfrm>
-            <a:off x="822960" y="6446520"/>
-            <a:ext cx="5486400" cy="274320"/>
-          </a:xfrm>
-          <a:prstGeom prst="rect">
-            <a:avLst/>
-          </a:prstGeom>
-          <a:noFill/>
-          <a:ln/>
-        </p:spPr>
-        <p:txBody>
-          <a:bodyPr wrap="square" rtlCol="0" anchor="ctr"/>
-          <a:lstStyle/>
-          <a:p>
-            <a:pPr indent="0" marL="0">
-              <a:buNone/>
-            </a:pPr>
-            <a:r>
-              <a:rPr lang="en-US" sz="1100" spc="100" kern="0" dirty="0">
-                <a:solidFill>
-                  <a:srgbClr val="AAB4C0"/>
-                </a:solidFill>
-                <a:latin typeface="Calibri" pitchFamily="34" charset="0"/>
-                <a:ea typeface="Calibri" pitchFamily="34" charset="-122"/>
-                <a:cs typeface="Calibri" pitchFamily="34" charset="-120"/>
-              </a:rPr>
-              <a:t>arjunthakur.dev</a:t>
-            </a:r>
-            <a:endParaRPr lang="en-US" sz="1100" dirty="0"/>
-          </a:p>
-        </p:txBody>
-      </p:sp>
-      <p:sp>
-        <p:nvSpPr>
-          <p:cNvPr id="3" name="Text 1"/>
-          <p:cNvSpPr/>
-          <p:nvPr/>
-        </p:nvSpPr>
-        <p:spPr>
-          <a:xfrm>
-            <a:off x="822960" y="566928"/>
-            <a:ext cx="10515600" cy="365760"/>
-          </a:xfrm>
-          <a:prstGeom prst="rect">
-            <a:avLst/>
-          </a:prstGeom>
-          <a:noFill/>
-          <a:ln/>
-        </p:spPr>
-        <p:txBody>
-          <a:bodyPr wrap="square" rtlCol="0" anchor="ctr"/>
-          <a:lstStyle/>
-          <a:p>
-            <a:pPr indent="0" marL="0">
-              <a:buNone/>
-            </a:pPr>
-            <a:r>
-              <a:rPr lang="en-US" sz="1400" b="1" spc="400" kern="0" dirty="0">
-                <a:solidFill>
-                  <a:srgbClr val="22D3EE"/>
-                </a:solidFill>
-                <a:latin typeface="Calibri" pitchFamily="34" charset="0"/>
-                <a:ea typeface="Calibri" pitchFamily="34" charset="-122"/>
-                <a:cs typeface="Calibri" pitchFamily="34" charset="-120"/>
-              </a:rPr>
-              <a:t>MODULE 1 · CONCEPTS</a:t>
-            </a:r>
-            <a:endParaRPr lang="en-US" sz="1400" dirty="0"/>
-          </a:p>
-        </p:txBody>
-      </p:sp>
-      <p:sp>
-        <p:nvSpPr>
-          <p:cNvPr id="4" name="Text 2"/>
-          <p:cNvSpPr/>
-          <p:nvPr/>
-        </p:nvSpPr>
-        <p:spPr>
-          <a:xfrm>
-            <a:off x="822960" y="932688"/>
-            <a:ext cx="10607040" cy="640080"/>
-          </a:xfrm>
-          <a:prstGeom prst="rect">
-            <a:avLst/>
-          </a:prstGeom>
-          <a:noFill/>
-          <a:ln/>
-        </p:spPr>
-        <p:txBody>
-          <a:bodyPr wrap="square" rtlCol="0" anchor="ctr"/>
-          <a:lstStyle/>
-          <a:p>
-            <a:pPr indent="0" marL="0">
-              <a:buNone/>
-            </a:pPr>
-            <a:r>
-              <a:rPr lang="en-US" sz="3000" b="1" dirty="0">
-                <a:solidFill>
-                  <a:srgbClr val="E6EDF3"/>
-                </a:solidFill>
-                <a:latin typeface="Calibri" pitchFamily="34" charset="0"/>
-                <a:ea typeface="Calibri" pitchFamily="34" charset="-122"/>
-                <a:cs typeface="Calibri" pitchFamily="34" charset="-120"/>
-              </a:rPr>
-              <a:t>AI vs GenAI vs AI Agent vs Agentic AI</a:t>
-            </a:r>
-            <a:endParaRPr lang="en-US" sz="3000" dirty="0"/>
-          </a:p>
-        </p:txBody>
-      </p:sp>
-      <p:sp>
-        <p:nvSpPr>
-          <p:cNvPr id="5" name="Shape 3"/>
-          <p:cNvSpPr/>
-          <p:nvPr/>
-        </p:nvSpPr>
-        <p:spPr>
-          <a:xfrm>
-            <a:off x="822960" y="1755648"/>
-            <a:ext cx="10543032" cy="4297680"/>
-          </a:xfrm>
-          <a:prstGeom prst="roundRect">
-            <a:avLst>
-              <a:gd name="adj" fmla="val 1702"/>
-            </a:avLst>
-          </a:prstGeom>
-          <a:solidFill>
-            <a:srgbClr val="0B0F15"/>
-          </a:solidFill>
-          <a:ln w="15875">
-            <a:solidFill>
-              <a:srgbClr val="1F2937"/>
-            </a:solidFill>
-            <a:prstDash val="solid"/>
-          </a:ln>
-        </p:spPr>
-      </p:sp>
-      <p:pic>
-        <p:nvPicPr>
-          <p:cNvPr id="6" name="Image 0" descr="preencoded.png">    </p:cNvPr>
-          <p:cNvPicPr>
-            <a:picLocks noChangeAspect="1"/>
-          </p:cNvPicPr>
-          <p:nvPr/>
-        </p:nvPicPr>
-        <p:blipFill>
-          <a:blip r:embed="rId1"/>
-          <a:srcRect l="0" r="0" t="0" b="0"/>
-          <a:stretch/>
-        </p:blipFill>
-        <p:spPr>
-          <a:xfrm>
-            <a:off x="960120" y="1892808"/>
-            <a:ext cx="10268712" cy="4023360"/>
-          </a:xfrm>
-          <a:prstGeom prst="rect">
-            <a:avLst/>
-          </a:prstGeom>
-        </p:spPr>
-      </p:pic>
     </p:spTree>
   </p:cSld>
   <p:clrMapOvr>
@@ -13817,6 +14788,205 @@
         </p:nvSpPr>
         <p:spPr>
           <a:xfrm>
+            <a:off x="822960" y="932688"/>
+            <a:ext cx="10607040" cy="640080"/>
+          </a:xfrm>
+          <a:prstGeom prst="rect">
+            <a:avLst/>
+          </a:prstGeom>
+          <a:noFill/>
+          <a:ln/>
+        </p:spPr>
+        <p:txBody>
+          <a:bodyPr wrap="square" rtlCol="0" anchor="ctr"/>
+          <a:lstStyle/>
+          <a:p>
+            <a:pPr indent="0" marL="0">
+              <a:buNone/>
+            </a:pPr>
+            <a:r>
+              <a:rPr lang="en-US" sz="3000" b="1" dirty="0">
+                <a:solidFill>
+                  <a:srgbClr val="E6EDF3"/>
+                </a:solidFill>
+                <a:latin typeface="Calibri" pitchFamily="34" charset="0"/>
+                <a:ea typeface="Calibri" pitchFamily="34" charset="-122"/>
+                <a:cs typeface="Calibri" pitchFamily="34" charset="-120"/>
+              </a:rPr>
+              <a:t>AI vs GenAI vs AI Agent vs Agentic AI</a:t>
+            </a:r>
+            <a:endParaRPr lang="en-US" sz="3000" dirty="0"/>
+          </a:p>
+        </p:txBody>
+      </p:sp>
+      <p:sp>
+        <p:nvSpPr>
+          <p:cNvPr id="5" name="Shape 3"/>
+          <p:cNvSpPr/>
+          <p:nvPr/>
+        </p:nvSpPr>
+        <p:spPr>
+          <a:xfrm>
+            <a:off x="822960" y="1755648"/>
+            <a:ext cx="10543032" cy="4297680"/>
+          </a:xfrm>
+          <a:prstGeom prst="roundRect">
+            <a:avLst>
+              <a:gd name="adj" fmla="val 1702"/>
+            </a:avLst>
+          </a:prstGeom>
+          <a:solidFill>
+            <a:srgbClr val="0B0F15"/>
+          </a:solidFill>
+          <a:ln w="15875">
+            <a:solidFill>
+              <a:srgbClr val="1F2937"/>
+            </a:solidFill>
+            <a:prstDash val="solid"/>
+          </a:ln>
+        </p:spPr>
+      </p:sp>
+      <p:pic>
+        <p:nvPicPr>
+          <p:cNvPr id="6" name="Image 0" descr="preencoded.png">    </p:cNvPr>
+          <p:cNvPicPr>
+            <a:picLocks noChangeAspect="1"/>
+          </p:cNvPicPr>
+          <p:nvPr/>
+        </p:nvPicPr>
+        <p:blipFill>
+          <a:blip r:embed="rId1"/>
+          <a:srcRect l="0" r="0" t="0" b="0"/>
+          <a:stretch/>
+        </p:blipFill>
+        <p:spPr>
+          <a:xfrm>
+            <a:off x="960120" y="1892808"/>
+            <a:ext cx="10268712" cy="4023360"/>
+          </a:xfrm>
+          <a:prstGeom prst="rect">
+            <a:avLst/>
+          </a:prstGeom>
+        </p:spPr>
+      </p:pic>
+    </p:spTree>
+  </p:cSld>
+  <p:clrMapOvr>
+    <a:masterClrMapping/>
+  </p:clrMapOvr>
+</p:sld>
+</file>
+
+<file path=ppt/slides/slide9.xml><?xml version="1.0" encoding="utf-8"?>
+<p:sld xmlns:a="http://schemas.openxmlformats.org/drawingml/2006/main" xmlns:r="http://schemas.openxmlformats.org/officeDocument/2006/relationships" xmlns:p="http://schemas.openxmlformats.org/presentationml/2006/main">
+  <p:cSld name="Slide 9">
+    <p:bg>
+      <p:bgPr>
+        <a:solidFill>
+          <a:srgbClr val="0B0F15"/>
+        </a:solidFill>
+      </p:bgPr>
+    </p:bg>
+    <p:spTree>
+      <p:nvGrpSpPr>
+        <p:cNvPr id="1" name=""/>
+        <p:cNvGrpSpPr/>
+        <p:nvPr/>
+      </p:nvGrpSpPr>
+      <p:grpSpPr>
+        <a:xfrm>
+          <a:off x="0" y="0"/>
+          <a:ext cx="0" cy="0"/>
+          <a:chOff x="0" y="0"/>
+          <a:chExt cx="0" cy="0"/>
+        </a:xfrm>
+      </p:grpSpPr>
+      <p:sp>
+        <p:nvSpPr>
+          <p:cNvPr id="2" name="Text 0"/>
+          <p:cNvSpPr/>
+          <p:nvPr/>
+        </p:nvSpPr>
+        <p:spPr>
+          <a:xfrm>
+            <a:off x="822960" y="6446520"/>
+            <a:ext cx="5486400" cy="274320"/>
+          </a:xfrm>
+          <a:prstGeom prst="rect">
+            <a:avLst/>
+          </a:prstGeom>
+          <a:noFill/>
+          <a:ln/>
+        </p:spPr>
+        <p:txBody>
+          <a:bodyPr wrap="square" rtlCol="0" anchor="ctr"/>
+          <a:lstStyle/>
+          <a:p>
+            <a:pPr indent="0" marL="0">
+              <a:buNone/>
+            </a:pPr>
+            <a:r>
+              <a:rPr lang="en-US" sz="1100" spc="100" kern="0" dirty="0">
+                <a:solidFill>
+                  <a:srgbClr val="AAB4C0"/>
+                </a:solidFill>
+                <a:latin typeface="Calibri" pitchFamily="34" charset="0"/>
+                <a:ea typeface="Calibri" pitchFamily="34" charset="-122"/>
+                <a:cs typeface="Calibri" pitchFamily="34" charset="-120"/>
+              </a:rPr>
+              <a:t>arjunthakur.dev</a:t>
+            </a:r>
+            <a:endParaRPr lang="en-US" sz="1100" dirty="0"/>
+          </a:p>
+        </p:txBody>
+      </p:sp>
+      <p:sp>
+        <p:nvSpPr>
+          <p:cNvPr id="3" name="Text 1"/>
+          <p:cNvSpPr/>
+          <p:nvPr/>
+        </p:nvSpPr>
+        <p:spPr>
+          <a:xfrm>
+            <a:off x="822960" y="566928"/>
+            <a:ext cx="10515600" cy="365760"/>
+          </a:xfrm>
+          <a:prstGeom prst="rect">
+            <a:avLst/>
+          </a:prstGeom>
+          <a:noFill/>
+          <a:ln/>
+        </p:spPr>
+        <p:txBody>
+          <a:bodyPr wrap="square" rtlCol="0" anchor="ctr"/>
+          <a:lstStyle/>
+          <a:p>
+            <a:pPr indent="0" marL="0">
+              <a:buNone/>
+            </a:pPr>
+            <a:r>
+              <a:rPr lang="en-US" sz="1400" b="1" spc="400" kern="0" dirty="0">
+                <a:solidFill>
+                  <a:srgbClr val="22D3EE"/>
+                </a:solidFill>
+                <a:latin typeface="Calibri" pitchFamily="34" charset="0"/>
+                <a:ea typeface="Calibri" pitchFamily="34" charset="-122"/>
+                <a:cs typeface="Calibri" pitchFamily="34" charset="-120"/>
+              </a:rPr>
+              <a:t>MODULE 1 · CONCEPTS</a:t>
+            </a:r>
+            <a:endParaRPr lang="en-US" sz="1400" dirty="0"/>
+          </a:p>
+        </p:txBody>
+      </p:sp>
+      <p:sp>
+        <p:nvSpPr>
+          <p:cNvPr id="4" name="Text 2"/>
+          <p:cNvSpPr/>
+          <p:nvPr/>
+        </p:nvSpPr>
+        <p:spPr>
+          <a:xfrm>
             <a:off x="822960" y="950976"/>
             <a:ext cx="10607040" cy="640080"/>
           </a:xfrm>
@@ -13850,7 +15020,7 @@
       </p:sp>
       <p:graphicFrame>
         <p:nvGraphicFramePr>
-          <p:cNvPr id="9" name="Table 0"/>
+          <p:cNvPr id="10" name="Table 0"/>
           <p:cNvGraphicFramePr>
             <a:graphicFrameLocks noGrp="1"/>
           </p:cNvGraphicFramePr>
@@ -13876,7 +15046,7 @@
                 <a:gridCol w="1828800"/>
                 <a:gridCol w="3840480"/>
               </a:tblGrid>
-              <a:tr h="548640">
+              <a:tr h="502920">
                 <a:tc>
                   <a:txBody>
                     <a:bodyPr/>
@@ -14139,7 +15309,7 @@
                   </a:tcPr>
                 </a:tc>
               </a:tr>
-              <a:tr h="777240">
+              <a:tr h="731520">
                 <a:tc>
                   <a:txBody>
                     <a:bodyPr/>
@@ -14413,7 +15583,7 @@
                   </a:tcPr>
                 </a:tc>
               </a:tr>
-              <a:tr h="777240">
+              <a:tr h="731520">
                 <a:tc>
                   <a:txBody>
                     <a:bodyPr/>
@@ -14687,7 +15857,7 @@
                   </a:tcPr>
                 </a:tc>
               </a:tr>
-              <a:tr h="777240">
+              <a:tr h="731520">
                 <a:tc>
                   <a:txBody>
                     <a:bodyPr/>
@@ -14909,7 +16079,7 @@
                           <a:ea typeface="Calibri" pitchFamily="34" charset="-122"/>
                           <a:cs typeface="Calibri" pitchFamily="34" charset="-120"/>
                         </a:rPr>
-                        <a:t>Servo error → EN-77, ~6d</a:t>
+                        <a:t>Servo error -&gt; EN-77, ~6d</a:t>
                       </a:r>
                       <a:endParaRPr lang="en-US" sz="1400" dirty="0">
                         <a:latin typeface="Calibri" charset="0"/>
@@ -14961,7 +16131,7 @@
                   </a:tcPr>
                 </a:tc>
               </a:tr>
-              <a:tr h="777240">
+              <a:tr h="731520">
                 <a:tc>
                   <a:txBody>
                     <a:bodyPr/>
@@ -15183,7 +16353,7 @@
                           <a:ea typeface="Calibri" pitchFamily="34" charset="-122"/>
                           <a:cs typeface="Calibri" pitchFamily="34" charset="-120"/>
                         </a:rPr>
-                        <a:t>Predict → parts → maintenance</a:t>
+                        <a:t>Predict -&gt; parts -&gt; maintenance</a:t>
                       </a:r>
                       <a:endParaRPr lang="en-US" sz="1400" dirty="0">
                         <a:latin typeface="Calibri" charset="0"/>
@@ -15239,48 +16409,16 @@
           </a:graphicData>
         </a:graphic>
       </p:graphicFrame>
-    </p:spTree>
-  </p:cSld>
-  <p:clrMapOvr>
-    <a:masterClrMapping/>
-  </p:clrMapOvr>
-</p:sld>
-</file>
-
-<file path=ppt/slides/slide9.xml><?xml version="1.0" encoding="utf-8"?>
-<p:sld xmlns:a="http://schemas.openxmlformats.org/drawingml/2006/main" xmlns:r="http://schemas.openxmlformats.org/officeDocument/2006/relationships" xmlns:p="http://schemas.openxmlformats.org/presentationml/2006/main">
-  <p:cSld name="Slide 9">
-    <p:bg>
-      <p:bgPr>
-        <a:solidFill>
-          <a:srgbClr val="06090D"/>
-        </a:solidFill>
-      </p:bgPr>
-    </p:bg>
-    <p:spTree>
-      <p:nvGrpSpPr>
-        <p:cNvPr id="1" name=""/>
-        <p:cNvGrpSpPr/>
-        <p:nvPr/>
-      </p:nvGrpSpPr>
-      <p:grpSpPr>
-        <a:xfrm>
-          <a:off x="0" y="0"/>
-          <a:ext cx="0" cy="0"/>
-          <a:chOff x="0" y="0"/>
-          <a:chExt cx="0" cy="0"/>
-        </a:xfrm>
-      </p:grpSpPr>
-      <p:sp>
-        <p:nvSpPr>
-          <p:cNvPr id="2" name="Text 0"/>
-          <p:cNvSpPr/>
-          <p:nvPr/>
-        </p:nvSpPr>
-        <p:spPr>
-          <a:xfrm>
-            <a:off x="822960" y="6446520"/>
-            <a:ext cx="5486400" cy="274320"/>
+      <p:sp>
+        <p:nvSpPr>
+          <p:cNvPr id="6" name="Text 3"/>
+          <p:cNvSpPr/>
+          <p:nvPr/>
+        </p:nvSpPr>
+        <p:spPr>
+          <a:xfrm>
+            <a:off x="822960" y="5806440"/>
+            <a:ext cx="10515600" cy="457200"/>
           </a:xfrm>
           <a:prstGeom prst="rect">
             <a:avLst/>
@@ -15296,85 +16434,21 @@
               <a:buNone/>
             </a:pPr>
             <a:r>
-              <a:rPr lang="en-US" sz="1100" spc="100" kern="0" dirty="0">
-                <a:solidFill>
-                  <a:srgbClr val="AAB4C0"/>
-                </a:solidFill>
-                <a:latin typeface="Calibri" pitchFamily="34" charset="0"/>
-                <a:ea typeface="Calibri" pitchFamily="34" charset="-122"/>
-                <a:cs typeface="Calibri" pitchFamily="34" charset="-120"/>
-              </a:rPr>
-              <a:t>arjunthakur.dev</a:t>
-            </a:r>
-            <a:endParaRPr lang="en-US" sz="1100" dirty="0"/>
-          </a:p>
-        </p:txBody>
-      </p:sp>
-      <p:sp>
-        <p:nvSpPr>
-          <p:cNvPr id="3" name="Text 1"/>
-          <p:cNvSpPr/>
-          <p:nvPr/>
-        </p:nvSpPr>
-        <p:spPr>
-          <a:xfrm>
-            <a:off x="822960" y="1005840"/>
-            <a:ext cx="10515600" cy="365760"/>
-          </a:xfrm>
-          <a:prstGeom prst="rect">
-            <a:avLst/>
-          </a:prstGeom>
-          <a:noFill/>
-          <a:ln/>
-        </p:spPr>
-        <p:txBody>
-          <a:bodyPr wrap="square" rtlCol="0" anchor="ctr"/>
-          <a:lstStyle/>
-          <a:p>
-            <a:pPr indent="0" marL="0">
-              <a:buNone/>
-            </a:pPr>
-            <a:r>
-              <a:rPr lang="en-US" sz="1400" b="1" spc="400" kern="0" dirty="0">
-                <a:solidFill>
-                  <a:srgbClr val="22D3EE"/>
-                </a:solidFill>
-                <a:latin typeface="Calibri" pitchFamily="34" charset="0"/>
-                <a:ea typeface="Calibri" pitchFamily="34" charset="-122"/>
-                <a:cs typeface="Calibri" pitchFamily="34" charset="-120"/>
-              </a:rPr>
-              <a:t>Q &amp; A</a:t>
-            </a:r>
-            <a:endParaRPr lang="en-US" sz="1400" dirty="0"/>
-          </a:p>
-        </p:txBody>
-      </p:sp>
-      <p:sp>
-        <p:nvSpPr>
-          <p:cNvPr id="4" name="Text 2"/>
-          <p:cNvSpPr/>
-          <p:nvPr/>
-        </p:nvSpPr>
-        <p:spPr>
-          <a:xfrm>
-            <a:off x="822960" y="1371600"/>
-            <a:ext cx="10515600" cy="1097280"/>
-          </a:xfrm>
-          <a:prstGeom prst="rect">
-            <a:avLst/>
-          </a:prstGeom>
-          <a:noFill/>
-          <a:ln/>
-        </p:spPr>
-        <p:txBody>
-          <a:bodyPr wrap="square" rtlCol="0" anchor="ctr"/>
-          <a:lstStyle/>
-          <a:p>
-            <a:pPr indent="0" marL="0">
-              <a:buNone/>
-            </a:pPr>
-            <a:r>
-              <a:rPr lang="en-US" sz="5000" b="1" dirty="0">
+              <a:rPr lang="en-US" sz="1600" b="1" dirty="0">
+                <a:solidFill>
+                  <a:srgbClr val="F59E0B"/>
+                </a:solidFill>
+                <a:latin typeface="Calibri" pitchFamily="34" charset="0"/>
+                <a:ea typeface="Calibri" pitchFamily="34" charset="-122"/>
+                <a:cs typeface="Calibri" pitchFamily="34" charset="-120"/>
+              </a:rPr>
+              <a:t>Ask the room:  </a:t>
+            </a:r>
+            <a:pPr indent="0" marL="0">
+              <a:buNone/>
+            </a:pPr>
+            <a:r>
+              <a:rPr lang="en-US" sz="1600" i="1" dirty="0">
                 <a:solidFill>
                   <a:srgbClr val="E6EDF3"/>
                 </a:solidFill>
@@ -15382,99 +16456,9 @@
                 <a:ea typeface="Calibri" pitchFamily="34" charset="-122"/>
                 <a:cs typeface="Calibri" pitchFamily="34" charset="-120"/>
               </a:rPr>
-              <a:t>Concepts — questions</a:t>
-            </a:r>
-            <a:endParaRPr lang="en-US" sz="5000" dirty="0"/>
-          </a:p>
-        </p:txBody>
-      </p:sp>
-      <p:sp>
-        <p:nvSpPr>
-          <p:cNvPr id="5" name="Text 3"/>
-          <p:cNvSpPr/>
-          <p:nvPr/>
-        </p:nvSpPr>
-        <p:spPr>
-          <a:xfrm>
-            <a:off x="822960" y="2788920"/>
-            <a:ext cx="10515600" cy="2011680"/>
-          </a:xfrm>
-          <a:prstGeom prst="rect">
-            <a:avLst/>
-          </a:prstGeom>
-          <a:noFill/>
-          <a:ln/>
-        </p:spPr>
-        <p:txBody>
-          <a:bodyPr wrap="square" rtlCol="0" anchor="t"/>
-          <a:lstStyle/>
-          <a:p>
-            <a:pPr indent="0" marL="0">
-              <a:buNone/>
-            </a:pPr>
-            <a:r>
-              <a:rPr lang="en-US" sz="2000" b="1" dirty="0">
-                <a:solidFill>
-                  <a:srgbClr val="22D3EE"/>
-                </a:solidFill>
-                <a:latin typeface="Calibri" pitchFamily="34" charset="0"/>
-                <a:ea typeface="Calibri" pitchFamily="34" charset="-122"/>
-                <a:cs typeface="Calibri" pitchFamily="34" charset="-120"/>
-              </a:rPr>
-              <a:t>▸  </a:t>
-            </a:r>
-            <a:pPr indent="0" marL="0">
-              <a:spcAft>
-                <a:spcPts val="1600"/>
-              </a:spcAft>
-              <a:buNone/>
-            </a:pPr>
-            <a:r>
-              <a:rPr lang="en-US" sz="2000" dirty="0">
-                <a:solidFill>
-                  <a:srgbClr val="E6EDF3"/>
-                </a:solidFill>
-                <a:latin typeface="Calibri" pitchFamily="34" charset="0"/>
-                <a:ea typeface="Calibri" pitchFamily="34" charset="-122"/>
-                <a:cs typeface="Calibri" pitchFamily="34" charset="-120"/>
-              </a:rPr>
-              <a:t>Which of your tasks today is really just automation?</a:t>
-            </a:r>
-            <a:endParaRPr lang="en-US" sz="2000" dirty="0"/>
-          </a:p>
-          <a:p>
-            <a:pPr indent="0" marL="0">
-              <a:buNone/>
-            </a:pPr>
-            <a:r>
-              <a:rPr lang="en-US" sz="2000" b="1" dirty="0">
-                <a:solidFill>
-                  <a:srgbClr val="22D3EE"/>
-                </a:solidFill>
-                <a:latin typeface="Calibri" pitchFamily="34" charset="0"/>
-                <a:ea typeface="Calibri" pitchFamily="34" charset="-122"/>
-                <a:cs typeface="Calibri" pitchFamily="34" charset="-120"/>
-              </a:rPr>
-              <a:t>▸  </a:t>
-            </a:r>
-            <a:pPr indent="0" marL="0">
-              <a:spcAft>
-                <a:spcPts val="1600"/>
-              </a:spcAft>
-              <a:buNone/>
-            </a:pPr>
-            <a:r>
-              <a:rPr lang="en-US" sz="2000" dirty="0">
-                <a:solidFill>
-                  <a:srgbClr val="E6EDF3"/>
-                </a:solidFill>
-                <a:latin typeface="Calibri" pitchFamily="34" charset="0"/>
-                <a:ea typeface="Calibri" pitchFamily="34" charset="-122"/>
-                <a:cs typeface="Calibri" pitchFamily="34" charset="-120"/>
-              </a:rPr>
-              <a:t>Where would a decision (an agent) actually help?</a:t>
-            </a:r>
-            <a:endParaRPr lang="en-US" sz="2000" dirty="0"/>
+              <a:t>which of these are you already using without calling it "AI"?</a:t>
+            </a:r>
+            <a:endParaRPr lang="en-US" sz="1600" dirty="0"/>
           </a:p>
         </p:txBody>
       </p:sp>
